--- a/workshops/2026-06-29-purdue/Purdue_Workshop.pptx
+++ b/workshops/2026-06-29-purdue/Purdue_Workshop.pptx
@@ -5,7 +5,7 @@
     <p:sldMasterId id="2147483648" r:id="rId1"/>
   </p:sldMasterIdLst>
   <p:notesMasterIdLst>
-    <p:notesMasterId r:id="rId39"/>
+    <p:notesMasterId r:id="rId44"/>
   </p:notesMasterIdLst>
   <p:sldIdLst>
     <p:sldId id="256" r:id="rId2"/>
@@ -44,7 +44,12 @@
     <p:sldId id="276" r:id="rId35"/>
     <p:sldId id="300" r:id="rId36"/>
     <p:sldId id="278" r:id="rId37"/>
-    <p:sldId id="279" r:id="rId38"/>
+    <p:sldId id="303" r:id="rId38"/>
+    <p:sldId id="304" r:id="rId39"/>
+    <p:sldId id="305" r:id="rId40"/>
+    <p:sldId id="306" r:id="rId41"/>
+    <p:sldId id="307" r:id="rId42"/>
+    <p:sldId id="279" r:id="rId43"/>
   </p:sldIdLst>
   <p:sldSz cx="9144000" cy="5143500" type="screen16x9"/>
   <p:notesSz cx="6858000" cy="9144000"/>
@@ -2620,7 +2625,7 @@
           <a:p>
             <a:fld id="{CC4956B9-647A-4037-9FC9-E7553A40054A}" type="datetimeFigureOut">
               <a:rPr lang="en-US" smtClean="0"/>
-              <a:t>6/27/2026</a:t>
+              <a:t>6/28/2026</a:t>
             </a:fld>
             <a:endParaRPr lang="en-US"/>
           </a:p>
@@ -3058,6 +3063,330 @@
 </p:notes>
 </file>
 
+<file path=ppt/notesSlides/notesSlide11.xml><?xml version="1.0" encoding="utf-8"?>
+<p:notes xmlns:a="http://schemas.openxmlformats.org/drawingml/2006/main" xmlns:r="http://schemas.openxmlformats.org/officeDocument/2006/relationships" xmlns:p="http://schemas.openxmlformats.org/presentationml/2006/main">
+  <p:cSld>
+    <p:spTree>
+      <p:nvGrpSpPr>
+        <p:cNvPr id="1" name="">
+          <a:extLst>
+            <a:ext uri="{FF2B5EF4-FFF2-40B4-BE49-F238E27FC236}">
+              <a16:creationId xmlns:a16="http://schemas.microsoft.com/office/drawing/2014/main" id="{2047E5C7-3FE3-59F5-4829-1C15F3239782}"/>
+            </a:ext>
+          </a:extLst>
+        </p:cNvPr>
+        <p:cNvGrpSpPr/>
+        <p:nvPr/>
+      </p:nvGrpSpPr>
+      <p:grpSpPr>
+        <a:xfrm>
+          <a:off x="0" y="0"/>
+          <a:ext cx="0" cy="0"/>
+          <a:chOff x="0" y="0"/>
+          <a:chExt cx="0" cy="0"/>
+        </a:xfrm>
+      </p:grpSpPr>
+      <p:sp>
+        <p:nvSpPr>
+          <p:cNvPr id="2" name="Slide Image Placeholder 1">
+            <a:extLst>
+              <a:ext uri="{FF2B5EF4-FFF2-40B4-BE49-F238E27FC236}">
+                <a16:creationId xmlns:a16="http://schemas.microsoft.com/office/drawing/2014/main" id="{4C95D1E7-E10A-1529-AE3C-8BC7CEAC01AE}"/>
+              </a:ext>
+            </a:extLst>
+          </p:cNvPr>
+          <p:cNvSpPr>
+            <a:spLocks noGrp="1" noRot="1" noChangeAspect="1"/>
+          </p:cNvSpPr>
+          <p:nvPr>
+            <p:ph type="sldImg"/>
+          </p:nvPr>
+        </p:nvSpPr>
+        <p:spPr/>
+      </p:sp>
+      <p:sp>
+        <p:nvSpPr>
+          <p:cNvPr id="3" name="Notes Placeholder 2">
+            <a:extLst>
+              <a:ext uri="{FF2B5EF4-FFF2-40B4-BE49-F238E27FC236}">
+                <a16:creationId xmlns:a16="http://schemas.microsoft.com/office/drawing/2014/main" id="{8E5B71BB-1FE7-F1F2-B8FD-DDCB457D6ECD}"/>
+              </a:ext>
+            </a:extLst>
+          </p:cNvPr>
+          <p:cNvSpPr>
+            <a:spLocks noGrp="1"/>
+          </p:cNvSpPr>
+          <p:nvPr>
+            <p:ph type="body" idx="1"/>
+          </p:nvPr>
+        </p:nvSpPr>
+        <p:spPr/>
+        <p:txBody>
+          <a:bodyPr/>
+          <a:lstStyle/>
+          <a:p>
+            <a:endParaRPr lang="en-US" dirty="0"/>
+          </a:p>
+        </p:txBody>
+      </p:sp>
+      <p:sp>
+        <p:nvSpPr>
+          <p:cNvPr id="4" name="Slide Number Placeholder 3">
+            <a:extLst>
+              <a:ext uri="{FF2B5EF4-FFF2-40B4-BE49-F238E27FC236}">
+                <a16:creationId xmlns:a16="http://schemas.microsoft.com/office/drawing/2014/main" id="{BA41AC07-5749-B5ED-C0FE-BC847DF86BA5}"/>
+              </a:ext>
+            </a:extLst>
+          </p:cNvPr>
+          <p:cNvSpPr>
+            <a:spLocks noGrp="1"/>
+          </p:cNvSpPr>
+          <p:nvPr>
+            <p:ph type="sldNum" sz="quarter" idx="10"/>
+          </p:nvPr>
+        </p:nvSpPr>
+        <p:spPr/>
+        <p:txBody>
+          <a:bodyPr/>
+          <a:lstStyle/>
+          <a:p>
+            <a:fld id="{F7021451-1387-4CA6-816F-3879F97B5CBC}" type="slidenum">
+              <a:rPr lang="en-US"/>
+              <a:t>39</a:t>
+            </a:fld>
+            <a:endParaRPr lang="en-US"/>
+          </a:p>
+        </p:txBody>
+      </p:sp>
+    </p:spTree>
+    <p:extLst>
+      <p:ext uri="{BB962C8B-B14F-4D97-AF65-F5344CB8AC3E}">
+        <p14:creationId xmlns:p14="http://schemas.microsoft.com/office/powerpoint/2010/main" val="2269063511"/>
+      </p:ext>
+    </p:extLst>
+  </p:cSld>
+  <p:clrMapOvr>
+    <a:masterClrMapping/>
+  </p:clrMapOvr>
+</p:notes>
+</file>
+
+<file path=ppt/notesSlides/notesSlide12.xml><?xml version="1.0" encoding="utf-8"?>
+<p:notes xmlns:a="http://schemas.openxmlformats.org/drawingml/2006/main" xmlns:r="http://schemas.openxmlformats.org/officeDocument/2006/relationships" xmlns:p="http://schemas.openxmlformats.org/presentationml/2006/main">
+  <p:cSld>
+    <p:spTree>
+      <p:nvGrpSpPr>
+        <p:cNvPr id="1" name="">
+          <a:extLst>
+            <a:ext uri="{FF2B5EF4-FFF2-40B4-BE49-F238E27FC236}">
+              <a16:creationId xmlns:a16="http://schemas.microsoft.com/office/drawing/2014/main" id="{ECF84637-6AAD-423E-0B65-9DFCE64BC79F}"/>
+            </a:ext>
+          </a:extLst>
+        </p:cNvPr>
+        <p:cNvGrpSpPr/>
+        <p:nvPr/>
+      </p:nvGrpSpPr>
+      <p:grpSpPr>
+        <a:xfrm>
+          <a:off x="0" y="0"/>
+          <a:ext cx="0" cy="0"/>
+          <a:chOff x="0" y="0"/>
+          <a:chExt cx="0" cy="0"/>
+        </a:xfrm>
+      </p:grpSpPr>
+      <p:sp>
+        <p:nvSpPr>
+          <p:cNvPr id="2" name="Slide Image Placeholder 1">
+            <a:extLst>
+              <a:ext uri="{FF2B5EF4-FFF2-40B4-BE49-F238E27FC236}">
+                <a16:creationId xmlns:a16="http://schemas.microsoft.com/office/drawing/2014/main" id="{33A8C43E-5A51-AF16-631B-F012B0970C6B}"/>
+              </a:ext>
+            </a:extLst>
+          </p:cNvPr>
+          <p:cNvSpPr>
+            <a:spLocks noGrp="1" noRot="1" noChangeAspect="1"/>
+          </p:cNvSpPr>
+          <p:nvPr>
+            <p:ph type="sldImg"/>
+          </p:nvPr>
+        </p:nvSpPr>
+        <p:spPr/>
+      </p:sp>
+      <p:sp>
+        <p:nvSpPr>
+          <p:cNvPr id="3" name="Notes Placeholder 2">
+            <a:extLst>
+              <a:ext uri="{FF2B5EF4-FFF2-40B4-BE49-F238E27FC236}">
+                <a16:creationId xmlns:a16="http://schemas.microsoft.com/office/drawing/2014/main" id="{FAFD56E7-DF9B-445B-0DC1-25D4DA55BA96}"/>
+              </a:ext>
+            </a:extLst>
+          </p:cNvPr>
+          <p:cNvSpPr>
+            <a:spLocks noGrp="1"/>
+          </p:cNvSpPr>
+          <p:nvPr>
+            <p:ph type="body" idx="1"/>
+          </p:nvPr>
+        </p:nvSpPr>
+        <p:spPr/>
+        <p:txBody>
+          <a:bodyPr/>
+          <a:lstStyle/>
+          <a:p>
+            <a:endParaRPr lang="en-US" dirty="0"/>
+          </a:p>
+        </p:txBody>
+      </p:sp>
+      <p:sp>
+        <p:nvSpPr>
+          <p:cNvPr id="4" name="Slide Number Placeholder 3">
+            <a:extLst>
+              <a:ext uri="{FF2B5EF4-FFF2-40B4-BE49-F238E27FC236}">
+                <a16:creationId xmlns:a16="http://schemas.microsoft.com/office/drawing/2014/main" id="{D9037EF8-CD1F-FCFB-4828-7BEAD2567EC7}"/>
+              </a:ext>
+            </a:extLst>
+          </p:cNvPr>
+          <p:cNvSpPr>
+            <a:spLocks noGrp="1"/>
+          </p:cNvSpPr>
+          <p:nvPr>
+            <p:ph type="sldNum" sz="quarter" idx="10"/>
+          </p:nvPr>
+        </p:nvSpPr>
+        <p:spPr/>
+        <p:txBody>
+          <a:bodyPr/>
+          <a:lstStyle/>
+          <a:p>
+            <a:fld id="{F7021451-1387-4CA6-816F-3879F97B5CBC}" type="slidenum">
+              <a:rPr lang="en-US"/>
+              <a:t>40</a:t>
+            </a:fld>
+            <a:endParaRPr lang="en-US"/>
+          </a:p>
+        </p:txBody>
+      </p:sp>
+    </p:spTree>
+    <p:extLst>
+      <p:ext uri="{BB962C8B-B14F-4D97-AF65-F5344CB8AC3E}">
+        <p14:creationId xmlns:p14="http://schemas.microsoft.com/office/powerpoint/2010/main" val="2946646400"/>
+      </p:ext>
+    </p:extLst>
+  </p:cSld>
+  <p:clrMapOvr>
+    <a:masterClrMapping/>
+  </p:clrMapOvr>
+</p:notes>
+</file>
+
+<file path=ppt/notesSlides/notesSlide13.xml><?xml version="1.0" encoding="utf-8"?>
+<p:notes xmlns:a="http://schemas.openxmlformats.org/drawingml/2006/main" xmlns:r="http://schemas.openxmlformats.org/officeDocument/2006/relationships" xmlns:p="http://schemas.openxmlformats.org/presentationml/2006/main">
+  <p:cSld>
+    <p:spTree>
+      <p:nvGrpSpPr>
+        <p:cNvPr id="1" name="">
+          <a:extLst>
+            <a:ext uri="{FF2B5EF4-FFF2-40B4-BE49-F238E27FC236}">
+              <a16:creationId xmlns:a16="http://schemas.microsoft.com/office/drawing/2014/main" id="{7B24D793-0F8D-311E-F42F-457F41FD9FDF}"/>
+            </a:ext>
+          </a:extLst>
+        </p:cNvPr>
+        <p:cNvGrpSpPr/>
+        <p:nvPr/>
+      </p:nvGrpSpPr>
+      <p:grpSpPr>
+        <a:xfrm>
+          <a:off x="0" y="0"/>
+          <a:ext cx="0" cy="0"/>
+          <a:chOff x="0" y="0"/>
+          <a:chExt cx="0" cy="0"/>
+        </a:xfrm>
+      </p:grpSpPr>
+      <p:sp>
+        <p:nvSpPr>
+          <p:cNvPr id="2" name="Slide Image Placeholder 1">
+            <a:extLst>
+              <a:ext uri="{FF2B5EF4-FFF2-40B4-BE49-F238E27FC236}">
+                <a16:creationId xmlns:a16="http://schemas.microsoft.com/office/drawing/2014/main" id="{43345BDF-3583-7C5A-E261-EBFB37757B55}"/>
+              </a:ext>
+            </a:extLst>
+          </p:cNvPr>
+          <p:cNvSpPr>
+            <a:spLocks noGrp="1" noRot="1" noChangeAspect="1"/>
+          </p:cNvSpPr>
+          <p:nvPr>
+            <p:ph type="sldImg"/>
+          </p:nvPr>
+        </p:nvSpPr>
+        <p:spPr/>
+      </p:sp>
+      <p:sp>
+        <p:nvSpPr>
+          <p:cNvPr id="3" name="Notes Placeholder 2">
+            <a:extLst>
+              <a:ext uri="{FF2B5EF4-FFF2-40B4-BE49-F238E27FC236}">
+                <a16:creationId xmlns:a16="http://schemas.microsoft.com/office/drawing/2014/main" id="{2F39239C-96A9-E9A4-DCDA-6BF133541474}"/>
+              </a:ext>
+            </a:extLst>
+          </p:cNvPr>
+          <p:cNvSpPr>
+            <a:spLocks noGrp="1"/>
+          </p:cNvSpPr>
+          <p:nvPr>
+            <p:ph type="body" idx="1"/>
+          </p:nvPr>
+        </p:nvSpPr>
+        <p:spPr/>
+        <p:txBody>
+          <a:bodyPr/>
+          <a:lstStyle/>
+          <a:p>
+            <a:endParaRPr lang="en-US" dirty="0"/>
+          </a:p>
+        </p:txBody>
+      </p:sp>
+      <p:sp>
+        <p:nvSpPr>
+          <p:cNvPr id="4" name="Slide Number Placeholder 3">
+            <a:extLst>
+              <a:ext uri="{FF2B5EF4-FFF2-40B4-BE49-F238E27FC236}">
+                <a16:creationId xmlns:a16="http://schemas.microsoft.com/office/drawing/2014/main" id="{3D104E7C-5FA9-0248-6B9A-8D2219EB8D24}"/>
+              </a:ext>
+            </a:extLst>
+          </p:cNvPr>
+          <p:cNvSpPr>
+            <a:spLocks noGrp="1"/>
+          </p:cNvSpPr>
+          <p:nvPr>
+            <p:ph type="sldNum" sz="quarter" idx="10"/>
+          </p:nvPr>
+        </p:nvSpPr>
+        <p:spPr/>
+        <p:txBody>
+          <a:bodyPr/>
+          <a:lstStyle/>
+          <a:p>
+            <a:fld id="{F7021451-1387-4CA6-816F-3879F97B5CBC}" type="slidenum">
+              <a:rPr lang="en-US"/>
+              <a:t>41</a:t>
+            </a:fld>
+            <a:endParaRPr lang="en-US"/>
+          </a:p>
+        </p:txBody>
+      </p:sp>
+    </p:spTree>
+    <p:extLst>
+      <p:ext uri="{BB962C8B-B14F-4D97-AF65-F5344CB8AC3E}">
+        <p14:creationId xmlns:p14="http://schemas.microsoft.com/office/powerpoint/2010/main" val="276591484"/>
+      </p:ext>
+    </p:extLst>
+  </p:cSld>
+  <p:clrMapOvr>
+    <a:masterClrMapping/>
+  </p:clrMapOvr>
+</p:notes>
+</file>
+
 <file path=ppt/notesSlides/notesSlide2.xml><?xml version="1.0" encoding="utf-8"?>
 <p:notes xmlns:a="http://schemas.openxmlformats.org/drawingml/2006/main" xmlns:r="http://schemas.openxmlformats.org/officeDocument/2006/relationships" xmlns:p="http://schemas.openxmlformats.org/presentationml/2006/main">
   <p:cSld>
@@ -4065,7 +4394,7 @@
           <a:p>
             <a:fld id="{8F42D1CD-6AB1-4632-BD93-8036A9CEFF23}" type="datetime1">
               <a:rPr lang="en-US" smtClean="0"/>
-              <a:t>6/27/2026</a:t>
+              <a:t>6/28/2026</a:t>
             </a:fld>
             <a:endParaRPr lang="en-US"/>
           </a:p>
@@ -4233,7 +4562,7 @@
           <a:p>
             <a:fld id="{ADE0D227-684F-4C4A-9180-D6AC381CF6A0}" type="datetime1">
               <a:rPr lang="en-US" smtClean="0"/>
-              <a:t>6/27/2026</a:t>
+              <a:t>6/28/2026</a:t>
             </a:fld>
             <a:endParaRPr lang="en-US"/>
           </a:p>
@@ -4411,7 +4740,7 @@
           <a:p>
             <a:fld id="{9188DED5-2788-4AF6-8CD2-D9EF3324F112}" type="datetime1">
               <a:rPr lang="en-US" smtClean="0"/>
-              <a:t>6/27/2026</a:t>
+              <a:t>6/28/2026</a:t>
             </a:fld>
             <a:endParaRPr lang="en-US"/>
           </a:p>
@@ -4463,6 +4792,41 @@
     <p:extLst>
       <p:ext uri="{BB962C8B-B14F-4D97-AF65-F5344CB8AC3E}">
         <p14:creationId xmlns:p14="http://schemas.microsoft.com/office/powerpoint/2010/main" val="3612223792"/>
+      </p:ext>
+    </p:extLst>
+  </p:cSld>
+  <p:clrMapOvr>
+    <a:masterClrMapping/>
+  </p:clrMapOvr>
+</p:sldLayout>
+</file>
+
+<file path=ppt/slideLayouts/slideLayout12.xml><?xml version="1.0" encoding="utf-8"?>
+<p:sldLayout xmlns:a="http://schemas.openxmlformats.org/drawingml/2006/main" xmlns:r="http://schemas.openxmlformats.org/officeDocument/2006/relationships" xmlns:p="http://schemas.openxmlformats.org/presentationml/2006/main">
+  <p:cSld name="DEFAULT">
+    <p:bg>
+      <p:bgRef idx="1001">
+        <a:schemeClr val="bg1"/>
+      </p:bgRef>
+    </p:bg>
+    <p:spTree>
+      <p:nvGrpSpPr>
+        <p:cNvPr id="1" name=""/>
+        <p:cNvGrpSpPr/>
+        <p:nvPr/>
+      </p:nvGrpSpPr>
+      <p:grpSpPr>
+        <a:xfrm>
+          <a:off x="0" y="0"/>
+          <a:ext cx="0" cy="0"/>
+          <a:chOff x="0" y="0"/>
+          <a:chExt cx="0" cy="0"/>
+        </a:xfrm>
+      </p:grpSpPr>
+    </p:spTree>
+    <p:extLst>
+      <p:ext uri="{BB962C8B-B14F-4D97-AF65-F5344CB8AC3E}">
+        <p14:creationId xmlns:p14="http://schemas.microsoft.com/office/powerpoint/2010/main" val="1198141458"/>
       </p:ext>
     </p:extLst>
   </p:cSld>
@@ -4579,7 +4943,7 @@
           <a:p>
             <a:fld id="{3D00EA7E-9CA4-48E5-AE0F-8EB3D9C4CEFB}" type="datetime1">
               <a:rPr lang="en-US" smtClean="0"/>
-              <a:t>6/27/2026</a:t>
+              <a:t>6/28/2026</a:t>
             </a:fld>
             <a:endParaRPr lang="en-US"/>
           </a:p>
@@ -4824,7 +5188,7 @@
           <a:p>
             <a:fld id="{F4F74363-77CA-4138-8286-11DFC9A682A9}" type="datetime1">
               <a:rPr lang="en-US" smtClean="0"/>
-              <a:t>6/27/2026</a:t>
+              <a:t>6/28/2026</a:t>
             </a:fld>
             <a:endParaRPr lang="en-US"/>
           </a:p>
@@ -5109,7 +5473,7 @@
           <a:p>
             <a:fld id="{BB3B3468-378A-4E8F-A396-A32E33B2EC7F}" type="datetime1">
               <a:rPr lang="en-US" smtClean="0"/>
-              <a:t>6/27/2026</a:t>
+              <a:t>6/28/2026</a:t>
             </a:fld>
             <a:endParaRPr lang="en-US"/>
           </a:p>
@@ -5528,7 +5892,7 @@
           <a:p>
             <a:fld id="{4910099B-0CB6-4B47-A9FE-5D03141F6A59}" type="datetime1">
               <a:rPr lang="en-US" smtClean="0"/>
-              <a:t>6/27/2026</a:t>
+              <a:t>6/28/2026</a:t>
             </a:fld>
             <a:endParaRPr lang="en-US"/>
           </a:p>
@@ -5645,7 +6009,7 @@
           <a:p>
             <a:fld id="{E4A6B215-2DC8-464E-9BB9-CCDF4BAF4AAD}" type="datetime1">
               <a:rPr lang="en-US" smtClean="0"/>
-              <a:t>6/27/2026</a:t>
+              <a:t>6/28/2026</a:t>
             </a:fld>
             <a:endParaRPr lang="en-US"/>
           </a:p>
@@ -5740,7 +6104,7 @@
           <a:p>
             <a:fld id="{15234634-A279-4D99-8043-05016171F086}" type="datetime1">
               <a:rPr lang="en-US" smtClean="0"/>
-              <a:t>6/27/2026</a:t>
+              <a:t>6/28/2026</a:t>
             </a:fld>
             <a:endParaRPr lang="en-US"/>
           </a:p>
@@ -6015,7 +6379,7 @@
           <a:p>
             <a:fld id="{FEA4EEF5-1E0F-4E32-85A6-DE84C2FE1F72}" type="datetime1">
               <a:rPr lang="en-US" smtClean="0"/>
-              <a:t>6/27/2026</a:t>
+              <a:t>6/28/2026</a:t>
             </a:fld>
             <a:endParaRPr lang="en-US"/>
           </a:p>
@@ -6267,7 +6631,7 @@
           <a:p>
             <a:fld id="{972AC6DC-4DE5-4950-9546-1509DD61DC9D}" type="datetime1">
               <a:rPr lang="en-US" smtClean="0"/>
-              <a:t>6/27/2026</a:t>
+              <a:t>6/28/2026</a:t>
             </a:fld>
             <a:endParaRPr lang="en-US"/>
           </a:p>
@@ -6478,7 +6842,7 @@
           <a:p>
             <a:fld id="{E8540504-DADD-4441-A07E-1EAA97398A05}" type="datetime1">
               <a:rPr lang="en-US" smtClean="0"/>
-              <a:t>6/27/2026</a:t>
+              <a:t>6/28/2026</a:t>
             </a:fld>
             <a:endParaRPr lang="en-US"/>
           </a:p>
@@ -6582,6 +6946,7 @@
     <p:sldLayoutId id="2147483657" r:id="rId9"/>
     <p:sldLayoutId id="2147483658" r:id="rId10"/>
     <p:sldLayoutId id="2147483659" r:id="rId11"/>
+    <p:sldLayoutId id="2147483660" r:id="rId12"/>
   </p:sldLayoutIdLst>
   <p:hf hdr="0" ftr="0" dt="0"/>
   <p:txStyles>
@@ -7398,7 +7763,15 @@
                   <a:schemeClr val="tx1"/>
                 </a:solidFill>
               </a:rPr>
-              <a:t>Design and constructions are different phases.</a:t>
+              <a:t>Constructions are </a:t>
+            </a:r>
+            <a:r>
+              <a:rPr lang="en-US" sz="1600" b="1" dirty="0">
+                <a:solidFill>
+                  <a:schemeClr val="tx1"/>
+                </a:solidFill>
+              </a:rPr>
+              <a:t>robust to tiny errors.</a:t>
             </a:r>
           </a:p>
           <a:p>
@@ -7512,7 +7885,23 @@
                   <a:schemeClr val="tx1"/>
                 </a:solidFill>
               </a:rPr>
-              <a:t>Design and constructions are “the same phase”.</a:t>
+              <a:t>Software is </a:t>
+            </a:r>
+            <a:r>
+              <a:rPr lang="en-US" sz="1600" b="1" dirty="0">
+                <a:solidFill>
+                  <a:schemeClr val="tx1"/>
+                </a:solidFill>
+              </a:rPr>
+              <a:t>incredible flexible and fragile </a:t>
+            </a:r>
+            <a:r>
+              <a:rPr lang="en-US" sz="1600" dirty="0">
+                <a:solidFill>
+                  <a:schemeClr val="tx1"/>
+                </a:solidFill>
+              </a:rPr>
+              <a:t>at the same time.</a:t>
             </a:r>
           </a:p>
           <a:p>
@@ -22647,6 +23036,51 @@
                                           </p:stCondLst>
                                         </p:cTn>
                                         <p:tgtEl>
+                                          <p:spTgt spid="23"/>
+                                        </p:tgtEl>
+                                        <p:attrNameLst>
+                                          <p:attrName>style.visibility</p:attrName>
+                                        </p:attrNameLst>
+                                      </p:cBhvr>
+                                      <p:to>
+                                        <p:strVal val="visible"/>
+                                      </p:to>
+                                    </p:set>
+                                  </p:childTnLst>
+                                </p:cTn>
+                              </p:par>
+                            </p:childTnLst>
+                          </p:cTn>
+                        </p:par>
+                      </p:childTnLst>
+                    </p:cTn>
+                  </p:par>
+                  <p:par>
+                    <p:cTn id="7" fill="hold">
+                      <p:stCondLst>
+                        <p:cond delay="indefinite"/>
+                      </p:stCondLst>
+                      <p:childTnLst>
+                        <p:par>
+                          <p:cTn id="8" fill="hold">
+                            <p:stCondLst>
+                              <p:cond delay="0"/>
+                            </p:stCondLst>
+                            <p:childTnLst>
+                              <p:par>
+                                <p:cTn id="9" presetID="1" presetClass="entr" presetSubtype="0" fill="hold" grpId="0" nodeType="clickEffect">
+                                  <p:stCondLst>
+                                    <p:cond delay="0"/>
+                                  </p:stCondLst>
+                                  <p:childTnLst>
+                                    <p:set>
+                                      <p:cBhvr>
+                                        <p:cTn id="10" dur="1" fill="hold">
+                                          <p:stCondLst>
+                                            <p:cond delay="0"/>
+                                          </p:stCondLst>
+                                        </p:cTn>
+                                        <p:tgtEl>
                                           <p:spTgt spid="25"/>
                                         </p:tgtEl>
                                         <p:attrNameLst>
@@ -22688,6 +23122,7 @@
       </p:par>
     </p:tnLst>
     <p:bldLst>
+      <p:bldP spid="23" grpId="0" animBg="1"/>
       <p:bldP spid="25" grpId="0" animBg="1"/>
     </p:bldLst>
   </p:timing>
@@ -22920,17 +23355,15 @@
 <file path=ppt/slides/slide37.xml><?xml version="1.0" encoding="utf-8"?>
 <p:sld xmlns:a="http://schemas.openxmlformats.org/drawingml/2006/main" xmlns:r="http://schemas.openxmlformats.org/officeDocument/2006/relationships" xmlns:p="http://schemas.openxmlformats.org/presentationml/2006/main">
   <p:cSld>
-    <p:bg>
-      <p:bgPr>
-        <a:solidFill>
-          <a:srgbClr val="F8F9FA"/>
-        </a:solidFill>
-        <a:effectLst/>
-      </p:bgPr>
-    </p:bg>
     <p:spTree>
       <p:nvGrpSpPr>
-        <p:cNvPr id="1" name=""/>
+        <p:cNvPr id="1" name="">
+          <a:extLst>
+            <a:ext uri="{FF2B5EF4-FFF2-40B4-BE49-F238E27FC236}">
+              <a16:creationId xmlns:a16="http://schemas.microsoft.com/office/drawing/2014/main" id="{F790C5B6-68D0-4F84-6D71-7D29692A82B3}"/>
+            </a:ext>
+          </a:extLst>
+        </p:cNvPr>
         <p:cNvGrpSpPr/>
         <p:nvPr/>
       </p:nvGrpSpPr>
@@ -22944,14 +23377,20 @@
       </p:grpSpPr>
       <p:sp>
         <p:nvSpPr>
-          <p:cNvPr id="2" name="TextBox 1"/>
+          <p:cNvPr id="2" name="TextBox 1">
+            <a:extLst>
+              <a:ext uri="{FF2B5EF4-FFF2-40B4-BE49-F238E27FC236}">
+                <a16:creationId xmlns:a16="http://schemas.microsoft.com/office/drawing/2014/main" id="{A3C3A15F-C5EA-6B68-C963-B0E794C24BEA}"/>
+              </a:ext>
+            </a:extLst>
+          </p:cNvPr>
           <p:cNvSpPr txBox="1"/>
           <p:nvPr/>
         </p:nvSpPr>
         <p:spPr>
           <a:xfrm>
-            <a:off x="388620" y="365760"/>
-            <a:ext cx="8229600" cy="1097280"/>
+            <a:off x="457200" y="274320"/>
+            <a:ext cx="8229600" cy="553998"/>
           </a:xfrm>
           <a:prstGeom prst="rect">
             <a:avLst/>
@@ -22966,26 +23405,38 @@
           <a:p>
             <a:pPr algn="l"/>
             <a:r>
-              <a:rPr sz="6000" b="1" i="0" dirty="0">
+              <a:rPr lang="en-US" sz="3000" b="1" i="0" dirty="0">
                 <a:solidFill>
                   <a:srgbClr val="0A1628"/>
                 </a:solidFill>
                 <a:latin typeface="Calibri"/>
               </a:rPr>
-              <a:t>Thank you</a:t>
-            </a:r>
-          </a:p>
-        </p:txBody>
-      </p:sp>
-      <p:sp>
-        <p:nvSpPr>
-          <p:cNvPr id="3" name="Rectangle 2"/>
+              <a:t>What is SEFOP?</a:t>
+            </a:r>
+            <a:endParaRPr sz="3000" b="1" i="0" dirty="0">
+              <a:solidFill>
+                <a:srgbClr val="0A1628"/>
+              </a:solidFill>
+              <a:latin typeface="Calibri"/>
+            </a:endParaRPr>
+          </a:p>
+        </p:txBody>
+      </p:sp>
+      <p:sp>
+        <p:nvSpPr>
+          <p:cNvPr id="3" name="Rectangle 2">
+            <a:extLst>
+              <a:ext uri="{FF2B5EF4-FFF2-40B4-BE49-F238E27FC236}">
+                <a16:creationId xmlns:a16="http://schemas.microsoft.com/office/drawing/2014/main" id="{B8D5BD19-3904-B12A-74D3-88B7D646AF8D}"/>
+              </a:ext>
+            </a:extLst>
+          </p:cNvPr>
           <p:cNvSpPr/>
           <p:nvPr/>
         </p:nvSpPr>
         <p:spPr>
           <a:xfrm>
-            <a:off x="388620" y="1554480"/>
+            <a:off x="457200" y="987552"/>
             <a:ext cx="8229600" cy="36576"/>
           </a:xfrm>
           <a:prstGeom prst="rect">
@@ -23026,7 +23477,7 @@
           <p:cNvPr id="5" name="Slide Number Placeholder 4">
             <a:extLst>
               <a:ext uri="{FF2B5EF4-FFF2-40B4-BE49-F238E27FC236}">
-                <a16:creationId xmlns:a16="http://schemas.microsoft.com/office/drawing/2014/main" id="{36465BAB-B7AA-9168-ED59-AC2585533C72}"/>
+                <a16:creationId xmlns:a16="http://schemas.microsoft.com/office/drawing/2014/main" id="{6AED6E44-D905-9AE6-4AAD-C52F23A773F9}"/>
               </a:ext>
             </a:extLst>
           </p:cNvPr>
@@ -23052,10 +23503,10 @@
       </p:sp>
       <p:sp>
         <p:nvSpPr>
-          <p:cNvPr id="7" name="TextBox 6">
+          <p:cNvPr id="4" name="TextBox 3">
             <a:extLst>
               <a:ext uri="{FF2B5EF4-FFF2-40B4-BE49-F238E27FC236}">
-                <a16:creationId xmlns:a16="http://schemas.microsoft.com/office/drawing/2014/main" id="{167FC925-3049-5023-F37C-B488F0DDAD12}"/>
+                <a16:creationId xmlns:a16="http://schemas.microsoft.com/office/drawing/2014/main" id="{B56E8B3D-ED6A-72EC-4901-CEAA081B32F6}"/>
               </a:ext>
             </a:extLst>
           </p:cNvPr>
@@ -23064,8 +23515,8 @@
         </p:nvSpPr>
         <p:spPr>
           <a:xfrm>
-            <a:off x="441960" y="2950686"/>
-            <a:ext cx="4572000" cy="369332"/>
+            <a:off x="457200" y="1193753"/>
+            <a:ext cx="8046720" cy="3477875"/>
           </a:xfrm>
           <a:prstGeom prst="rect">
             <a:avLst/>
@@ -23078,25 +23529,700 @@
           </a:bodyPr>
           <a:lstStyle/>
           <a:p>
-            <a:r>
-              <a:rPr lang="en-US" dirty="0">
-                <a:hlinkClick r:id="rId2"/>
-              </a:rPr>
-              <a:t>https://forms.gle/Ajp2wa3kgcDhyGDW7</a:t>
-            </a:r>
-            <a:r>
-              <a:rPr lang="en-US" dirty="0"/>
-              <a:t> </a:t>
-            </a:r>
-          </a:p>
-        </p:txBody>
-      </p:sp>
-      <p:sp>
-        <p:nvSpPr>
-          <p:cNvPr id="9" name="TextBox 8">
+            <a:pPr algn="l"/>
+            <a:r>
+              <a:rPr lang="en-US" sz="2000" b="1" i="0" dirty="0">
+                <a:solidFill>
+                  <a:srgbClr val="2D3748"/>
+                </a:solidFill>
+                <a:latin typeface="Calibri"/>
+              </a:rPr>
+              <a:t>S</a:t>
+            </a:r>
+            <a:r>
+              <a:rPr lang="en-US" sz="2000" i="0" dirty="0">
+                <a:solidFill>
+                  <a:srgbClr val="2D3748"/>
+                </a:solidFill>
+                <a:latin typeface="Calibri"/>
+              </a:rPr>
+              <a:t>oftware </a:t>
+            </a:r>
+            <a:r>
+              <a:rPr lang="en-US" sz="2000" b="1" i="0" dirty="0">
+                <a:solidFill>
+                  <a:srgbClr val="2D3748"/>
+                </a:solidFill>
+                <a:latin typeface="Calibri"/>
+              </a:rPr>
+              <a:t>E</a:t>
+            </a:r>
+            <a:r>
+              <a:rPr lang="en-US" sz="2000" i="0" dirty="0">
+                <a:solidFill>
+                  <a:srgbClr val="2D3748"/>
+                </a:solidFill>
+                <a:latin typeface="Calibri"/>
+              </a:rPr>
+              <a:t>ngineering </a:t>
+            </a:r>
+            <a:r>
+              <a:rPr lang="en-US" sz="2000" b="1" i="0" dirty="0">
+                <a:solidFill>
+                  <a:srgbClr val="2D3748"/>
+                </a:solidFill>
+                <a:latin typeface="Calibri"/>
+              </a:rPr>
+              <a:t>F</a:t>
+            </a:r>
+            <a:r>
+              <a:rPr lang="en-US" sz="2000" i="0" dirty="0">
+                <a:solidFill>
+                  <a:srgbClr val="2D3748"/>
+                </a:solidFill>
+                <a:latin typeface="Calibri"/>
+              </a:rPr>
+              <a:t>ramework for </a:t>
+            </a:r>
+            <a:r>
+              <a:rPr lang="en-US" sz="2000" b="1" i="0" dirty="0">
+                <a:solidFill>
+                  <a:srgbClr val="2D3748"/>
+                </a:solidFill>
+                <a:latin typeface="Calibri"/>
+              </a:rPr>
+              <a:t>O</a:t>
+            </a:r>
+            <a:r>
+              <a:rPr lang="en-US" sz="2000" i="0" dirty="0">
+                <a:solidFill>
+                  <a:srgbClr val="2D3748"/>
+                </a:solidFill>
+                <a:latin typeface="Calibri"/>
+              </a:rPr>
+              <a:t>ptimization </a:t>
+            </a:r>
+            <a:r>
+              <a:rPr lang="en-US" sz="2000" b="1" i="0" dirty="0">
+                <a:solidFill>
+                  <a:srgbClr val="2D3748"/>
+                </a:solidFill>
+                <a:latin typeface="Calibri"/>
+              </a:rPr>
+              <a:t>P</a:t>
+            </a:r>
+            <a:r>
+              <a:rPr lang="en-US" sz="2000" i="0" dirty="0">
+                <a:solidFill>
+                  <a:srgbClr val="2D3748"/>
+                </a:solidFill>
+                <a:latin typeface="Calibri"/>
+              </a:rPr>
+              <a:t>rograms</a:t>
+            </a:r>
+          </a:p>
+          <a:p>
+            <a:pPr algn="l"/>
+            <a:endParaRPr lang="en-US" sz="2000" dirty="0">
+              <a:solidFill>
+                <a:srgbClr val="2D3748"/>
+              </a:solidFill>
+            </a:endParaRPr>
+          </a:p>
+          <a:p>
+            <a:pPr algn="l"/>
+            <a:r>
+              <a:rPr lang="en-US" sz="2000" u="sng" dirty="0">
+                <a:solidFill>
+                  <a:srgbClr val="2D3748"/>
+                </a:solidFill>
+              </a:rPr>
+              <a:t>It comes in 2 versions</a:t>
+            </a:r>
+            <a:r>
+              <a:rPr lang="en-US" sz="2000" dirty="0">
+                <a:solidFill>
+                  <a:srgbClr val="2D3748"/>
+                </a:solidFill>
+              </a:rPr>
+              <a:t>:</a:t>
+            </a:r>
+          </a:p>
+          <a:p>
+            <a:pPr marL="457200" indent="-457200" algn="l">
+              <a:buFont typeface="+mj-lt"/>
+              <a:buAutoNum type="arabicPeriod"/>
+            </a:pPr>
+            <a:r>
+              <a:rPr lang="en-US" sz="2000" dirty="0">
+                <a:solidFill>
+                  <a:srgbClr val="2D3748"/>
+                </a:solidFill>
+              </a:rPr>
+              <a:t>“Starter”: simplified design for non-web applications</a:t>
+            </a:r>
+          </a:p>
+          <a:p>
+            <a:pPr marL="457200" indent="-457200" algn="l">
+              <a:buFont typeface="+mj-lt"/>
+              <a:buAutoNum type="arabicPeriod"/>
+            </a:pPr>
+            <a:r>
+              <a:rPr lang="en-US" sz="2000" dirty="0">
+                <a:solidFill>
+                  <a:srgbClr val="2D3748"/>
+                </a:solidFill>
+              </a:rPr>
+              <a:t>“Advanced”: design thought for a web-application in the industry</a:t>
+            </a:r>
+          </a:p>
+          <a:p>
+            <a:pPr marL="457200" indent="-457200" algn="l">
+              <a:buFont typeface="+mj-lt"/>
+              <a:buAutoNum type="arabicPeriod"/>
+            </a:pPr>
+            <a:endParaRPr lang="en-US" sz="2000" dirty="0">
+              <a:solidFill>
+                <a:srgbClr val="2D3748"/>
+              </a:solidFill>
+            </a:endParaRPr>
+          </a:p>
+          <a:p>
+            <a:pPr algn="l"/>
+            <a:r>
+              <a:rPr lang="en-US" sz="2000" u="sng" dirty="0">
+                <a:solidFill>
+                  <a:srgbClr val="2D3748"/>
+                </a:solidFill>
+              </a:rPr>
+              <a:t>Benefits</a:t>
+            </a:r>
+            <a:r>
+              <a:rPr lang="en-US" sz="2000" dirty="0">
+                <a:solidFill>
+                  <a:srgbClr val="2D3748"/>
+                </a:solidFill>
+              </a:rPr>
+              <a:t>:</a:t>
+            </a:r>
+          </a:p>
+          <a:p>
+            <a:pPr marL="342900" indent="-342900" algn="l">
+              <a:buFont typeface="Wingdings" panose="05000000000000000000" pitchFamily="2" charset="2"/>
+              <a:buChar char="ü"/>
+            </a:pPr>
+            <a:r>
+              <a:rPr lang="en-US" sz="2000" dirty="0">
+                <a:solidFill>
+                  <a:srgbClr val="2D3748"/>
+                </a:solidFill>
+              </a:rPr>
+              <a:t>Modularization of main phases of an optimization run</a:t>
+            </a:r>
+          </a:p>
+          <a:p>
+            <a:pPr marL="342900" indent="-342900" algn="l">
+              <a:buFont typeface="Wingdings" panose="05000000000000000000" pitchFamily="2" charset="2"/>
+              <a:buChar char="ü"/>
+            </a:pPr>
+            <a:r>
+              <a:rPr lang="en-US" sz="2000" dirty="0">
+                <a:solidFill>
+                  <a:srgbClr val="2D3748"/>
+                </a:solidFill>
+              </a:rPr>
+              <a:t>Automatic testing framework included for optimization problems</a:t>
+            </a:r>
+          </a:p>
+          <a:p>
+            <a:pPr marL="342900" indent="-342900" algn="l">
+              <a:buFont typeface="Wingdings" panose="05000000000000000000" pitchFamily="2" charset="2"/>
+              <a:buChar char="ü"/>
+            </a:pPr>
+            <a:r>
+              <a:rPr lang="en-US" sz="2000" dirty="0">
+                <a:solidFill>
+                  <a:srgbClr val="2D3748"/>
+                </a:solidFill>
+              </a:rPr>
+              <a:t>Solver decoupling from the logic</a:t>
+            </a:r>
+          </a:p>
+          <a:p>
+            <a:pPr marL="342900" indent="-342900" algn="l">
+              <a:buFont typeface="Wingdings" panose="05000000000000000000" pitchFamily="2" charset="2"/>
+              <a:buChar char="ü"/>
+            </a:pPr>
+            <a:endParaRPr lang="en-US" sz="2000" dirty="0">
+              <a:solidFill>
+                <a:srgbClr val="2D3748"/>
+              </a:solidFill>
+            </a:endParaRPr>
+          </a:p>
+        </p:txBody>
+      </p:sp>
+      <p:sp>
+        <p:nvSpPr>
+          <p:cNvPr id="8" name="Speech Bubble: Rectangle 7">
             <a:extLst>
               <a:ext uri="{FF2B5EF4-FFF2-40B4-BE49-F238E27FC236}">
-                <a16:creationId xmlns:a16="http://schemas.microsoft.com/office/drawing/2014/main" id="{EBC00993-E833-5B49-EE01-049E21D98E6E}"/>
+                <a16:creationId xmlns:a16="http://schemas.microsoft.com/office/drawing/2014/main" id="{34F0B4A7-98F2-4F16-DD8F-B525DBFC1E77}"/>
+              </a:ext>
+            </a:extLst>
+          </p:cNvPr>
+          <p:cNvSpPr/>
+          <p:nvPr/>
+        </p:nvSpPr>
+        <p:spPr>
+          <a:xfrm>
+            <a:off x="6724997" y="2078926"/>
+            <a:ext cx="1255221" cy="328549"/>
+          </a:xfrm>
+          <a:prstGeom prst="wedgeRectCallout">
+            <a:avLst>
+              <a:gd name="adj1" fmla="val -63825"/>
+              <a:gd name="adj2" fmla="val 24059"/>
+            </a:avLst>
+          </a:prstGeom>
+          <a:solidFill>
+            <a:schemeClr val="accent6">
+              <a:lumMod val="20000"/>
+              <a:lumOff val="80000"/>
+            </a:schemeClr>
+          </a:solidFill>
+          <a:ln w="12700">
+            <a:solidFill>
+              <a:schemeClr val="tx1">
+                <a:lumMod val="85000"/>
+                <a:lumOff val="15000"/>
+              </a:schemeClr>
+            </a:solidFill>
+          </a:ln>
+        </p:spPr>
+        <p:style>
+          <a:lnRef idx="2">
+            <a:schemeClr val="accent1">
+              <a:shade val="15000"/>
+            </a:schemeClr>
+          </a:lnRef>
+          <a:fillRef idx="1">
+            <a:schemeClr val="accent1"/>
+          </a:fillRef>
+          <a:effectRef idx="0">
+            <a:schemeClr val="accent1"/>
+          </a:effectRef>
+          <a:fontRef idx="minor">
+            <a:schemeClr val="lt1"/>
+          </a:fontRef>
+        </p:style>
+        <p:txBody>
+          <a:bodyPr rtlCol="0" anchor="t"/>
+          <a:lstStyle/>
+          <a:p>
+            <a:r>
+              <a:rPr lang="en-US" sz="1600" dirty="0">
+                <a:solidFill>
+                  <a:schemeClr val="tx1"/>
+                </a:solidFill>
+              </a:rPr>
+              <a:t>Focus today</a:t>
+            </a:r>
+          </a:p>
+        </p:txBody>
+      </p:sp>
+      <p:sp>
+        <p:nvSpPr>
+          <p:cNvPr id="10" name="Speech Bubble: Rectangle 9">
+            <a:extLst>
+              <a:ext uri="{FF2B5EF4-FFF2-40B4-BE49-F238E27FC236}">
+                <a16:creationId xmlns:a16="http://schemas.microsoft.com/office/drawing/2014/main" id="{29010350-1607-0D43-FBA4-81AE455CB7AD}"/>
+              </a:ext>
+            </a:extLst>
+          </p:cNvPr>
+          <p:cNvSpPr/>
+          <p:nvPr/>
+        </p:nvSpPr>
+        <p:spPr>
+          <a:xfrm>
+            <a:off x="6350925" y="3062409"/>
+            <a:ext cx="2588028" cy="1609219"/>
+          </a:xfrm>
+          <a:prstGeom prst="wedgeRectCallout">
+            <a:avLst>
+              <a:gd name="adj1" fmla="val -37992"/>
+              <a:gd name="adj2" fmla="val -62685"/>
+            </a:avLst>
+          </a:prstGeom>
+          <a:solidFill>
+            <a:schemeClr val="accent6">
+              <a:lumMod val="20000"/>
+              <a:lumOff val="80000"/>
+            </a:schemeClr>
+          </a:solidFill>
+          <a:ln w="12700">
+            <a:solidFill>
+              <a:schemeClr val="tx1">
+                <a:lumMod val="85000"/>
+                <a:lumOff val="15000"/>
+              </a:schemeClr>
+            </a:solidFill>
+          </a:ln>
+        </p:spPr>
+        <p:style>
+          <a:lnRef idx="2">
+            <a:schemeClr val="accent1">
+              <a:shade val="15000"/>
+            </a:schemeClr>
+          </a:lnRef>
+          <a:fillRef idx="1">
+            <a:schemeClr val="accent1"/>
+          </a:fillRef>
+          <a:effectRef idx="0">
+            <a:schemeClr val="accent1"/>
+          </a:effectRef>
+          <a:fontRef idx="minor">
+            <a:schemeClr val="lt1"/>
+          </a:fontRef>
+        </p:style>
+        <p:txBody>
+          <a:bodyPr rtlCol="0" anchor="t"/>
+          <a:lstStyle/>
+          <a:p>
+            <a:r>
+              <a:rPr lang="en-US" sz="1600" dirty="0">
+                <a:solidFill>
+                  <a:schemeClr val="tx1"/>
+                </a:solidFill>
+              </a:rPr>
+              <a:t>Do not take this framework as the </a:t>
+            </a:r>
+            <a:r>
+              <a:rPr lang="en-US" sz="1600" b="1" dirty="0">
+                <a:solidFill>
+                  <a:schemeClr val="tx1"/>
+                </a:solidFill>
+              </a:rPr>
+              <a:t>only way of achieving modularity and testing</a:t>
+            </a:r>
+            <a:r>
+              <a:rPr lang="en-US" sz="1600" dirty="0">
+                <a:solidFill>
+                  <a:schemeClr val="tx1"/>
+                </a:solidFill>
+              </a:rPr>
+              <a:t>. Instead, focus on the most important ideas that could benefit you.</a:t>
+            </a:r>
+          </a:p>
+        </p:txBody>
+      </p:sp>
+    </p:spTree>
+    <p:extLst>
+      <p:ext uri="{BB962C8B-B14F-4D97-AF65-F5344CB8AC3E}">
+        <p14:creationId xmlns:p14="http://schemas.microsoft.com/office/powerpoint/2010/main" val="2310603384"/>
+      </p:ext>
+    </p:extLst>
+  </p:cSld>
+  <p:clrMapOvr>
+    <a:masterClrMapping/>
+  </p:clrMapOvr>
+  <p:timing>
+    <p:tnLst>
+      <p:par>
+        <p:cTn id="1" dur="indefinite" restart="never" nodeType="tmRoot">
+          <p:childTnLst>
+            <p:seq concurrent="1" nextAc="seek">
+              <p:cTn id="2" dur="indefinite" nodeType="mainSeq">
+                <p:childTnLst>
+                  <p:par>
+                    <p:cTn id="3" fill="hold">
+                      <p:stCondLst>
+                        <p:cond delay="indefinite"/>
+                      </p:stCondLst>
+                      <p:childTnLst>
+                        <p:par>
+                          <p:cTn id="4" fill="hold">
+                            <p:stCondLst>
+                              <p:cond delay="0"/>
+                            </p:stCondLst>
+                            <p:childTnLst>
+                              <p:par>
+                                <p:cTn id="5" presetID="1" presetClass="entr" presetSubtype="0" fill="hold" grpId="0" nodeType="clickEffect">
+                                  <p:stCondLst>
+                                    <p:cond delay="0"/>
+                                  </p:stCondLst>
+                                  <p:childTnLst>
+                                    <p:set>
+                                      <p:cBhvr>
+                                        <p:cTn id="6" dur="1" fill="hold">
+                                          <p:stCondLst>
+                                            <p:cond delay="0"/>
+                                          </p:stCondLst>
+                                        </p:cTn>
+                                        <p:tgtEl>
+                                          <p:spTgt spid="8"/>
+                                        </p:tgtEl>
+                                        <p:attrNameLst>
+                                          <p:attrName>style.visibility</p:attrName>
+                                        </p:attrNameLst>
+                                      </p:cBhvr>
+                                      <p:to>
+                                        <p:strVal val="visible"/>
+                                      </p:to>
+                                    </p:set>
+                                  </p:childTnLst>
+                                </p:cTn>
+                              </p:par>
+                            </p:childTnLst>
+                          </p:cTn>
+                        </p:par>
+                      </p:childTnLst>
+                    </p:cTn>
+                  </p:par>
+                  <p:par>
+                    <p:cTn id="7" fill="hold">
+                      <p:stCondLst>
+                        <p:cond delay="indefinite"/>
+                      </p:stCondLst>
+                      <p:childTnLst>
+                        <p:par>
+                          <p:cTn id="8" fill="hold">
+                            <p:stCondLst>
+                              <p:cond delay="0"/>
+                            </p:stCondLst>
+                            <p:childTnLst>
+                              <p:par>
+                                <p:cTn id="9" presetID="1" presetClass="entr" presetSubtype="0" fill="hold" nodeType="clickEffect">
+                                  <p:stCondLst>
+                                    <p:cond delay="0"/>
+                                  </p:stCondLst>
+                                  <p:childTnLst>
+                                    <p:set>
+                                      <p:cBhvr>
+                                        <p:cTn id="10" dur="1" fill="hold">
+                                          <p:stCondLst>
+                                            <p:cond delay="0"/>
+                                          </p:stCondLst>
+                                        </p:cTn>
+                                        <p:tgtEl>
+                                          <p:spTgt spid="4">
+                                            <p:txEl>
+                                              <p:pRg st="6" end="6"/>
+                                            </p:txEl>
+                                          </p:spTgt>
+                                        </p:tgtEl>
+                                        <p:attrNameLst>
+                                          <p:attrName>style.visibility</p:attrName>
+                                        </p:attrNameLst>
+                                      </p:cBhvr>
+                                      <p:to>
+                                        <p:strVal val="visible"/>
+                                      </p:to>
+                                    </p:set>
+                                  </p:childTnLst>
+                                </p:cTn>
+                              </p:par>
+                              <p:par>
+                                <p:cTn id="11" presetID="1" presetClass="entr" presetSubtype="0" fill="hold" nodeType="withEffect">
+                                  <p:stCondLst>
+                                    <p:cond delay="0"/>
+                                  </p:stCondLst>
+                                  <p:childTnLst>
+                                    <p:set>
+                                      <p:cBhvr>
+                                        <p:cTn id="12" dur="1" fill="hold">
+                                          <p:stCondLst>
+                                            <p:cond delay="0"/>
+                                          </p:stCondLst>
+                                        </p:cTn>
+                                        <p:tgtEl>
+                                          <p:spTgt spid="4">
+                                            <p:txEl>
+                                              <p:pRg st="7" end="7"/>
+                                            </p:txEl>
+                                          </p:spTgt>
+                                        </p:tgtEl>
+                                        <p:attrNameLst>
+                                          <p:attrName>style.visibility</p:attrName>
+                                        </p:attrNameLst>
+                                      </p:cBhvr>
+                                      <p:to>
+                                        <p:strVal val="visible"/>
+                                      </p:to>
+                                    </p:set>
+                                  </p:childTnLst>
+                                </p:cTn>
+                              </p:par>
+                              <p:par>
+                                <p:cTn id="13" presetID="1" presetClass="entr" presetSubtype="0" fill="hold" nodeType="withEffect">
+                                  <p:stCondLst>
+                                    <p:cond delay="0"/>
+                                  </p:stCondLst>
+                                  <p:childTnLst>
+                                    <p:set>
+                                      <p:cBhvr>
+                                        <p:cTn id="14" dur="1" fill="hold">
+                                          <p:stCondLst>
+                                            <p:cond delay="0"/>
+                                          </p:stCondLst>
+                                        </p:cTn>
+                                        <p:tgtEl>
+                                          <p:spTgt spid="4">
+                                            <p:txEl>
+                                              <p:pRg st="8" end="8"/>
+                                            </p:txEl>
+                                          </p:spTgt>
+                                        </p:tgtEl>
+                                        <p:attrNameLst>
+                                          <p:attrName>style.visibility</p:attrName>
+                                        </p:attrNameLst>
+                                      </p:cBhvr>
+                                      <p:to>
+                                        <p:strVal val="visible"/>
+                                      </p:to>
+                                    </p:set>
+                                  </p:childTnLst>
+                                </p:cTn>
+                              </p:par>
+                              <p:par>
+                                <p:cTn id="15" presetID="1" presetClass="entr" presetSubtype="0" fill="hold" nodeType="withEffect">
+                                  <p:stCondLst>
+                                    <p:cond delay="0"/>
+                                  </p:stCondLst>
+                                  <p:childTnLst>
+                                    <p:set>
+                                      <p:cBhvr>
+                                        <p:cTn id="16" dur="1" fill="hold">
+                                          <p:stCondLst>
+                                            <p:cond delay="0"/>
+                                          </p:stCondLst>
+                                        </p:cTn>
+                                        <p:tgtEl>
+                                          <p:spTgt spid="4">
+                                            <p:txEl>
+                                              <p:pRg st="9" end="9"/>
+                                            </p:txEl>
+                                          </p:spTgt>
+                                        </p:tgtEl>
+                                        <p:attrNameLst>
+                                          <p:attrName>style.visibility</p:attrName>
+                                        </p:attrNameLst>
+                                      </p:cBhvr>
+                                      <p:to>
+                                        <p:strVal val="visible"/>
+                                      </p:to>
+                                    </p:set>
+                                  </p:childTnLst>
+                                </p:cTn>
+                              </p:par>
+                            </p:childTnLst>
+                          </p:cTn>
+                        </p:par>
+                      </p:childTnLst>
+                    </p:cTn>
+                  </p:par>
+                  <p:par>
+                    <p:cTn id="17" fill="hold">
+                      <p:stCondLst>
+                        <p:cond delay="indefinite"/>
+                      </p:stCondLst>
+                      <p:childTnLst>
+                        <p:par>
+                          <p:cTn id="18" fill="hold">
+                            <p:stCondLst>
+                              <p:cond delay="0"/>
+                            </p:stCondLst>
+                            <p:childTnLst>
+                              <p:par>
+                                <p:cTn id="19" presetID="1" presetClass="entr" presetSubtype="0" fill="hold" grpId="0" nodeType="clickEffect">
+                                  <p:stCondLst>
+                                    <p:cond delay="0"/>
+                                  </p:stCondLst>
+                                  <p:childTnLst>
+                                    <p:set>
+                                      <p:cBhvr>
+                                        <p:cTn id="20" dur="1" fill="hold">
+                                          <p:stCondLst>
+                                            <p:cond delay="0"/>
+                                          </p:stCondLst>
+                                        </p:cTn>
+                                        <p:tgtEl>
+                                          <p:spTgt spid="10"/>
+                                        </p:tgtEl>
+                                        <p:attrNameLst>
+                                          <p:attrName>style.visibility</p:attrName>
+                                        </p:attrNameLst>
+                                      </p:cBhvr>
+                                      <p:to>
+                                        <p:strVal val="visible"/>
+                                      </p:to>
+                                    </p:set>
+                                  </p:childTnLst>
+                                </p:cTn>
+                              </p:par>
+                            </p:childTnLst>
+                          </p:cTn>
+                        </p:par>
+                      </p:childTnLst>
+                    </p:cTn>
+                  </p:par>
+                </p:childTnLst>
+              </p:cTn>
+              <p:prevCondLst>
+                <p:cond evt="onPrev" delay="0">
+                  <p:tgtEl>
+                    <p:sldTgt/>
+                  </p:tgtEl>
+                </p:cond>
+              </p:prevCondLst>
+              <p:nextCondLst>
+                <p:cond evt="onNext" delay="0">
+                  <p:tgtEl>
+                    <p:sldTgt/>
+                  </p:tgtEl>
+                </p:cond>
+              </p:nextCondLst>
+            </p:seq>
+          </p:childTnLst>
+        </p:cTn>
+      </p:par>
+    </p:tnLst>
+    <p:bldLst>
+      <p:bldP spid="8" grpId="0" animBg="1"/>
+      <p:bldP spid="10" grpId="0" animBg="1"/>
+    </p:bldLst>
+  </p:timing>
+</p:sld>
+</file>
+
+<file path=ppt/slides/slide38.xml><?xml version="1.0" encoding="utf-8"?>
+<p:sld xmlns:a="http://schemas.openxmlformats.org/drawingml/2006/main" xmlns:r="http://schemas.openxmlformats.org/officeDocument/2006/relationships" xmlns:p="http://schemas.openxmlformats.org/presentationml/2006/main">
+  <p:cSld>
+    <p:spTree>
+      <p:nvGrpSpPr>
+        <p:cNvPr id="1" name="">
+          <a:extLst>
+            <a:ext uri="{FF2B5EF4-FFF2-40B4-BE49-F238E27FC236}">
+              <a16:creationId xmlns:a16="http://schemas.microsoft.com/office/drawing/2014/main" id="{ADECFA4C-03B9-6E42-9FE9-15667BB49A81}"/>
+            </a:ext>
+          </a:extLst>
+        </p:cNvPr>
+        <p:cNvGrpSpPr/>
+        <p:nvPr/>
+      </p:nvGrpSpPr>
+      <p:grpSpPr>
+        <a:xfrm>
+          <a:off x="0" y="0"/>
+          <a:ext cx="0" cy="0"/>
+          <a:chOff x="0" y="0"/>
+          <a:chExt cx="0" cy="0"/>
+        </a:xfrm>
+      </p:grpSpPr>
+      <p:sp>
+        <p:nvSpPr>
+          <p:cNvPr id="2" name="TextBox 1">
+            <a:extLst>
+              <a:ext uri="{FF2B5EF4-FFF2-40B4-BE49-F238E27FC236}">
+                <a16:creationId xmlns:a16="http://schemas.microsoft.com/office/drawing/2014/main" id="{930F342F-C91D-D458-39D1-EBDCCA136F55}"/>
               </a:ext>
             </a:extLst>
           </p:cNvPr>
@@ -23105,8 +24231,8 @@
         </p:nvSpPr>
         <p:spPr>
           <a:xfrm>
-            <a:off x="441960" y="2529054"/>
-            <a:ext cx="4572000" cy="369332"/>
+            <a:off x="457200" y="274320"/>
+            <a:ext cx="8229600" cy="553998"/>
           </a:xfrm>
           <a:prstGeom prst="rect">
             <a:avLst/>
@@ -23119,50 +24245,1700 @@
           </a:bodyPr>
           <a:lstStyle/>
           <a:p>
-            <a:r>
-              <a:rPr lang="en-US" sz="1800" b="0" i="0" dirty="0">
-                <a:solidFill>
-                  <a:srgbClr val="2D3748"/>
+            <a:pPr algn="l"/>
+            <a:r>
+              <a:rPr lang="en-US" sz="3000" b="1" i="0" dirty="0">
+                <a:solidFill>
+                  <a:srgbClr val="0A1628"/>
                 </a:solidFill>
                 <a:latin typeface="Calibri"/>
               </a:rPr>
-              <a:t>Provide your feedback here please:</a:t>
-            </a:r>
-            <a:endParaRPr lang="en-US" dirty="0"/>
-          </a:p>
-        </p:txBody>
-      </p:sp>
-      <p:pic>
-        <p:nvPicPr>
-          <p:cNvPr id="11" name="Picture 10">
+              <a:t>Overview of SEFOP design</a:t>
+            </a:r>
+            <a:endParaRPr sz="3000" b="1" i="0" dirty="0">
+              <a:solidFill>
+                <a:srgbClr val="0A1628"/>
+              </a:solidFill>
+              <a:latin typeface="Calibri"/>
+            </a:endParaRPr>
+          </a:p>
+        </p:txBody>
+      </p:sp>
+      <p:sp>
+        <p:nvSpPr>
+          <p:cNvPr id="3" name="Rectangle 2">
             <a:extLst>
               <a:ext uri="{FF2B5EF4-FFF2-40B4-BE49-F238E27FC236}">
-                <a16:creationId xmlns:a16="http://schemas.microsoft.com/office/drawing/2014/main" id="{D4F567CB-A713-ABEE-D8FF-DB8361AC57CA}"/>
+                <a16:creationId xmlns:a16="http://schemas.microsoft.com/office/drawing/2014/main" id="{2DF80FE3-A397-4373-F168-E0FE3ED5F5F1}"/>
               </a:ext>
             </a:extLst>
           </p:cNvPr>
-          <p:cNvPicPr>
-            <a:picLocks noChangeAspect="1"/>
-          </p:cNvPicPr>
+          <p:cNvSpPr/>
           <p:nvPr/>
-        </p:nvPicPr>
-        <p:blipFill>
-          <a:blip r:embed="rId3"/>
-          <a:stretch>
-            <a:fillRect/>
-          </a:stretch>
-        </p:blipFill>
+        </p:nvSpPr>
         <p:spPr>
           <a:xfrm>
-            <a:off x="4450080" y="259080"/>
-            <a:ext cx="4572000" cy="4572000"/>
+            <a:off x="457200" y="987552"/>
+            <a:ext cx="8229600" cy="36576"/>
           </a:xfrm>
           <a:prstGeom prst="rect">
             <a:avLst/>
           </a:prstGeom>
+          <a:solidFill>
+            <a:srgbClr val="0077A8"/>
+          </a:solidFill>
+          <a:ln>
+            <a:noFill/>
+          </a:ln>
         </p:spPr>
-      </p:pic>
+        <p:style>
+          <a:lnRef idx="1">
+            <a:schemeClr val="accent1"/>
+          </a:lnRef>
+          <a:fillRef idx="3">
+            <a:schemeClr val="accent1"/>
+          </a:fillRef>
+          <a:effectRef idx="2">
+            <a:schemeClr val="accent1"/>
+          </a:effectRef>
+          <a:fontRef idx="minor">
+            <a:schemeClr val="lt1"/>
+          </a:fontRef>
+        </p:style>
+        <p:txBody>
+          <a:bodyPr rtlCol="0" anchor="ctr"/>
+          <a:lstStyle/>
+          <a:p>
+            <a:pPr algn="ctr"/>
+            <a:endParaRPr/>
+          </a:p>
+        </p:txBody>
+      </p:sp>
+      <p:sp>
+        <p:nvSpPr>
+          <p:cNvPr id="5" name="Slide Number Placeholder 4">
+            <a:extLst>
+              <a:ext uri="{FF2B5EF4-FFF2-40B4-BE49-F238E27FC236}">
+                <a16:creationId xmlns:a16="http://schemas.microsoft.com/office/drawing/2014/main" id="{79B5ACF9-4F5F-29C5-7B26-D6D792494E63}"/>
+              </a:ext>
+            </a:extLst>
+          </p:cNvPr>
+          <p:cNvSpPr>
+            <a:spLocks noGrp="1"/>
+          </p:cNvSpPr>
+          <p:nvPr>
+            <p:ph type="sldNum" sz="quarter" idx="12"/>
+          </p:nvPr>
+        </p:nvSpPr>
+        <p:spPr/>
+        <p:txBody>
+          <a:bodyPr/>
+          <a:lstStyle/>
+          <a:p>
+            <a:fld id="{C1FF6DA9-008F-8B48-92A6-B652298478BF}" type="slidenum">
+              <a:rPr lang="en-US" smtClean="0"/>
+              <a:t>38</a:t>
+            </a:fld>
+            <a:endParaRPr lang="en-US"/>
+          </a:p>
+        </p:txBody>
+      </p:sp>
+      <p:sp>
+        <p:nvSpPr>
+          <p:cNvPr id="6" name="Arrow: Right 5">
+            <a:extLst>
+              <a:ext uri="{FF2B5EF4-FFF2-40B4-BE49-F238E27FC236}">
+                <a16:creationId xmlns:a16="http://schemas.microsoft.com/office/drawing/2014/main" id="{2EF2E7FF-A5E4-A000-1BE0-92FFDA28EC0C}"/>
+              </a:ext>
+            </a:extLst>
+          </p:cNvPr>
+          <p:cNvSpPr/>
+          <p:nvPr/>
+        </p:nvSpPr>
+        <p:spPr>
+          <a:xfrm>
+            <a:off x="106680" y="2754630"/>
+            <a:ext cx="8930640" cy="400039"/>
+          </a:xfrm>
+          <a:prstGeom prst="rightArrow">
+            <a:avLst/>
+          </a:prstGeom>
+          <a:solidFill>
+            <a:schemeClr val="tx1"/>
+          </a:solidFill>
+          <a:ln>
+            <a:noFill/>
+          </a:ln>
+        </p:spPr>
+        <p:style>
+          <a:lnRef idx="2">
+            <a:schemeClr val="accent1">
+              <a:shade val="15000"/>
+            </a:schemeClr>
+          </a:lnRef>
+          <a:fillRef idx="1">
+            <a:schemeClr val="accent1"/>
+          </a:fillRef>
+          <a:effectRef idx="0">
+            <a:schemeClr val="accent1"/>
+          </a:effectRef>
+          <a:fontRef idx="minor">
+            <a:schemeClr val="lt1"/>
+          </a:fontRef>
+        </p:style>
+        <p:txBody>
+          <a:bodyPr rtlCol="0" anchor="ctr"/>
+          <a:lstStyle/>
+          <a:p>
+            <a:pPr algn="ctr"/>
+            <a:endParaRPr lang="en-US"/>
+          </a:p>
+        </p:txBody>
+      </p:sp>
+      <p:sp>
+        <p:nvSpPr>
+          <p:cNvPr id="7" name="Rectangle 6">
+            <a:extLst>
+              <a:ext uri="{FF2B5EF4-FFF2-40B4-BE49-F238E27FC236}">
+                <a16:creationId xmlns:a16="http://schemas.microsoft.com/office/drawing/2014/main" id="{55610D61-1041-6890-F3B2-BF2EC6C28F9B}"/>
+              </a:ext>
+            </a:extLst>
+          </p:cNvPr>
+          <p:cNvSpPr/>
+          <p:nvPr/>
+        </p:nvSpPr>
+        <p:spPr>
+          <a:xfrm>
+            <a:off x="765048" y="1699263"/>
+            <a:ext cx="1645920" cy="2125977"/>
+          </a:xfrm>
+          <a:prstGeom prst="rect">
+            <a:avLst/>
+          </a:prstGeom>
+          <a:solidFill>
+            <a:schemeClr val="bg1">
+              <a:lumMod val="85000"/>
+            </a:schemeClr>
+          </a:solidFill>
+          <a:ln>
+            <a:noFill/>
+          </a:ln>
+          <a:effectLst>
+            <a:outerShdw blurRad="50800" dist="38100" dir="2700000" algn="tl" rotWithShape="0">
+              <a:prstClr val="black">
+                <a:alpha val="40000"/>
+              </a:prstClr>
+            </a:outerShdw>
+          </a:effectLst>
+        </p:spPr>
+        <p:style>
+          <a:lnRef idx="2">
+            <a:schemeClr val="accent1">
+              <a:shade val="15000"/>
+            </a:schemeClr>
+          </a:lnRef>
+          <a:fillRef idx="1">
+            <a:schemeClr val="accent1"/>
+          </a:fillRef>
+          <a:effectRef idx="0">
+            <a:schemeClr val="accent1"/>
+          </a:effectRef>
+          <a:fontRef idx="minor">
+            <a:schemeClr val="lt1"/>
+          </a:fontRef>
+        </p:style>
+        <p:txBody>
+          <a:bodyPr rtlCol="0" anchor="t"/>
+          <a:lstStyle/>
+          <a:p>
+            <a:pPr algn="ctr"/>
+            <a:r>
+              <a:rPr lang="en-US" sz="1600" b="1" dirty="0">
+                <a:solidFill>
+                  <a:schemeClr val="tx1"/>
+                </a:solidFill>
+              </a:rPr>
+              <a:t>Data loading</a:t>
+            </a:r>
+          </a:p>
+          <a:p>
+            <a:pPr algn="ctr"/>
+            <a:endParaRPr lang="en-US" sz="1600" b="1" dirty="0">
+              <a:solidFill>
+                <a:schemeClr val="tx1"/>
+              </a:solidFill>
+            </a:endParaRPr>
+          </a:p>
+          <a:p>
+            <a:pPr marL="171450" indent="-171450">
+              <a:buFont typeface="Arial" panose="020B0604020202020204" pitchFamily="34" charset="0"/>
+              <a:buChar char="•"/>
+            </a:pPr>
+            <a:r>
+              <a:rPr lang="en-US" sz="1200" dirty="0">
+                <a:solidFill>
+                  <a:schemeClr val="tx1"/>
+                </a:solidFill>
+              </a:rPr>
+              <a:t>Reads input data from different sources</a:t>
+            </a:r>
+          </a:p>
+          <a:p>
+            <a:pPr marL="171450" indent="-171450">
+              <a:buFont typeface="Arial" panose="020B0604020202020204" pitchFamily="34" charset="0"/>
+              <a:buChar char="•"/>
+            </a:pPr>
+            <a:endParaRPr lang="en-US" sz="1200" dirty="0">
+              <a:solidFill>
+                <a:schemeClr val="tx1"/>
+              </a:solidFill>
+            </a:endParaRPr>
+          </a:p>
+          <a:p>
+            <a:pPr marL="171450" indent="-171450">
+              <a:buFont typeface="Arial" panose="020B0604020202020204" pitchFamily="34" charset="0"/>
+              <a:buChar char="•"/>
+            </a:pPr>
+            <a:r>
+              <a:rPr lang="en-US" sz="1200" dirty="0">
+                <a:solidFill>
+                  <a:schemeClr val="tx1"/>
+                </a:solidFill>
+              </a:rPr>
+              <a:t>Uses a Data Model to abstract the sources.</a:t>
+            </a:r>
+          </a:p>
+          <a:p>
+            <a:endParaRPr lang="en-US" sz="1200" dirty="0">
+              <a:solidFill>
+                <a:schemeClr val="tx1"/>
+              </a:solidFill>
+            </a:endParaRPr>
+          </a:p>
+        </p:txBody>
+      </p:sp>
+      <p:sp>
+        <p:nvSpPr>
+          <p:cNvPr id="9" name="Rectangle 8">
+            <a:extLst>
+              <a:ext uri="{FF2B5EF4-FFF2-40B4-BE49-F238E27FC236}">
+                <a16:creationId xmlns:a16="http://schemas.microsoft.com/office/drawing/2014/main" id="{35FF8DB0-95D1-7DC6-B872-84BFB19496D1}"/>
+              </a:ext>
+            </a:extLst>
+          </p:cNvPr>
+          <p:cNvSpPr/>
+          <p:nvPr/>
+        </p:nvSpPr>
+        <p:spPr>
+          <a:xfrm>
+            <a:off x="2596134" y="1699263"/>
+            <a:ext cx="1645920" cy="2125977"/>
+          </a:xfrm>
+          <a:prstGeom prst="rect">
+            <a:avLst/>
+          </a:prstGeom>
+          <a:solidFill>
+            <a:schemeClr val="bg1">
+              <a:lumMod val="85000"/>
+            </a:schemeClr>
+          </a:solidFill>
+          <a:ln>
+            <a:noFill/>
+          </a:ln>
+          <a:effectLst>
+            <a:outerShdw blurRad="50800" dist="38100" dir="2700000" algn="tl" rotWithShape="0">
+              <a:prstClr val="black">
+                <a:alpha val="40000"/>
+              </a:prstClr>
+            </a:outerShdw>
+          </a:effectLst>
+        </p:spPr>
+        <p:style>
+          <a:lnRef idx="2">
+            <a:schemeClr val="accent1">
+              <a:shade val="15000"/>
+            </a:schemeClr>
+          </a:lnRef>
+          <a:fillRef idx="1">
+            <a:schemeClr val="accent1"/>
+          </a:fillRef>
+          <a:effectRef idx="0">
+            <a:schemeClr val="accent1"/>
+          </a:effectRef>
+          <a:fontRef idx="minor">
+            <a:schemeClr val="lt1"/>
+          </a:fontRef>
+        </p:style>
+        <p:txBody>
+          <a:bodyPr rtlCol="0" anchor="t"/>
+          <a:lstStyle/>
+          <a:p>
+            <a:pPr algn="ctr"/>
+            <a:r>
+              <a:rPr lang="en-US" sz="1600" b="1" dirty="0">
+                <a:solidFill>
+                  <a:schemeClr val="tx1"/>
+                </a:solidFill>
+              </a:rPr>
+              <a:t>Preprocessing</a:t>
+            </a:r>
+          </a:p>
+          <a:p>
+            <a:pPr algn="ctr"/>
+            <a:endParaRPr lang="en-US" sz="1600" b="1" dirty="0">
+              <a:solidFill>
+                <a:schemeClr val="tx1"/>
+              </a:solidFill>
+            </a:endParaRPr>
+          </a:p>
+          <a:p>
+            <a:pPr marL="171450" indent="-171450">
+              <a:buFont typeface="Arial" panose="020B0604020202020204" pitchFamily="34" charset="0"/>
+              <a:buChar char="•"/>
+            </a:pPr>
+            <a:r>
+              <a:rPr lang="en-US" sz="1200" dirty="0">
+                <a:solidFill>
+                  <a:schemeClr val="tx1"/>
+                </a:solidFill>
+              </a:rPr>
+              <a:t>Validation</a:t>
+            </a:r>
+          </a:p>
+          <a:p>
+            <a:pPr marL="171450" indent="-171450">
+              <a:buFont typeface="Arial" panose="020B0604020202020204" pitchFamily="34" charset="0"/>
+              <a:buChar char="•"/>
+            </a:pPr>
+            <a:endParaRPr lang="en-US" sz="1200" dirty="0">
+              <a:solidFill>
+                <a:schemeClr val="tx1"/>
+              </a:solidFill>
+            </a:endParaRPr>
+          </a:p>
+          <a:p>
+            <a:pPr marL="171450" indent="-171450">
+              <a:buFont typeface="Arial" panose="020B0604020202020204" pitchFamily="34" charset="0"/>
+              <a:buChar char="•"/>
+            </a:pPr>
+            <a:r>
+              <a:rPr lang="en-US" sz="1200" dirty="0">
+                <a:solidFill>
+                  <a:schemeClr val="tx1"/>
+                </a:solidFill>
+              </a:rPr>
+              <a:t>Data cleaning</a:t>
+            </a:r>
+          </a:p>
+          <a:p>
+            <a:pPr marL="171450" indent="-171450">
+              <a:buFont typeface="Arial" panose="020B0604020202020204" pitchFamily="34" charset="0"/>
+              <a:buChar char="•"/>
+            </a:pPr>
+            <a:endParaRPr lang="en-US" sz="1200" dirty="0">
+              <a:solidFill>
+                <a:schemeClr val="tx1"/>
+              </a:solidFill>
+            </a:endParaRPr>
+          </a:p>
+          <a:p>
+            <a:pPr marL="171450" indent="-171450">
+              <a:buFont typeface="Arial" panose="020B0604020202020204" pitchFamily="34" charset="0"/>
+              <a:buChar char="•"/>
+            </a:pPr>
+            <a:r>
+              <a:rPr lang="en-US" sz="1200" dirty="0">
+                <a:solidFill>
+                  <a:schemeClr val="tx1"/>
+                </a:solidFill>
+              </a:rPr>
+              <a:t>Data transformation</a:t>
+            </a:r>
+            <a:endParaRPr lang="en-US" sz="1100" dirty="0">
+              <a:solidFill>
+                <a:schemeClr val="tx1"/>
+              </a:solidFill>
+            </a:endParaRPr>
+          </a:p>
+        </p:txBody>
+      </p:sp>
+      <p:sp>
+        <p:nvSpPr>
+          <p:cNvPr id="11" name="Rectangle 10">
+            <a:extLst>
+              <a:ext uri="{FF2B5EF4-FFF2-40B4-BE49-F238E27FC236}">
+                <a16:creationId xmlns:a16="http://schemas.microsoft.com/office/drawing/2014/main" id="{0E4B5910-4FBB-95BB-CF7D-5D73D087FC32}"/>
+              </a:ext>
+            </a:extLst>
+          </p:cNvPr>
+          <p:cNvSpPr/>
+          <p:nvPr/>
+        </p:nvSpPr>
+        <p:spPr>
+          <a:xfrm>
+            <a:off x="4427220" y="1699263"/>
+            <a:ext cx="1645920" cy="2125977"/>
+          </a:xfrm>
+          <a:prstGeom prst="rect">
+            <a:avLst/>
+          </a:prstGeom>
+          <a:solidFill>
+            <a:schemeClr val="bg1">
+              <a:lumMod val="85000"/>
+            </a:schemeClr>
+          </a:solidFill>
+          <a:ln>
+            <a:noFill/>
+          </a:ln>
+          <a:effectLst>
+            <a:outerShdw blurRad="50800" dist="38100" dir="2700000" algn="tl" rotWithShape="0">
+              <a:prstClr val="black">
+                <a:alpha val="40000"/>
+              </a:prstClr>
+            </a:outerShdw>
+          </a:effectLst>
+        </p:spPr>
+        <p:style>
+          <a:lnRef idx="2">
+            <a:schemeClr val="accent1">
+              <a:shade val="15000"/>
+            </a:schemeClr>
+          </a:lnRef>
+          <a:fillRef idx="1">
+            <a:schemeClr val="accent1"/>
+          </a:fillRef>
+          <a:effectRef idx="0">
+            <a:schemeClr val="accent1"/>
+          </a:effectRef>
+          <a:fontRef idx="minor">
+            <a:schemeClr val="lt1"/>
+          </a:fontRef>
+        </p:style>
+        <p:txBody>
+          <a:bodyPr rtlCol="0" anchor="t"/>
+          <a:lstStyle/>
+          <a:p>
+            <a:pPr algn="ctr"/>
+            <a:r>
+              <a:rPr lang="en-US" sz="1600" b="1" dirty="0">
+                <a:solidFill>
+                  <a:schemeClr val="tx1"/>
+                </a:solidFill>
+              </a:rPr>
+              <a:t>Optimization</a:t>
+            </a:r>
+          </a:p>
+          <a:p>
+            <a:pPr algn="ctr"/>
+            <a:endParaRPr lang="en-US" sz="1600" b="1" dirty="0">
+              <a:solidFill>
+                <a:schemeClr val="tx1"/>
+              </a:solidFill>
+            </a:endParaRPr>
+          </a:p>
+          <a:p>
+            <a:pPr marL="171450" indent="-171450">
+              <a:buFont typeface="Arial" panose="020B0604020202020204" pitchFamily="34" charset="0"/>
+              <a:buChar char="•"/>
+            </a:pPr>
+            <a:r>
+              <a:rPr lang="en-US" sz="1200" dirty="0">
+                <a:solidFill>
+                  <a:schemeClr val="tx1"/>
+                </a:solidFill>
+              </a:rPr>
+              <a:t>Build</a:t>
+            </a:r>
+          </a:p>
+          <a:p>
+            <a:pPr marL="171450" indent="-171450">
+              <a:buFont typeface="Arial" panose="020B0604020202020204" pitchFamily="34" charset="0"/>
+              <a:buChar char="•"/>
+            </a:pPr>
+            <a:endParaRPr lang="en-US" sz="1200" dirty="0">
+              <a:solidFill>
+                <a:schemeClr val="tx1"/>
+              </a:solidFill>
+            </a:endParaRPr>
+          </a:p>
+          <a:p>
+            <a:pPr marL="171450" indent="-171450">
+              <a:buFont typeface="Arial" panose="020B0604020202020204" pitchFamily="34" charset="0"/>
+              <a:buChar char="•"/>
+            </a:pPr>
+            <a:r>
+              <a:rPr lang="en-US" sz="1200" dirty="0">
+                <a:solidFill>
+                  <a:schemeClr val="tx1"/>
+                </a:solidFill>
+              </a:rPr>
+              <a:t>Solve</a:t>
+            </a:r>
+            <a:endParaRPr lang="en-US" sz="1100" dirty="0">
+              <a:solidFill>
+                <a:schemeClr val="tx1"/>
+              </a:solidFill>
+            </a:endParaRPr>
+          </a:p>
+        </p:txBody>
+      </p:sp>
+      <p:sp>
+        <p:nvSpPr>
+          <p:cNvPr id="12" name="Rectangle 11">
+            <a:extLst>
+              <a:ext uri="{FF2B5EF4-FFF2-40B4-BE49-F238E27FC236}">
+                <a16:creationId xmlns:a16="http://schemas.microsoft.com/office/drawing/2014/main" id="{15624423-2E4E-A28E-C6AE-D77611CCB2E6}"/>
+              </a:ext>
+            </a:extLst>
+          </p:cNvPr>
+          <p:cNvSpPr/>
+          <p:nvPr/>
+        </p:nvSpPr>
+        <p:spPr>
+          <a:xfrm>
+            <a:off x="6258306" y="1699263"/>
+            <a:ext cx="1645920" cy="2125977"/>
+          </a:xfrm>
+          <a:prstGeom prst="rect">
+            <a:avLst/>
+          </a:prstGeom>
+          <a:solidFill>
+            <a:schemeClr val="bg1">
+              <a:lumMod val="85000"/>
+            </a:schemeClr>
+          </a:solidFill>
+          <a:ln>
+            <a:noFill/>
+          </a:ln>
+          <a:effectLst>
+            <a:outerShdw blurRad="50800" dist="38100" dir="2700000" algn="tl" rotWithShape="0">
+              <a:prstClr val="black">
+                <a:alpha val="40000"/>
+              </a:prstClr>
+            </a:outerShdw>
+          </a:effectLst>
+        </p:spPr>
+        <p:style>
+          <a:lnRef idx="2">
+            <a:schemeClr val="accent1">
+              <a:shade val="15000"/>
+            </a:schemeClr>
+          </a:lnRef>
+          <a:fillRef idx="1">
+            <a:schemeClr val="accent1"/>
+          </a:fillRef>
+          <a:effectRef idx="0">
+            <a:schemeClr val="accent1"/>
+          </a:effectRef>
+          <a:fontRef idx="minor">
+            <a:schemeClr val="lt1"/>
+          </a:fontRef>
+        </p:style>
+        <p:txBody>
+          <a:bodyPr rtlCol="0" anchor="t"/>
+          <a:lstStyle/>
+          <a:p>
+            <a:pPr algn="ctr"/>
+            <a:r>
+              <a:rPr lang="en-US" sz="1600" b="1" dirty="0">
+                <a:solidFill>
+                  <a:schemeClr val="tx1"/>
+                </a:solidFill>
+              </a:rPr>
+              <a:t>Postprocessing</a:t>
+            </a:r>
+          </a:p>
+          <a:p>
+            <a:pPr algn="ctr"/>
+            <a:endParaRPr lang="en-US" sz="1600" b="1" dirty="0">
+              <a:solidFill>
+                <a:schemeClr val="tx1"/>
+              </a:solidFill>
+            </a:endParaRPr>
+          </a:p>
+          <a:p>
+            <a:pPr marL="171450" indent="-171450">
+              <a:buFont typeface="Arial" panose="020B0604020202020204" pitchFamily="34" charset="0"/>
+              <a:buChar char="•"/>
+            </a:pPr>
+            <a:r>
+              <a:rPr lang="en-US" sz="1200" dirty="0">
+                <a:solidFill>
+                  <a:schemeClr val="tx1"/>
+                </a:solidFill>
+              </a:rPr>
+              <a:t>Filter solutions to be sent to the user</a:t>
+            </a:r>
+          </a:p>
+          <a:p>
+            <a:pPr marL="171450" indent="-171450">
+              <a:buFont typeface="Arial" panose="020B0604020202020204" pitchFamily="34" charset="0"/>
+              <a:buChar char="•"/>
+            </a:pPr>
+            <a:endParaRPr lang="en-US" sz="1200" dirty="0">
+              <a:solidFill>
+                <a:schemeClr val="tx1"/>
+              </a:solidFill>
+            </a:endParaRPr>
+          </a:p>
+          <a:p>
+            <a:endParaRPr lang="en-US" sz="1200" dirty="0">
+              <a:solidFill>
+                <a:schemeClr val="tx1"/>
+              </a:solidFill>
+            </a:endParaRPr>
+          </a:p>
+          <a:p>
+            <a:pPr marL="171450" indent="-171450">
+              <a:buFont typeface="Arial" panose="020B0604020202020204" pitchFamily="34" charset="0"/>
+              <a:buChar char="•"/>
+            </a:pPr>
+            <a:r>
+              <a:rPr lang="en-US" sz="1200" dirty="0">
+                <a:solidFill>
+                  <a:schemeClr val="tx1"/>
+                </a:solidFill>
+              </a:rPr>
+              <a:t>Transform solution to business representation</a:t>
+            </a:r>
+          </a:p>
+          <a:p>
+            <a:pPr marL="171450" indent="-171450">
+              <a:buFont typeface="Arial" panose="020B0604020202020204" pitchFamily="34" charset="0"/>
+              <a:buChar char="•"/>
+            </a:pPr>
+            <a:endParaRPr lang="en-US" sz="1200" dirty="0">
+              <a:solidFill>
+                <a:schemeClr val="tx1"/>
+              </a:solidFill>
+            </a:endParaRPr>
+          </a:p>
+          <a:p>
+            <a:pPr marL="171450" indent="-171450">
+              <a:buFont typeface="Arial" panose="020B0604020202020204" pitchFamily="34" charset="0"/>
+              <a:buChar char="•"/>
+            </a:pPr>
+            <a:endParaRPr lang="en-US" sz="1100" dirty="0">
+              <a:solidFill>
+                <a:schemeClr val="tx1"/>
+              </a:solidFill>
+            </a:endParaRPr>
+          </a:p>
+        </p:txBody>
+      </p:sp>
+      <p:sp>
+        <p:nvSpPr>
+          <p:cNvPr id="13" name="TextBox 12">
+            <a:extLst>
+              <a:ext uri="{FF2B5EF4-FFF2-40B4-BE49-F238E27FC236}">
+                <a16:creationId xmlns:a16="http://schemas.microsoft.com/office/drawing/2014/main" id="{326DC4E8-C20E-16A4-9473-EFBA1A00CEA0}"/>
+              </a:ext>
+            </a:extLst>
+          </p:cNvPr>
+          <p:cNvSpPr txBox="1"/>
+          <p:nvPr/>
+        </p:nvSpPr>
+        <p:spPr>
+          <a:xfrm>
+            <a:off x="53957" y="2347829"/>
+            <a:ext cx="660181" cy="461665"/>
+          </a:xfrm>
+          <a:prstGeom prst="rect">
+            <a:avLst/>
+          </a:prstGeom>
+          <a:noFill/>
+        </p:spPr>
+        <p:txBody>
+          <a:bodyPr wrap="none" rtlCol="0">
+            <a:spAutoFit/>
+          </a:bodyPr>
+          <a:lstStyle/>
+          <a:p>
+            <a:pPr algn="ctr"/>
+            <a:r>
+              <a:rPr lang="en-US" sz="1200" dirty="0"/>
+              <a:t>User</a:t>
+            </a:r>
+          </a:p>
+          <a:p>
+            <a:pPr algn="ctr"/>
+            <a:r>
+              <a:rPr lang="en-US" sz="1200" dirty="0"/>
+              <a:t>request</a:t>
+            </a:r>
+          </a:p>
+        </p:txBody>
+      </p:sp>
+      <p:sp>
+        <p:nvSpPr>
+          <p:cNvPr id="14" name="TextBox 13">
+            <a:extLst>
+              <a:ext uri="{FF2B5EF4-FFF2-40B4-BE49-F238E27FC236}">
+                <a16:creationId xmlns:a16="http://schemas.microsoft.com/office/drawing/2014/main" id="{9D076E69-424E-1AB0-2A24-A748443DC6FA}"/>
+              </a:ext>
+            </a:extLst>
+          </p:cNvPr>
+          <p:cNvSpPr txBox="1"/>
+          <p:nvPr/>
+        </p:nvSpPr>
+        <p:spPr>
+          <a:xfrm>
+            <a:off x="7904226" y="2284699"/>
+            <a:ext cx="1263551" cy="461665"/>
+          </a:xfrm>
+          <a:prstGeom prst="rect">
+            <a:avLst/>
+          </a:prstGeom>
+          <a:noFill/>
+        </p:spPr>
+        <p:txBody>
+          <a:bodyPr wrap="none" rtlCol="0">
+            <a:spAutoFit/>
+          </a:bodyPr>
+          <a:lstStyle/>
+          <a:p>
+            <a:pPr algn="ctr"/>
+            <a:r>
+              <a:rPr lang="en-US" sz="1200" dirty="0"/>
+              <a:t>Business</a:t>
+            </a:r>
+          </a:p>
+          <a:p>
+            <a:pPr algn="ctr"/>
+            <a:r>
+              <a:rPr lang="en-US" sz="1200" dirty="0"/>
+              <a:t>recommendation</a:t>
+            </a:r>
+          </a:p>
+        </p:txBody>
+      </p:sp>
+      <p:sp>
+        <p:nvSpPr>
+          <p:cNvPr id="16" name="Text 3">
+            <a:extLst>
+              <a:ext uri="{FF2B5EF4-FFF2-40B4-BE49-F238E27FC236}">
+                <a16:creationId xmlns:a16="http://schemas.microsoft.com/office/drawing/2014/main" id="{26450BDF-4C85-0968-FD8A-6C754CC9ABE8}"/>
+              </a:ext>
+            </a:extLst>
+          </p:cNvPr>
+          <p:cNvSpPr/>
+          <p:nvPr/>
+        </p:nvSpPr>
+        <p:spPr>
+          <a:xfrm>
+            <a:off x="384047" y="1085059"/>
+            <a:ext cx="8229600" cy="320040"/>
+          </a:xfrm>
+          <a:prstGeom prst="rect">
+            <a:avLst/>
+          </a:prstGeom>
+          <a:noFill/>
+          <a:ln/>
+        </p:spPr>
+        <p:txBody>
+          <a:bodyPr wrap="square" lIns="0" tIns="0" rIns="0" bIns="0" rtlCol="0" anchor="ctr"/>
+          <a:lstStyle/>
+          <a:p>
+            <a:pPr marL="0" indent="0">
+              <a:buNone/>
+            </a:pPr>
+            <a:r>
+              <a:rPr lang="en-US" sz="1300" i="1" dirty="0">
+                <a:solidFill>
+                  <a:srgbClr val="718096"/>
+                </a:solidFill>
+                <a:latin typeface="Calibri" pitchFamily="34" charset="0"/>
+                <a:ea typeface="Calibri" pitchFamily="34" charset="-122"/>
+                <a:cs typeface="Calibri" pitchFamily="34" charset="-120"/>
+              </a:rPr>
+              <a:t>Typical 4 phases of an optimization request</a:t>
+            </a:r>
+            <a:endParaRPr lang="en-US" sz="1300" dirty="0"/>
+          </a:p>
+        </p:txBody>
+      </p:sp>
+      <p:sp>
+        <p:nvSpPr>
+          <p:cNvPr id="17" name="Text 3">
+            <a:extLst>
+              <a:ext uri="{FF2B5EF4-FFF2-40B4-BE49-F238E27FC236}">
+                <a16:creationId xmlns:a16="http://schemas.microsoft.com/office/drawing/2014/main" id="{8792585A-C895-3571-2E5C-0BC9B8E5B05B}"/>
+              </a:ext>
+            </a:extLst>
+          </p:cNvPr>
+          <p:cNvSpPr/>
+          <p:nvPr/>
+        </p:nvSpPr>
+        <p:spPr>
+          <a:xfrm>
+            <a:off x="608768" y="4169288"/>
+            <a:ext cx="7936716" cy="565056"/>
+          </a:xfrm>
+          <a:prstGeom prst="rect">
+            <a:avLst/>
+          </a:prstGeom>
+          <a:noFill/>
+          <a:ln/>
+        </p:spPr>
+        <p:txBody>
+          <a:bodyPr wrap="square" lIns="0" tIns="0" rIns="0" bIns="0" rtlCol="0" anchor="ctr"/>
+          <a:lstStyle/>
+          <a:p>
+            <a:r>
+              <a:rPr lang="en-US" sz="1400" dirty="0">
+                <a:latin typeface="Calibri" pitchFamily="34" charset="0"/>
+                <a:ea typeface="Calibri" pitchFamily="34" charset="-122"/>
+                <a:cs typeface="Calibri" pitchFamily="34" charset="-120"/>
+              </a:rPr>
+              <a:t>✅ Separation of concerns    	✅ Testable modules	    ✅ Simple interfaces 	       ✅ Solver agnostic</a:t>
+            </a:r>
+            <a:endParaRPr lang="en-US" sz="1400" dirty="0"/>
+          </a:p>
+        </p:txBody>
+      </p:sp>
     </p:spTree>
+    <p:extLst>
+      <p:ext uri="{BB962C8B-B14F-4D97-AF65-F5344CB8AC3E}">
+        <p14:creationId xmlns:p14="http://schemas.microsoft.com/office/powerpoint/2010/main" val="3722778403"/>
+      </p:ext>
+    </p:extLst>
+  </p:cSld>
+  <p:clrMapOvr>
+    <a:masterClrMapping/>
+  </p:clrMapOvr>
+</p:sld>
+</file>
+
+<file path=ppt/slides/slide39.xml><?xml version="1.0" encoding="utf-8"?>
+<p:sld xmlns:a="http://schemas.openxmlformats.org/drawingml/2006/main" xmlns:r="http://schemas.openxmlformats.org/officeDocument/2006/relationships" xmlns:p="http://schemas.openxmlformats.org/presentationml/2006/main">
+  <p:cSld>
+    <p:spTree>
+      <p:nvGrpSpPr>
+        <p:cNvPr id="1" name="">
+          <a:extLst>
+            <a:ext uri="{FF2B5EF4-FFF2-40B4-BE49-F238E27FC236}">
+              <a16:creationId xmlns:a16="http://schemas.microsoft.com/office/drawing/2014/main" id="{E086013E-D9A5-320A-F9EF-13A9CF322872}"/>
+            </a:ext>
+          </a:extLst>
+        </p:cNvPr>
+        <p:cNvGrpSpPr/>
+        <p:nvPr/>
+      </p:nvGrpSpPr>
+      <p:grpSpPr>
+        <a:xfrm>
+          <a:off x="0" y="0"/>
+          <a:ext cx="0" cy="0"/>
+          <a:chOff x="0" y="0"/>
+          <a:chExt cx="0" cy="0"/>
+        </a:xfrm>
+      </p:grpSpPr>
+      <p:sp>
+        <p:nvSpPr>
+          <p:cNvPr id="20" name="Text 1">
+            <a:extLst>
+              <a:ext uri="{FF2B5EF4-FFF2-40B4-BE49-F238E27FC236}">
+                <a16:creationId xmlns:a16="http://schemas.microsoft.com/office/drawing/2014/main" id="{32BA3E97-AD32-48FF-112A-2AE500383CE2}"/>
+              </a:ext>
+            </a:extLst>
+          </p:cNvPr>
+          <p:cNvSpPr/>
+          <p:nvPr/>
+        </p:nvSpPr>
+        <p:spPr>
+          <a:xfrm>
+            <a:off x="502920" y="228600"/>
+            <a:ext cx="8321040" cy="685800"/>
+          </a:xfrm>
+          <a:prstGeom prst="rect">
+            <a:avLst/>
+          </a:prstGeom>
+          <a:noFill/>
+          <a:ln/>
+        </p:spPr>
+        <p:txBody>
+          <a:bodyPr wrap="square" lIns="0" tIns="0" rIns="0" bIns="0" rtlCol="0" anchor="ctr"/>
+          <a:lstStyle/>
+          <a:p>
+            <a:pPr marL="0" indent="0">
+              <a:buNone/>
+            </a:pPr>
+            <a:r>
+              <a:rPr lang="en-US" sz="3000" b="1" dirty="0">
+                <a:solidFill>
+                  <a:srgbClr val="0A1628"/>
+                </a:solidFill>
+                <a:latin typeface="Calibri" pitchFamily="34" charset="0"/>
+                <a:ea typeface="Calibri" pitchFamily="34" charset="-122"/>
+                <a:cs typeface="Calibri" pitchFamily="34" charset="-120"/>
+              </a:rPr>
+              <a:t>How to test an optimization module?</a:t>
+            </a:r>
+            <a:endParaRPr lang="en-US" sz="3000" dirty="0"/>
+          </a:p>
+        </p:txBody>
+      </p:sp>
+      <p:sp>
+        <p:nvSpPr>
+          <p:cNvPr id="8" name="Shape 4">
+            <a:extLst>
+              <a:ext uri="{FF2B5EF4-FFF2-40B4-BE49-F238E27FC236}">
+                <a16:creationId xmlns:a16="http://schemas.microsoft.com/office/drawing/2014/main" id="{4548604E-56FF-ACCD-0613-574C0D54A17E}"/>
+              </a:ext>
+            </a:extLst>
+          </p:cNvPr>
+          <p:cNvSpPr/>
+          <p:nvPr/>
+        </p:nvSpPr>
+        <p:spPr>
+          <a:xfrm>
+            <a:off x="2176272" y="1417319"/>
+            <a:ext cx="4791456" cy="2324095"/>
+          </a:xfrm>
+          <a:prstGeom prst="rect">
+            <a:avLst/>
+          </a:prstGeom>
+          <a:solidFill>
+            <a:schemeClr val="tx1"/>
+          </a:solidFill>
+          <a:ln w="12700">
+            <a:solidFill>
+              <a:srgbClr val="333355"/>
+            </a:solidFill>
+            <a:prstDash val="solid"/>
+          </a:ln>
+        </p:spPr>
+        <p:txBody>
+          <a:bodyPr/>
+          <a:lstStyle/>
+          <a:p>
+            <a:endParaRPr lang="en-US"/>
+          </a:p>
+        </p:txBody>
+      </p:sp>
+      <p:sp>
+        <p:nvSpPr>
+          <p:cNvPr id="9" name="Text 5">
+            <a:extLst>
+              <a:ext uri="{FF2B5EF4-FFF2-40B4-BE49-F238E27FC236}">
+                <a16:creationId xmlns:a16="http://schemas.microsoft.com/office/drawing/2014/main" id="{1C270257-81B9-8BAF-A5B8-ECDDF85EC092}"/>
+              </a:ext>
+            </a:extLst>
+          </p:cNvPr>
+          <p:cNvSpPr/>
+          <p:nvPr/>
+        </p:nvSpPr>
+        <p:spPr>
+          <a:xfrm>
+            <a:off x="2176272" y="1417319"/>
+            <a:ext cx="4791456" cy="2324089"/>
+          </a:xfrm>
+          <a:prstGeom prst="rect">
+            <a:avLst/>
+          </a:prstGeom>
+          <a:noFill/>
+          <a:ln/>
+        </p:spPr>
+        <p:txBody>
+          <a:bodyPr wrap="square" rtlCol="0" anchor="ctr"/>
+          <a:lstStyle/>
+          <a:p>
+            <a:pPr marL="0" indent="0" algn="ctr">
+              <a:buNone/>
+            </a:pPr>
+            <a:r>
+              <a:rPr lang="en-US" sz="2200" b="1" dirty="0">
+                <a:solidFill>
+                  <a:srgbClr val="FFFFFF"/>
+                </a:solidFill>
+                <a:latin typeface="Calibri" pitchFamily="34" charset="0"/>
+                <a:ea typeface="Calibri" pitchFamily="34" charset="-122"/>
+                <a:cs typeface="Calibri" pitchFamily="34" charset="-120"/>
+              </a:rPr>
+              <a:t>Optimization module:</a:t>
+            </a:r>
+          </a:p>
+          <a:p>
+            <a:pPr marL="342900" indent="-342900" algn="ctr">
+              <a:buFontTx/>
+              <a:buChar char="-"/>
+            </a:pPr>
+            <a:r>
+              <a:rPr lang="en-US" sz="2200" b="1" dirty="0">
+                <a:solidFill>
+                  <a:srgbClr val="FFFFFF"/>
+                </a:solidFill>
+                <a:latin typeface="Calibri" pitchFamily="34" charset="0"/>
+                <a:ea typeface="Calibri" pitchFamily="34" charset="-122"/>
+                <a:cs typeface="Calibri" pitchFamily="34" charset="-120"/>
+              </a:rPr>
+              <a:t>builds the math</a:t>
+            </a:r>
+          </a:p>
+          <a:p>
+            <a:pPr marL="342900" indent="-342900" algn="ctr">
+              <a:buFontTx/>
+              <a:buChar char="-"/>
+            </a:pPr>
+            <a:r>
+              <a:rPr lang="en-US" sz="2200" b="1" dirty="0">
+                <a:solidFill>
+                  <a:srgbClr val="FFFFFF"/>
+                </a:solidFill>
+                <a:latin typeface="Calibri" pitchFamily="34" charset="0"/>
+                <a:ea typeface="Calibri" pitchFamily="34" charset="-122"/>
+                <a:cs typeface="Calibri" pitchFamily="34" charset="-120"/>
+              </a:rPr>
+              <a:t>solves the math</a:t>
+            </a:r>
+            <a:endParaRPr lang="en-US" sz="2200" dirty="0"/>
+          </a:p>
+        </p:txBody>
+      </p:sp>
+      <mc:AlternateContent xmlns:mc="http://schemas.openxmlformats.org/markup-compatibility/2006" xmlns:a14="http://schemas.microsoft.com/office/drawing/2010/main">
+        <mc:Choice Requires="a14">
+          <p:sp>
+            <p:nvSpPr>
+              <p:cNvPr id="14" name="Shape 10">
+                <a:extLst>
+                  <a:ext uri="{FF2B5EF4-FFF2-40B4-BE49-F238E27FC236}">
+                    <a16:creationId xmlns:a16="http://schemas.microsoft.com/office/drawing/2014/main" id="{88F02D7D-0084-A4F4-C5E6-819771FCB160}"/>
+                  </a:ext>
+                </a:extLst>
+              </p:cNvPr>
+              <p:cNvSpPr/>
+              <p:nvPr/>
+            </p:nvSpPr>
+            <p:spPr>
+              <a:xfrm>
+                <a:off x="2176272" y="3969260"/>
+                <a:ext cx="4791456" cy="678175"/>
+              </a:xfrm>
+              <a:prstGeom prst="roundRect">
+                <a:avLst>
+                  <a:gd name="adj" fmla="val 9677"/>
+                </a:avLst>
+              </a:prstGeom>
+              <a:solidFill>
+                <a:srgbClr val="FEF3DC"/>
+              </a:solidFill>
+              <a:ln w="6350">
+                <a:solidFill>
+                  <a:srgbClr val="BA7517"/>
+                </a:solidFill>
+                <a:prstDash val="solid"/>
+              </a:ln>
+            </p:spPr>
+            <p:txBody>
+              <a:bodyPr anchor="ctr"/>
+              <a:lstStyle/>
+              <a:p>
+                <a:pPr algn="ctr"/>
+                <a:r>
+                  <a:rPr lang="en-US" sz="1400" dirty="0">
+                    <a:solidFill>
+                      <a:schemeClr val="tx1"/>
+                    </a:solidFill>
+                    <a:latin typeface="Calibri" pitchFamily="34" charset="0"/>
+                    <a:ea typeface="Calibri" pitchFamily="34" charset="-122"/>
+                    <a:cs typeface="Calibri" pitchFamily="34" charset="-120"/>
+                  </a:rPr>
+                  <a:t>For real instances is practically impossible to know what should be the expected output </a:t>
+                </a:r>
+                <a14:m>
+                  <m:oMath xmlns:m="http://schemas.openxmlformats.org/officeDocument/2006/math">
+                    <m:r>
+                      <a:rPr lang="en-US" sz="1400" b="0" i="1" smtClean="0">
+                        <a:solidFill>
+                          <a:schemeClr val="tx1"/>
+                        </a:solidFill>
+                        <a:latin typeface="Cambria Math" panose="02040503050406030204" pitchFamily="18" charset="0"/>
+                        <a:ea typeface="Calibri" pitchFamily="34" charset="-122"/>
+                        <a:cs typeface="Calibri" pitchFamily="34" charset="-120"/>
+                      </a:rPr>
+                      <m:t>𝑓</m:t>
+                    </m:r>
+                    <m:r>
+                      <a:rPr lang="en-US" sz="1400" b="0" i="1" smtClean="0">
+                        <a:solidFill>
+                          <a:schemeClr val="tx1"/>
+                        </a:solidFill>
+                        <a:latin typeface="Cambria Math" panose="02040503050406030204" pitchFamily="18" charset="0"/>
+                        <a:ea typeface="Calibri" pitchFamily="34" charset="-122"/>
+                        <a:cs typeface="Calibri" pitchFamily="34" charset="-120"/>
+                      </a:rPr>
+                      <m:t>(</m:t>
+                    </m:r>
+                    <m:r>
+                      <a:rPr lang="en-US" sz="1400" b="0" i="1" smtClean="0">
+                        <a:solidFill>
+                          <a:schemeClr val="tx1"/>
+                        </a:solidFill>
+                        <a:latin typeface="Cambria Math" panose="02040503050406030204" pitchFamily="18" charset="0"/>
+                        <a:ea typeface="Calibri" pitchFamily="34" charset="-122"/>
+                        <a:cs typeface="Calibri" pitchFamily="34" charset="-120"/>
+                      </a:rPr>
+                      <m:t>𝑥</m:t>
+                    </m:r>
+                    <m:r>
+                      <a:rPr lang="en-US" sz="1400" b="0" i="1" smtClean="0">
+                        <a:solidFill>
+                          <a:schemeClr val="tx1"/>
+                        </a:solidFill>
+                        <a:latin typeface="Cambria Math" panose="02040503050406030204" pitchFamily="18" charset="0"/>
+                        <a:ea typeface="Calibri" pitchFamily="34" charset="-122"/>
+                        <a:cs typeface="Calibri" pitchFamily="34" charset="-120"/>
+                      </a:rPr>
+                      <m:t>)</m:t>
+                    </m:r>
+                  </m:oMath>
+                </a14:m>
+                <a:r>
+                  <a:rPr lang="en-US" sz="1400" dirty="0">
+                    <a:solidFill>
+                      <a:schemeClr val="tx1"/>
+                    </a:solidFill>
+                    <a:latin typeface="Calibri" pitchFamily="34" charset="0"/>
+                    <a:ea typeface="Calibri" pitchFamily="34" charset="-122"/>
+                    <a:cs typeface="Calibri" pitchFamily="34" charset="-120"/>
+                  </a:rPr>
+                  <a:t> given some input data </a:t>
+                </a:r>
+                <a14:m>
+                  <m:oMath xmlns:m="http://schemas.openxmlformats.org/officeDocument/2006/math">
+                    <m:r>
+                      <a:rPr lang="en-US" sz="1400" i="1" dirty="0" smtClean="0">
+                        <a:solidFill>
+                          <a:schemeClr val="tx1"/>
+                        </a:solidFill>
+                        <a:latin typeface="Cambria Math" panose="02040503050406030204" pitchFamily="18" charset="0"/>
+                        <a:ea typeface="Calibri" pitchFamily="34" charset="-122"/>
+                        <a:cs typeface="Calibri" pitchFamily="34" charset="-120"/>
+                      </a:rPr>
+                      <m:t>𝑥</m:t>
+                    </m:r>
+                  </m:oMath>
+                </a14:m>
+                <a:endParaRPr lang="en-US" sz="1400" dirty="0">
+                  <a:solidFill>
+                    <a:schemeClr val="tx1"/>
+                  </a:solidFill>
+                </a:endParaRPr>
+              </a:p>
+            </p:txBody>
+          </p:sp>
+        </mc:Choice>
+        <mc:Fallback xmlns="">
+          <p:sp>
+            <p:nvSpPr>
+              <p:cNvPr id="14" name="Shape 10">
+                <a:extLst>
+                  <a:ext uri="{FF2B5EF4-FFF2-40B4-BE49-F238E27FC236}">
+                    <a16:creationId xmlns:a16="http://schemas.microsoft.com/office/drawing/2014/main" id="{88F02D7D-0084-A4F4-C5E6-819771FCB160}"/>
+                  </a:ext>
+                </a:extLst>
+              </p:cNvPr>
+              <p:cNvSpPr>
+                <a:spLocks noRot="1" noChangeAspect="1" noMove="1" noResize="1" noEditPoints="1" noAdjustHandles="1" noChangeArrowheads="1" noChangeShapeType="1" noTextEdit="1"/>
+              </p:cNvSpPr>
+              <p:nvPr/>
+            </p:nvSpPr>
+            <p:spPr>
+              <a:xfrm>
+                <a:off x="2176272" y="3969260"/>
+                <a:ext cx="4791456" cy="678175"/>
+              </a:xfrm>
+              <a:prstGeom prst="roundRect">
+                <a:avLst>
+                  <a:gd name="adj" fmla="val 9677"/>
+                </a:avLst>
+              </a:prstGeom>
+              <a:blipFill>
+                <a:blip r:embed="rId3"/>
+                <a:stretch>
+                  <a:fillRect r="-635"/>
+                </a:stretch>
+              </a:blipFill>
+              <a:ln w="6350">
+                <a:solidFill>
+                  <a:srgbClr val="BA7517"/>
+                </a:solidFill>
+                <a:prstDash val="solid"/>
+              </a:ln>
+            </p:spPr>
+            <p:txBody>
+              <a:bodyPr/>
+              <a:lstStyle/>
+              <a:p>
+                <a:r>
+                  <a:rPr lang="en-US">
+                    <a:noFill/>
+                  </a:rPr>
+                  <a:t> </a:t>
+                </a:r>
+              </a:p>
+            </p:txBody>
+          </p:sp>
+        </mc:Fallback>
+      </mc:AlternateContent>
+      <p:sp>
+        <p:nvSpPr>
+          <p:cNvPr id="16" name="Shape 7">
+            <a:extLst>
+              <a:ext uri="{FF2B5EF4-FFF2-40B4-BE49-F238E27FC236}">
+                <a16:creationId xmlns:a16="http://schemas.microsoft.com/office/drawing/2014/main" id="{455760AB-5CE3-CFD9-A1AB-8040B0C14127}"/>
+              </a:ext>
+            </a:extLst>
+          </p:cNvPr>
+          <p:cNvSpPr/>
+          <p:nvPr/>
+        </p:nvSpPr>
+        <p:spPr>
+          <a:xfrm>
+            <a:off x="7036308" y="2636520"/>
+            <a:ext cx="914400" cy="0"/>
+          </a:xfrm>
+          <a:prstGeom prst="line">
+            <a:avLst/>
+          </a:prstGeom>
+          <a:noFill/>
+          <a:ln w="19050">
+            <a:solidFill>
+              <a:srgbClr val="BA7517"/>
+            </a:solidFill>
+            <a:prstDash val="solid"/>
+            <a:tailEnd type="arrow"/>
+          </a:ln>
+        </p:spPr>
+        <p:txBody>
+          <a:bodyPr/>
+          <a:lstStyle/>
+          <a:p>
+            <a:endParaRPr lang="en-US"/>
+          </a:p>
+        </p:txBody>
+      </p:sp>
+      <mc:AlternateContent xmlns:mc="http://schemas.openxmlformats.org/markup-compatibility/2006" xmlns:a14="http://schemas.microsoft.com/office/drawing/2010/main">
+        <mc:Choice Requires="a14">
+          <p:sp>
+            <p:nvSpPr>
+              <p:cNvPr id="17" name="Text 8">
+                <a:extLst>
+                  <a:ext uri="{FF2B5EF4-FFF2-40B4-BE49-F238E27FC236}">
+                    <a16:creationId xmlns:a16="http://schemas.microsoft.com/office/drawing/2014/main" id="{066CE955-279D-657E-44A2-62A572DF8DA7}"/>
+                  </a:ext>
+                </a:extLst>
+              </p:cNvPr>
+              <p:cNvSpPr/>
+              <p:nvPr/>
+            </p:nvSpPr>
+            <p:spPr>
+              <a:xfrm>
+                <a:off x="8092440" y="2368914"/>
+                <a:ext cx="822960" cy="457200"/>
+              </a:xfrm>
+              <a:prstGeom prst="rect">
+                <a:avLst/>
+              </a:prstGeom>
+              <a:noFill/>
+              <a:ln/>
+            </p:spPr>
+            <p:txBody>
+              <a:bodyPr wrap="square" rtlCol="0" anchor="ctr"/>
+              <a:lstStyle/>
+              <a:p>
+                <a:pPr marL="0" indent="0" algn="ctr">
+                  <a:buNone/>
+                </a:pPr>
+                <a14:m>
+                  <m:oMathPara xmlns:m="http://schemas.openxmlformats.org/officeDocument/2006/math">
+                    <m:oMathParaPr>
+                      <m:jc m:val="centerGroup"/>
+                    </m:oMathParaPr>
+                    <m:oMath xmlns:m="http://schemas.openxmlformats.org/officeDocument/2006/math">
+                      <m:r>
+                        <a:rPr lang="en-US" sz="2600" b="1" i="1" dirty="0" smtClean="0">
+                          <a:solidFill>
+                            <a:srgbClr val="7A4D0C"/>
+                          </a:solidFill>
+                          <a:latin typeface="Cambria Math" panose="02040503050406030204" pitchFamily="18" charset="0"/>
+                          <a:ea typeface="Calibri" pitchFamily="34" charset="-122"/>
+                          <a:cs typeface="Calibri" pitchFamily="34" charset="-120"/>
+                        </a:rPr>
+                        <m:t>𝒇</m:t>
+                      </m:r>
+                      <m:r>
+                        <a:rPr lang="en-US" sz="2600" b="1" i="1" dirty="0" smtClean="0">
+                          <a:solidFill>
+                            <a:srgbClr val="7A4D0C"/>
+                          </a:solidFill>
+                          <a:latin typeface="Cambria Math" panose="02040503050406030204" pitchFamily="18" charset="0"/>
+                          <a:ea typeface="Calibri" pitchFamily="34" charset="-122"/>
+                          <a:cs typeface="Calibri" pitchFamily="34" charset="-120"/>
+                        </a:rPr>
+                        <m:t> (</m:t>
+                      </m:r>
+                      <m:r>
+                        <a:rPr lang="en-US" sz="2600" b="1" i="1" dirty="0" smtClean="0">
+                          <a:solidFill>
+                            <a:srgbClr val="7A4D0C"/>
+                          </a:solidFill>
+                          <a:latin typeface="Cambria Math" panose="02040503050406030204" pitchFamily="18" charset="0"/>
+                          <a:ea typeface="Calibri" pitchFamily="34" charset="-122"/>
+                          <a:cs typeface="Calibri" pitchFamily="34" charset="-120"/>
+                        </a:rPr>
+                        <m:t>𝒙</m:t>
+                      </m:r>
+                      <m:r>
+                        <a:rPr lang="en-US" sz="2600" b="1" i="1" dirty="0" smtClean="0">
+                          <a:solidFill>
+                            <a:srgbClr val="7A4D0C"/>
+                          </a:solidFill>
+                          <a:latin typeface="Cambria Math" panose="02040503050406030204" pitchFamily="18" charset="0"/>
+                          <a:ea typeface="Calibri" pitchFamily="34" charset="-122"/>
+                          <a:cs typeface="Calibri" pitchFamily="34" charset="-120"/>
+                        </a:rPr>
+                        <m:t>)</m:t>
+                      </m:r>
+                    </m:oMath>
+                  </m:oMathPara>
+                </a14:m>
+                <a:endParaRPr/>
+              </a:p>
+            </p:txBody>
+          </p:sp>
+        </mc:Choice>
+        <mc:Fallback xmlns="">
+          <p:sp>
+            <p:nvSpPr>
+              <p:cNvPr id="17" name="Text 8">
+                <a:extLst>
+                  <a:ext uri="{FF2B5EF4-FFF2-40B4-BE49-F238E27FC236}">
+                    <a16:creationId xmlns:a16="http://schemas.microsoft.com/office/drawing/2014/main" id="{066CE955-279D-657E-44A2-62A572DF8DA7}"/>
+                  </a:ext>
+                </a:extLst>
+              </p:cNvPr>
+              <p:cNvSpPr>
+                <a:spLocks noRot="1" noChangeAspect="1" noMove="1" noResize="1" noEditPoints="1" noAdjustHandles="1" noChangeArrowheads="1" noChangeShapeType="1" noTextEdit="1"/>
+              </p:cNvSpPr>
+              <p:nvPr/>
+            </p:nvSpPr>
+            <p:spPr>
+              <a:xfrm>
+                <a:off x="8092440" y="2368914"/>
+                <a:ext cx="822960" cy="457200"/>
+              </a:xfrm>
+              <a:prstGeom prst="rect">
+                <a:avLst/>
+              </a:prstGeom>
+              <a:blipFill>
+                <a:blip r:embed="rId4"/>
+                <a:stretch>
+                  <a:fillRect/>
+                </a:stretch>
+              </a:blipFill>
+              <a:ln/>
+            </p:spPr>
+            <p:txBody>
+              <a:bodyPr/>
+              <a:lstStyle/>
+              <a:p>
+                <a:r>
+                  <a:rPr lang="en-US">
+                    <a:noFill/>
+                  </a:rPr>
+                  <a:t> </a:t>
+                </a:r>
+              </a:p>
+            </p:txBody>
+          </p:sp>
+        </mc:Fallback>
+      </mc:AlternateContent>
+      <p:sp>
+        <p:nvSpPr>
+          <p:cNvPr id="18" name="Text 9">
+            <a:extLst>
+              <a:ext uri="{FF2B5EF4-FFF2-40B4-BE49-F238E27FC236}">
+                <a16:creationId xmlns:a16="http://schemas.microsoft.com/office/drawing/2014/main" id="{5D347BC4-305B-050D-7273-5D99FB4C3172}"/>
+              </a:ext>
+            </a:extLst>
+          </p:cNvPr>
+          <p:cNvSpPr/>
+          <p:nvPr/>
+        </p:nvSpPr>
+        <p:spPr>
+          <a:xfrm>
+            <a:off x="8001000" y="2826114"/>
+            <a:ext cx="914400" cy="274320"/>
+          </a:xfrm>
+          <a:prstGeom prst="rect">
+            <a:avLst/>
+          </a:prstGeom>
+          <a:noFill/>
+          <a:ln/>
+        </p:spPr>
+        <p:txBody>
+          <a:bodyPr wrap="square" rtlCol="0" anchor="ctr"/>
+          <a:lstStyle/>
+          <a:p>
+            <a:pPr marL="0" indent="0" algn="ctr">
+              <a:buNone/>
+            </a:pPr>
+            <a:r>
+              <a:rPr lang="en-US" sz="1400" dirty="0">
+                <a:solidFill>
+                  <a:srgbClr val="718096"/>
+                </a:solidFill>
+                <a:latin typeface="Calibri" pitchFamily="34" charset="0"/>
+                <a:ea typeface="Calibri" pitchFamily="34" charset="-122"/>
+                <a:cs typeface="Calibri" pitchFamily="34" charset="-120"/>
+              </a:rPr>
+              <a:t>(solution)</a:t>
+            </a:r>
+            <a:endParaRPr lang="en-US" sz="1400" dirty="0"/>
+          </a:p>
+        </p:txBody>
+      </p:sp>
+      <mc:AlternateContent xmlns:mc="http://schemas.openxmlformats.org/markup-compatibility/2006" xmlns:a14="http://schemas.microsoft.com/office/drawing/2010/main">
+        <mc:Choice Requires="a14">
+          <p:sp>
+            <p:nvSpPr>
+              <p:cNvPr id="19" name="Text 1">
+                <a:extLst>
+                  <a:ext uri="{FF2B5EF4-FFF2-40B4-BE49-F238E27FC236}">
+                    <a16:creationId xmlns:a16="http://schemas.microsoft.com/office/drawing/2014/main" id="{707F6B98-3280-A0AC-265C-6965E164C498}"/>
+                  </a:ext>
+                </a:extLst>
+              </p:cNvPr>
+              <p:cNvSpPr/>
+              <p:nvPr/>
+            </p:nvSpPr>
+            <p:spPr>
+              <a:xfrm>
+                <a:off x="594360" y="2249425"/>
+                <a:ext cx="548640" cy="457200"/>
+              </a:xfrm>
+              <a:prstGeom prst="rect">
+                <a:avLst/>
+              </a:prstGeom>
+              <a:noFill/>
+              <a:ln/>
+            </p:spPr>
+            <p:txBody>
+              <a:bodyPr wrap="square" rtlCol="0" anchor="ctr"/>
+              <a:lstStyle/>
+              <a:p>
+                <a:pPr marL="0" indent="0" algn="ctr">
+                  <a:buNone/>
+                </a:pPr>
+                <a14:m>
+                  <m:oMathPara xmlns:m="http://schemas.openxmlformats.org/officeDocument/2006/math">
+                    <m:oMathParaPr>
+                      <m:jc m:val="centerGroup"/>
+                    </m:oMathParaPr>
+                    <m:oMath xmlns:m="http://schemas.openxmlformats.org/officeDocument/2006/math">
+                      <m:r>
+                        <a:rPr lang="en-US" sz="2800" b="1" i="1" dirty="0" smtClean="0">
+                          <a:solidFill>
+                            <a:srgbClr val="0F6E56"/>
+                          </a:solidFill>
+                          <a:latin typeface="Cambria Math" panose="02040503050406030204" pitchFamily="18" charset="0"/>
+                          <a:ea typeface="Calibri" pitchFamily="34" charset="-122"/>
+                          <a:cs typeface="Calibri" pitchFamily="34" charset="-120"/>
+                        </a:rPr>
+                        <m:t>𝒙</m:t>
+                      </m:r>
+                    </m:oMath>
+                  </m:oMathPara>
+                </a14:m>
+                <a:endParaRPr/>
+              </a:p>
+            </p:txBody>
+          </p:sp>
+        </mc:Choice>
+        <mc:Fallback xmlns="">
+          <p:sp>
+            <p:nvSpPr>
+              <p:cNvPr id="19" name="Text 1">
+                <a:extLst>
+                  <a:ext uri="{FF2B5EF4-FFF2-40B4-BE49-F238E27FC236}">
+                    <a16:creationId xmlns:a16="http://schemas.microsoft.com/office/drawing/2014/main" id="{707F6B98-3280-A0AC-265C-6965E164C498}"/>
+                  </a:ext>
+                </a:extLst>
+              </p:cNvPr>
+              <p:cNvSpPr>
+                <a:spLocks noRot="1" noChangeAspect="1" noMove="1" noResize="1" noEditPoints="1" noAdjustHandles="1" noChangeArrowheads="1" noChangeShapeType="1" noTextEdit="1"/>
+              </p:cNvSpPr>
+              <p:nvPr/>
+            </p:nvSpPr>
+            <p:spPr>
+              <a:xfrm>
+                <a:off x="594360" y="2249425"/>
+                <a:ext cx="548640" cy="457200"/>
+              </a:xfrm>
+              <a:prstGeom prst="rect">
+                <a:avLst/>
+              </a:prstGeom>
+              <a:blipFill>
+                <a:blip r:embed="rId5"/>
+                <a:stretch>
+                  <a:fillRect/>
+                </a:stretch>
+              </a:blipFill>
+              <a:ln/>
+            </p:spPr>
+            <p:txBody>
+              <a:bodyPr/>
+              <a:lstStyle/>
+              <a:p>
+                <a:r>
+                  <a:rPr lang="en-US">
+                    <a:noFill/>
+                  </a:rPr>
+                  <a:t> </a:t>
+                </a:r>
+              </a:p>
+            </p:txBody>
+          </p:sp>
+        </mc:Fallback>
+      </mc:AlternateContent>
+      <p:sp>
+        <p:nvSpPr>
+          <p:cNvPr id="21" name="Text 2">
+            <a:extLst>
+              <a:ext uri="{FF2B5EF4-FFF2-40B4-BE49-F238E27FC236}">
+                <a16:creationId xmlns:a16="http://schemas.microsoft.com/office/drawing/2014/main" id="{2D1A7717-1CE3-434A-E250-8B7C09995B22}"/>
+              </a:ext>
+            </a:extLst>
+          </p:cNvPr>
+          <p:cNvSpPr/>
+          <p:nvPr/>
+        </p:nvSpPr>
+        <p:spPr>
+          <a:xfrm>
+            <a:off x="480246" y="2796546"/>
+            <a:ext cx="731520" cy="274320"/>
+          </a:xfrm>
+          <a:prstGeom prst="rect">
+            <a:avLst/>
+          </a:prstGeom>
+          <a:noFill/>
+          <a:ln/>
+        </p:spPr>
+        <p:txBody>
+          <a:bodyPr wrap="square" rtlCol="0" anchor="ctr"/>
+          <a:lstStyle/>
+          <a:p>
+            <a:pPr marL="0" indent="0" algn="ctr">
+              <a:buNone/>
+            </a:pPr>
+            <a:r>
+              <a:rPr lang="en-US" sz="1400" dirty="0">
+                <a:solidFill>
+                  <a:srgbClr val="718096"/>
+                </a:solidFill>
+                <a:latin typeface="Calibri" pitchFamily="34" charset="0"/>
+                <a:ea typeface="Calibri" pitchFamily="34" charset="-122"/>
+                <a:cs typeface="Calibri" pitchFamily="34" charset="-120"/>
+              </a:rPr>
+              <a:t>(data)</a:t>
+            </a:r>
+            <a:endParaRPr lang="en-US" sz="1400" dirty="0"/>
+          </a:p>
+        </p:txBody>
+      </p:sp>
+      <p:sp>
+        <p:nvSpPr>
+          <p:cNvPr id="22" name="Shape 3">
+            <a:extLst>
+              <a:ext uri="{FF2B5EF4-FFF2-40B4-BE49-F238E27FC236}">
+                <a16:creationId xmlns:a16="http://schemas.microsoft.com/office/drawing/2014/main" id="{020DCCA6-E951-72BC-3B31-9AEB3F095328}"/>
+              </a:ext>
+            </a:extLst>
+          </p:cNvPr>
+          <p:cNvSpPr/>
+          <p:nvPr/>
+        </p:nvSpPr>
+        <p:spPr>
+          <a:xfrm>
+            <a:off x="1188720" y="2597514"/>
+            <a:ext cx="914400" cy="0"/>
+          </a:xfrm>
+          <a:prstGeom prst="line">
+            <a:avLst/>
+          </a:prstGeom>
+          <a:noFill/>
+          <a:ln w="19050">
+            <a:solidFill>
+              <a:srgbClr val="1D9E75"/>
+            </a:solidFill>
+            <a:prstDash val="solid"/>
+            <a:tailEnd type="arrow"/>
+          </a:ln>
+        </p:spPr>
+        <p:txBody>
+          <a:bodyPr/>
+          <a:lstStyle/>
+          <a:p>
+            <a:endParaRPr lang="en-US"/>
+          </a:p>
+        </p:txBody>
+      </p:sp>
+      <p:sp>
+        <p:nvSpPr>
+          <p:cNvPr id="3" name="Rectangle 2">
+            <a:extLst>
+              <a:ext uri="{FF2B5EF4-FFF2-40B4-BE49-F238E27FC236}">
+                <a16:creationId xmlns:a16="http://schemas.microsoft.com/office/drawing/2014/main" id="{BF86684F-ACFF-0D32-BA45-FD1653CF7B86}"/>
+              </a:ext>
+            </a:extLst>
+          </p:cNvPr>
+          <p:cNvSpPr/>
+          <p:nvPr/>
+        </p:nvSpPr>
+        <p:spPr>
+          <a:xfrm>
+            <a:off x="457200" y="987552"/>
+            <a:ext cx="8229600" cy="36576"/>
+          </a:xfrm>
+          <a:prstGeom prst="rect">
+            <a:avLst/>
+          </a:prstGeom>
+          <a:solidFill>
+            <a:srgbClr val="0077A8"/>
+          </a:solidFill>
+          <a:ln>
+            <a:noFill/>
+          </a:ln>
+        </p:spPr>
+        <p:style>
+          <a:lnRef idx="1">
+            <a:schemeClr val="accent1"/>
+          </a:lnRef>
+          <a:fillRef idx="3">
+            <a:schemeClr val="accent1"/>
+          </a:fillRef>
+          <a:effectRef idx="2">
+            <a:schemeClr val="accent1"/>
+          </a:effectRef>
+          <a:fontRef idx="minor">
+            <a:schemeClr val="lt1"/>
+          </a:fontRef>
+        </p:style>
+        <p:txBody>
+          <a:bodyPr rtlCol="0" anchor="ctr"/>
+          <a:lstStyle/>
+          <a:p>
+            <a:pPr algn="ctr"/>
+            <a:endParaRPr/>
+          </a:p>
+        </p:txBody>
+      </p:sp>
+    </p:spTree>
+    <p:extLst>
+      <p:ext uri="{BB962C8B-B14F-4D97-AF65-F5344CB8AC3E}">
+        <p14:creationId xmlns:p14="http://schemas.microsoft.com/office/powerpoint/2010/main" val="551972396"/>
+      </p:ext>
+    </p:extLst>
   </p:cSld>
   <p:clrMapOvr>
     <a:masterClrMapping/>
@@ -23229,7 +26005,7 @@
                 </a:solidFill>
                 <a:latin typeface="Calibri"/>
               </a:rPr>
-              <a:t>Materials and resources</a:t>
+              <a:t>Public materials and resources</a:t>
             </a:r>
             <a:endParaRPr sz="3000" b="1" i="0" dirty="0">
               <a:solidFill>
@@ -23561,7 +26337,7 @@
                 </a:solidFill>
                 <a:latin typeface="Calibri"/>
               </a:rPr>
-              <a:t>Entry to the repo</a:t>
+              <a:t>Entry to the organization</a:t>
             </a:r>
             <a:endParaRPr sz="2000" b="0" i="0" dirty="0">
               <a:solidFill>
@@ -23799,6 +26575,2951 @@
       <p:bldP spid="10" grpId="0" animBg="1"/>
     </p:bldLst>
   </p:timing>
+</p:sld>
+</file>
+
+<file path=ppt/slides/slide40.xml><?xml version="1.0" encoding="utf-8"?>
+<p:sld xmlns:a="http://schemas.openxmlformats.org/drawingml/2006/main" xmlns:r="http://schemas.openxmlformats.org/officeDocument/2006/relationships" xmlns:p="http://schemas.openxmlformats.org/presentationml/2006/main">
+  <p:cSld>
+    <p:spTree>
+      <p:nvGrpSpPr>
+        <p:cNvPr id="1" name="">
+          <a:extLst>
+            <a:ext uri="{FF2B5EF4-FFF2-40B4-BE49-F238E27FC236}">
+              <a16:creationId xmlns:a16="http://schemas.microsoft.com/office/drawing/2014/main" id="{BCA84D81-8DFE-66CA-EF25-27A4C7A2891A}"/>
+            </a:ext>
+          </a:extLst>
+        </p:cNvPr>
+        <p:cNvGrpSpPr/>
+        <p:nvPr/>
+      </p:nvGrpSpPr>
+      <p:grpSpPr>
+        <a:xfrm>
+          <a:off x="0" y="0"/>
+          <a:ext cx="0" cy="0"/>
+          <a:chOff x="0" y="0"/>
+          <a:chExt cx="0" cy="0"/>
+        </a:xfrm>
+      </p:grpSpPr>
+      <p:sp>
+        <p:nvSpPr>
+          <p:cNvPr id="20" name="Text 1">
+            <a:extLst>
+              <a:ext uri="{FF2B5EF4-FFF2-40B4-BE49-F238E27FC236}">
+                <a16:creationId xmlns:a16="http://schemas.microsoft.com/office/drawing/2014/main" id="{25974E01-6964-37C4-0148-33C3E4CAC808}"/>
+              </a:ext>
+            </a:extLst>
+          </p:cNvPr>
+          <p:cNvSpPr/>
+          <p:nvPr/>
+        </p:nvSpPr>
+        <p:spPr>
+          <a:xfrm>
+            <a:off x="502920" y="228600"/>
+            <a:ext cx="8321040" cy="685800"/>
+          </a:xfrm>
+          <a:prstGeom prst="rect">
+            <a:avLst/>
+          </a:prstGeom>
+          <a:noFill/>
+          <a:ln/>
+        </p:spPr>
+        <p:txBody>
+          <a:bodyPr wrap="square" lIns="0" tIns="0" rIns="0" bIns="0" rtlCol="0" anchor="ctr"/>
+          <a:lstStyle/>
+          <a:p>
+            <a:pPr marL="0" indent="0">
+              <a:buNone/>
+            </a:pPr>
+            <a:r>
+              <a:rPr lang="en-US" sz="3000" b="1" dirty="0">
+                <a:solidFill>
+                  <a:srgbClr val="0A1628"/>
+                </a:solidFill>
+                <a:latin typeface="Calibri" pitchFamily="34" charset="0"/>
+                <a:ea typeface="Calibri" pitchFamily="34" charset="-122"/>
+                <a:cs typeface="Calibri" pitchFamily="34" charset="-120"/>
+              </a:rPr>
+              <a:t>We can unit test the mathematical model</a:t>
+            </a:r>
+            <a:endParaRPr lang="en-US" sz="3000" baseline="30000" dirty="0"/>
+          </a:p>
+        </p:txBody>
+      </p:sp>
+      <mc:AlternateContent xmlns:mc="http://schemas.openxmlformats.org/markup-compatibility/2006" xmlns:a14="http://schemas.microsoft.com/office/drawing/2010/main">
+        <mc:Choice Requires="a14">
+          <p:sp>
+            <p:nvSpPr>
+              <p:cNvPr id="5" name="Text 1">
+                <a:extLst>
+                  <a:ext uri="{FF2B5EF4-FFF2-40B4-BE49-F238E27FC236}">
+                    <a16:creationId xmlns:a16="http://schemas.microsoft.com/office/drawing/2014/main" id="{1E017A26-39BF-D081-A9C6-CACD3EA70E8F}"/>
+                  </a:ext>
+                </a:extLst>
+              </p:cNvPr>
+              <p:cNvSpPr/>
+              <p:nvPr/>
+            </p:nvSpPr>
+            <p:spPr>
+              <a:xfrm>
+                <a:off x="594360" y="2249425"/>
+                <a:ext cx="548640" cy="457200"/>
+              </a:xfrm>
+              <a:prstGeom prst="rect">
+                <a:avLst/>
+              </a:prstGeom>
+              <a:noFill/>
+              <a:ln/>
+            </p:spPr>
+            <p:txBody>
+              <a:bodyPr wrap="square" rtlCol="0" anchor="ctr"/>
+              <a:lstStyle/>
+              <a:p>
+                <a:pPr marL="0" indent="0" algn="ctr">
+                  <a:buNone/>
+                </a:pPr>
+                <a14:m>
+                  <m:oMathPara xmlns:m="http://schemas.openxmlformats.org/officeDocument/2006/math">
+                    <m:oMathParaPr>
+                      <m:jc m:val="centerGroup"/>
+                    </m:oMathParaPr>
+                    <m:oMath xmlns:m="http://schemas.openxmlformats.org/officeDocument/2006/math">
+                      <m:r>
+                        <a:rPr lang="en-US" sz="2800" b="1" i="1" dirty="0" smtClean="0">
+                          <a:solidFill>
+                            <a:srgbClr val="0F6E56"/>
+                          </a:solidFill>
+                          <a:latin typeface="Cambria Math" panose="02040503050406030204" pitchFamily="18" charset="0"/>
+                          <a:ea typeface="Calibri" pitchFamily="34" charset="-122"/>
+                          <a:cs typeface="Calibri" pitchFamily="34" charset="-120"/>
+                        </a:rPr>
+                        <m:t>𝒙</m:t>
+                      </m:r>
+                    </m:oMath>
+                  </m:oMathPara>
+                </a14:m>
+                <a:endParaRPr/>
+              </a:p>
+            </p:txBody>
+          </p:sp>
+        </mc:Choice>
+        <mc:Fallback xmlns="">
+          <p:sp>
+            <p:nvSpPr>
+              <p:cNvPr id="5" name="Text 1">
+                <a:extLst>
+                  <a:ext uri="{FF2B5EF4-FFF2-40B4-BE49-F238E27FC236}">
+                    <a16:creationId xmlns:a16="http://schemas.microsoft.com/office/drawing/2014/main" id="{1E017A26-39BF-D081-A9C6-CACD3EA70E8F}"/>
+                  </a:ext>
+                </a:extLst>
+              </p:cNvPr>
+              <p:cNvSpPr>
+                <a:spLocks noRot="1" noChangeAspect="1" noMove="1" noResize="1" noEditPoints="1" noAdjustHandles="1" noChangeArrowheads="1" noChangeShapeType="1" noTextEdit="1"/>
+              </p:cNvSpPr>
+              <p:nvPr/>
+            </p:nvSpPr>
+            <p:spPr>
+              <a:xfrm>
+                <a:off x="594360" y="2249425"/>
+                <a:ext cx="548640" cy="457200"/>
+              </a:xfrm>
+              <a:prstGeom prst="rect">
+                <a:avLst/>
+              </a:prstGeom>
+              <a:blipFill>
+                <a:blip r:embed="rId3"/>
+                <a:stretch>
+                  <a:fillRect/>
+                </a:stretch>
+              </a:blipFill>
+              <a:ln/>
+            </p:spPr>
+            <p:txBody>
+              <a:bodyPr/>
+              <a:lstStyle/>
+              <a:p>
+                <a:r>
+                  <a:rPr lang="en-US">
+                    <a:noFill/>
+                  </a:rPr>
+                  <a:t> </a:t>
+                </a:r>
+              </a:p>
+            </p:txBody>
+          </p:sp>
+        </mc:Fallback>
+      </mc:AlternateContent>
+      <p:sp>
+        <p:nvSpPr>
+          <p:cNvPr id="7" name="Shape 3">
+            <a:extLst>
+              <a:ext uri="{FF2B5EF4-FFF2-40B4-BE49-F238E27FC236}">
+                <a16:creationId xmlns:a16="http://schemas.microsoft.com/office/drawing/2014/main" id="{FBDD32B3-1326-5A1D-CDF0-78FE7ECE89CB}"/>
+              </a:ext>
+            </a:extLst>
+          </p:cNvPr>
+          <p:cNvSpPr/>
+          <p:nvPr/>
+        </p:nvSpPr>
+        <p:spPr>
+          <a:xfrm>
+            <a:off x="1188720" y="2597514"/>
+            <a:ext cx="914400" cy="0"/>
+          </a:xfrm>
+          <a:prstGeom prst="line">
+            <a:avLst/>
+          </a:prstGeom>
+          <a:noFill/>
+          <a:ln w="19050">
+            <a:solidFill>
+              <a:srgbClr val="1D9E75"/>
+            </a:solidFill>
+            <a:prstDash val="solid"/>
+            <a:tailEnd type="arrow"/>
+          </a:ln>
+        </p:spPr>
+        <p:txBody>
+          <a:bodyPr/>
+          <a:lstStyle/>
+          <a:p>
+            <a:endParaRPr lang="en-US"/>
+          </a:p>
+        </p:txBody>
+      </p:sp>
+      <p:sp>
+        <p:nvSpPr>
+          <p:cNvPr id="8" name="Shape 4">
+            <a:extLst>
+              <a:ext uri="{FF2B5EF4-FFF2-40B4-BE49-F238E27FC236}">
+                <a16:creationId xmlns:a16="http://schemas.microsoft.com/office/drawing/2014/main" id="{46246196-14C2-B27B-DF1C-B5A15178473B}"/>
+              </a:ext>
+            </a:extLst>
+          </p:cNvPr>
+          <p:cNvSpPr/>
+          <p:nvPr/>
+        </p:nvSpPr>
+        <p:spPr>
+          <a:xfrm>
+            <a:off x="2176272" y="1417319"/>
+            <a:ext cx="4791456" cy="2324095"/>
+          </a:xfrm>
+          <a:prstGeom prst="rect">
+            <a:avLst/>
+          </a:prstGeom>
+          <a:solidFill>
+            <a:schemeClr val="bg1">
+              <a:lumMod val="95000"/>
+            </a:schemeClr>
+          </a:solidFill>
+          <a:ln w="76200">
+            <a:solidFill>
+              <a:schemeClr val="tx1"/>
+            </a:solidFill>
+            <a:prstDash val="solid"/>
+          </a:ln>
+        </p:spPr>
+        <p:txBody>
+          <a:bodyPr/>
+          <a:lstStyle/>
+          <a:p>
+            <a:endParaRPr lang="en-US"/>
+          </a:p>
+        </p:txBody>
+      </p:sp>
+      <p:sp>
+        <p:nvSpPr>
+          <p:cNvPr id="9" name="Text 5">
+            <a:extLst>
+              <a:ext uri="{FF2B5EF4-FFF2-40B4-BE49-F238E27FC236}">
+                <a16:creationId xmlns:a16="http://schemas.microsoft.com/office/drawing/2014/main" id="{A43F08C8-9DC7-701F-F0C0-F3AD4F20C9ED}"/>
+              </a:ext>
+            </a:extLst>
+          </p:cNvPr>
+          <p:cNvSpPr/>
+          <p:nvPr/>
+        </p:nvSpPr>
+        <p:spPr>
+          <a:xfrm>
+            <a:off x="2176272" y="1417319"/>
+            <a:ext cx="4791456" cy="2324089"/>
+          </a:xfrm>
+          <a:prstGeom prst="rect">
+            <a:avLst/>
+          </a:prstGeom>
+          <a:noFill/>
+          <a:ln/>
+        </p:spPr>
+        <p:txBody>
+          <a:bodyPr wrap="square" rtlCol="0" anchor="ctr"/>
+          <a:lstStyle/>
+          <a:p>
+            <a:pPr marL="0" indent="0" algn="ctr">
+              <a:buNone/>
+            </a:pPr>
+            <a:endParaRPr lang="en-US" sz="2200" dirty="0"/>
+          </a:p>
+        </p:txBody>
+      </p:sp>
+      <p:sp>
+        <p:nvSpPr>
+          <p:cNvPr id="11" name="Shape 7">
+            <a:extLst>
+              <a:ext uri="{FF2B5EF4-FFF2-40B4-BE49-F238E27FC236}">
+                <a16:creationId xmlns:a16="http://schemas.microsoft.com/office/drawing/2014/main" id="{CA2938FE-FA43-B9CE-1BF4-30075EBEC584}"/>
+              </a:ext>
+            </a:extLst>
+          </p:cNvPr>
+          <p:cNvSpPr/>
+          <p:nvPr/>
+        </p:nvSpPr>
+        <p:spPr>
+          <a:xfrm>
+            <a:off x="7036308" y="2636520"/>
+            <a:ext cx="914400" cy="0"/>
+          </a:xfrm>
+          <a:prstGeom prst="line">
+            <a:avLst/>
+          </a:prstGeom>
+          <a:noFill/>
+          <a:ln w="19050">
+            <a:solidFill>
+              <a:srgbClr val="BA7517"/>
+            </a:solidFill>
+            <a:prstDash val="solid"/>
+            <a:tailEnd type="arrow"/>
+          </a:ln>
+        </p:spPr>
+        <p:txBody>
+          <a:bodyPr/>
+          <a:lstStyle/>
+          <a:p>
+            <a:endParaRPr lang="en-US"/>
+          </a:p>
+        </p:txBody>
+      </p:sp>
+      <mc:AlternateContent xmlns:mc="http://schemas.openxmlformats.org/markup-compatibility/2006" xmlns:a14="http://schemas.microsoft.com/office/drawing/2010/main">
+        <mc:Choice Requires="a14">
+          <p:sp>
+            <p:nvSpPr>
+              <p:cNvPr id="12" name="Text 8">
+                <a:extLst>
+                  <a:ext uri="{FF2B5EF4-FFF2-40B4-BE49-F238E27FC236}">
+                    <a16:creationId xmlns:a16="http://schemas.microsoft.com/office/drawing/2014/main" id="{144008C9-9082-6EBF-4586-8C65C82D28B4}"/>
+                  </a:ext>
+                </a:extLst>
+              </p:cNvPr>
+              <p:cNvSpPr/>
+              <p:nvPr/>
+            </p:nvSpPr>
+            <p:spPr>
+              <a:xfrm>
+                <a:off x="8092440" y="2368914"/>
+                <a:ext cx="822960" cy="457200"/>
+              </a:xfrm>
+              <a:prstGeom prst="rect">
+                <a:avLst/>
+              </a:prstGeom>
+              <a:noFill/>
+              <a:ln/>
+            </p:spPr>
+            <p:txBody>
+              <a:bodyPr wrap="square" rtlCol="0" anchor="ctr"/>
+              <a:lstStyle/>
+              <a:p>
+                <a:pPr marL="0" indent="0" algn="ctr">
+                  <a:buNone/>
+                </a:pPr>
+                <a14:m>
+                  <m:oMathPara xmlns:m="http://schemas.openxmlformats.org/officeDocument/2006/math">
+                    <m:oMathParaPr>
+                      <m:jc m:val="centerGroup"/>
+                    </m:oMathParaPr>
+                    <m:oMath xmlns:m="http://schemas.openxmlformats.org/officeDocument/2006/math">
+                      <m:r>
+                        <a:rPr lang="en-US" sz="2600" b="1" i="1" dirty="0" smtClean="0">
+                          <a:solidFill>
+                            <a:srgbClr val="7A4D0C"/>
+                          </a:solidFill>
+                          <a:latin typeface="Cambria Math" panose="02040503050406030204" pitchFamily="18" charset="0"/>
+                          <a:ea typeface="Calibri" pitchFamily="34" charset="-122"/>
+                          <a:cs typeface="Calibri" pitchFamily="34" charset="-120"/>
+                        </a:rPr>
+                        <m:t>𝒇</m:t>
+                      </m:r>
+                      <m:r>
+                        <a:rPr lang="en-US" sz="2600" b="1" i="1" dirty="0" smtClean="0">
+                          <a:solidFill>
+                            <a:srgbClr val="7A4D0C"/>
+                          </a:solidFill>
+                          <a:latin typeface="Cambria Math" panose="02040503050406030204" pitchFamily="18" charset="0"/>
+                          <a:ea typeface="Calibri" pitchFamily="34" charset="-122"/>
+                          <a:cs typeface="Calibri" pitchFamily="34" charset="-120"/>
+                        </a:rPr>
+                        <m:t> (</m:t>
+                      </m:r>
+                      <m:r>
+                        <a:rPr lang="en-US" sz="2600" b="1" i="1" dirty="0" smtClean="0">
+                          <a:solidFill>
+                            <a:srgbClr val="7A4D0C"/>
+                          </a:solidFill>
+                          <a:latin typeface="Cambria Math" panose="02040503050406030204" pitchFamily="18" charset="0"/>
+                          <a:ea typeface="Calibri" pitchFamily="34" charset="-122"/>
+                          <a:cs typeface="Calibri" pitchFamily="34" charset="-120"/>
+                        </a:rPr>
+                        <m:t>𝒙</m:t>
+                      </m:r>
+                      <m:r>
+                        <a:rPr lang="en-US" sz="2600" b="1" i="1" dirty="0" smtClean="0">
+                          <a:solidFill>
+                            <a:srgbClr val="7A4D0C"/>
+                          </a:solidFill>
+                          <a:latin typeface="Cambria Math" panose="02040503050406030204" pitchFamily="18" charset="0"/>
+                          <a:ea typeface="Calibri" pitchFamily="34" charset="-122"/>
+                          <a:cs typeface="Calibri" pitchFamily="34" charset="-120"/>
+                        </a:rPr>
+                        <m:t>)</m:t>
+                      </m:r>
+                    </m:oMath>
+                  </m:oMathPara>
+                </a14:m>
+                <a:endParaRPr/>
+              </a:p>
+            </p:txBody>
+          </p:sp>
+        </mc:Choice>
+        <mc:Fallback xmlns="">
+          <p:sp>
+            <p:nvSpPr>
+              <p:cNvPr id="12" name="Text 8">
+                <a:extLst>
+                  <a:ext uri="{FF2B5EF4-FFF2-40B4-BE49-F238E27FC236}">
+                    <a16:creationId xmlns:a16="http://schemas.microsoft.com/office/drawing/2014/main" id="{144008C9-9082-6EBF-4586-8C65C82D28B4}"/>
+                  </a:ext>
+                </a:extLst>
+              </p:cNvPr>
+              <p:cNvSpPr>
+                <a:spLocks noRot="1" noChangeAspect="1" noMove="1" noResize="1" noEditPoints="1" noAdjustHandles="1" noChangeArrowheads="1" noChangeShapeType="1" noTextEdit="1"/>
+              </p:cNvSpPr>
+              <p:nvPr/>
+            </p:nvSpPr>
+            <p:spPr>
+              <a:xfrm>
+                <a:off x="8092440" y="2368914"/>
+                <a:ext cx="822960" cy="457200"/>
+              </a:xfrm>
+              <a:prstGeom prst="rect">
+                <a:avLst/>
+              </a:prstGeom>
+              <a:blipFill>
+                <a:blip r:embed="rId4"/>
+                <a:stretch>
+                  <a:fillRect/>
+                </a:stretch>
+              </a:blipFill>
+              <a:ln/>
+            </p:spPr>
+            <p:txBody>
+              <a:bodyPr/>
+              <a:lstStyle/>
+              <a:p>
+                <a:r>
+                  <a:rPr lang="en-US">
+                    <a:noFill/>
+                  </a:rPr>
+                  <a:t> </a:t>
+                </a:r>
+              </a:p>
+            </p:txBody>
+          </p:sp>
+        </mc:Fallback>
+      </mc:AlternateContent>
+      <mc:AlternateContent xmlns:mc="http://schemas.openxmlformats.org/markup-compatibility/2006" xmlns:a14="http://schemas.microsoft.com/office/drawing/2010/main">
+        <mc:Choice Requires="a14">
+          <p:sp>
+            <p:nvSpPr>
+              <p:cNvPr id="14" name="Shape 10">
+                <a:extLst>
+                  <a:ext uri="{FF2B5EF4-FFF2-40B4-BE49-F238E27FC236}">
+                    <a16:creationId xmlns:a16="http://schemas.microsoft.com/office/drawing/2014/main" id="{BBFDF9A3-A5B1-F2FC-6FAB-F22C5465B431}"/>
+                  </a:ext>
+                </a:extLst>
+              </p:cNvPr>
+              <p:cNvSpPr/>
+              <p:nvPr/>
+            </p:nvSpPr>
+            <p:spPr>
+              <a:xfrm>
+                <a:off x="2176272" y="4016407"/>
+                <a:ext cx="4791456" cy="544820"/>
+              </a:xfrm>
+              <a:prstGeom prst="roundRect">
+                <a:avLst>
+                  <a:gd name="adj" fmla="val 9677"/>
+                </a:avLst>
+              </a:prstGeom>
+              <a:solidFill>
+                <a:srgbClr val="FEF3DC"/>
+              </a:solidFill>
+              <a:ln w="6350">
+                <a:solidFill>
+                  <a:srgbClr val="BA7517"/>
+                </a:solidFill>
+                <a:prstDash val="solid"/>
+              </a:ln>
+            </p:spPr>
+            <p:txBody>
+              <a:bodyPr anchor="ctr"/>
+              <a:lstStyle/>
+              <a:p>
+                <a:pPr algn="ctr"/>
+                <a:r>
+                  <a:rPr lang="en-US" sz="1400" dirty="0">
+                    <a:solidFill>
+                      <a:schemeClr val="tx1"/>
+                    </a:solidFill>
+                    <a:latin typeface="Calibri" pitchFamily="34" charset="0"/>
+                    <a:ea typeface="Calibri" pitchFamily="34" charset="-122"/>
+                    <a:cs typeface="Calibri" pitchFamily="34" charset="-120"/>
+                  </a:rPr>
+                  <a:t>We can test the model was correctly assembled given the data </a:t>
+                </a:r>
+                <a14:m>
+                  <m:oMath xmlns:m="http://schemas.openxmlformats.org/officeDocument/2006/math">
+                    <m:r>
+                      <a:rPr lang="en-US" sz="1400" dirty="0">
+                        <a:solidFill>
+                          <a:schemeClr val="tx1"/>
+                        </a:solidFill>
+                        <a:latin typeface="Cambria Math" panose="02040503050406030204" pitchFamily="18" charset="0"/>
+                        <a:ea typeface="Calibri" pitchFamily="34" charset="-122"/>
+                        <a:cs typeface="Calibri" pitchFamily="34" charset="-120"/>
+                      </a:rPr>
+                      <m:t>𝑥</m:t>
+                    </m:r>
+                  </m:oMath>
+                </a14:m>
+                <a:r>
+                  <a:rPr lang="en-US" sz="1400" dirty="0">
+                    <a:solidFill>
+                      <a:schemeClr val="tx1"/>
+                    </a:solidFill>
+                    <a:latin typeface="Calibri" pitchFamily="34" charset="0"/>
+                    <a:ea typeface="Calibri" pitchFamily="34" charset="-122"/>
+                    <a:cs typeface="Calibri" pitchFamily="34" charset="-120"/>
+                  </a:rPr>
+                  <a:t>. The mathematical model is a deterministic artefact! </a:t>
+                </a:r>
+              </a:p>
+            </p:txBody>
+          </p:sp>
+        </mc:Choice>
+        <mc:Fallback xmlns="">
+          <p:sp>
+            <p:nvSpPr>
+              <p:cNvPr id="14" name="Shape 10">
+                <a:extLst>
+                  <a:ext uri="{FF2B5EF4-FFF2-40B4-BE49-F238E27FC236}">
+                    <a16:creationId xmlns:a16="http://schemas.microsoft.com/office/drawing/2014/main" id="{BBFDF9A3-A5B1-F2FC-6FAB-F22C5465B431}"/>
+                  </a:ext>
+                </a:extLst>
+              </p:cNvPr>
+              <p:cNvSpPr>
+                <a:spLocks noRot="1" noChangeAspect="1" noMove="1" noResize="1" noEditPoints="1" noAdjustHandles="1" noChangeArrowheads="1" noChangeShapeType="1" noTextEdit="1"/>
+              </p:cNvSpPr>
+              <p:nvPr/>
+            </p:nvSpPr>
+            <p:spPr>
+              <a:xfrm>
+                <a:off x="2176272" y="4016407"/>
+                <a:ext cx="4791456" cy="544820"/>
+              </a:xfrm>
+              <a:prstGeom prst="roundRect">
+                <a:avLst>
+                  <a:gd name="adj" fmla="val 9677"/>
+                </a:avLst>
+              </a:prstGeom>
+              <a:blipFill>
+                <a:blip r:embed="rId5"/>
+                <a:stretch>
+                  <a:fillRect b="-8889"/>
+                </a:stretch>
+              </a:blipFill>
+              <a:ln w="6350">
+                <a:solidFill>
+                  <a:srgbClr val="BA7517"/>
+                </a:solidFill>
+                <a:prstDash val="solid"/>
+              </a:ln>
+            </p:spPr>
+            <p:txBody>
+              <a:bodyPr/>
+              <a:lstStyle/>
+              <a:p>
+                <a:r>
+                  <a:rPr lang="en-US">
+                    <a:noFill/>
+                  </a:rPr>
+                  <a:t> </a:t>
+                </a:r>
+              </a:p>
+            </p:txBody>
+          </p:sp>
+        </mc:Fallback>
+      </mc:AlternateContent>
+      <p:sp>
+        <p:nvSpPr>
+          <p:cNvPr id="3" name="Rectangle 2">
+            <a:extLst>
+              <a:ext uri="{FF2B5EF4-FFF2-40B4-BE49-F238E27FC236}">
+                <a16:creationId xmlns:a16="http://schemas.microsoft.com/office/drawing/2014/main" id="{50438011-7078-E919-9F31-873D82C7E4E2}"/>
+              </a:ext>
+            </a:extLst>
+          </p:cNvPr>
+          <p:cNvSpPr/>
+          <p:nvPr/>
+        </p:nvSpPr>
+        <p:spPr>
+          <a:xfrm>
+            <a:off x="2430780" y="1981200"/>
+            <a:ext cx="1958340" cy="1577340"/>
+          </a:xfrm>
+          <a:prstGeom prst="rect">
+            <a:avLst/>
+          </a:prstGeom>
+          <a:solidFill>
+            <a:schemeClr val="accent2">
+              <a:lumMod val="40000"/>
+              <a:lumOff val="60000"/>
+            </a:schemeClr>
+          </a:solidFill>
+        </p:spPr>
+        <p:style>
+          <a:lnRef idx="2">
+            <a:schemeClr val="accent1">
+              <a:shade val="15000"/>
+            </a:schemeClr>
+          </a:lnRef>
+          <a:fillRef idx="1">
+            <a:schemeClr val="accent1"/>
+          </a:fillRef>
+          <a:effectRef idx="0">
+            <a:schemeClr val="accent1"/>
+          </a:effectRef>
+          <a:fontRef idx="minor">
+            <a:schemeClr val="lt1"/>
+          </a:fontRef>
+        </p:style>
+        <p:txBody>
+          <a:bodyPr rtlCol="0" anchor="ctr"/>
+          <a:lstStyle/>
+          <a:p>
+            <a:pPr algn="ctr"/>
+            <a:endParaRPr lang="en-US"/>
+          </a:p>
+        </p:txBody>
+      </p:sp>
+      <p:sp>
+        <p:nvSpPr>
+          <p:cNvPr id="10" name="Rectangle: Rounded Corners 9">
+            <a:extLst>
+              <a:ext uri="{FF2B5EF4-FFF2-40B4-BE49-F238E27FC236}">
+                <a16:creationId xmlns:a16="http://schemas.microsoft.com/office/drawing/2014/main" id="{BD9C6CC9-F9C6-D29C-C717-380988B6205F}"/>
+              </a:ext>
+            </a:extLst>
+          </p:cNvPr>
+          <p:cNvSpPr/>
+          <p:nvPr/>
+        </p:nvSpPr>
+        <p:spPr>
+          <a:xfrm>
+            <a:off x="2580894" y="2188465"/>
+            <a:ext cx="1623060" cy="289560"/>
+          </a:xfrm>
+          <a:prstGeom prst="roundRect">
+            <a:avLst/>
+          </a:prstGeom>
+          <a:solidFill>
+            <a:schemeClr val="accent5">
+              <a:lumMod val="20000"/>
+              <a:lumOff val="80000"/>
+            </a:schemeClr>
+          </a:solidFill>
+        </p:spPr>
+        <p:style>
+          <a:lnRef idx="2">
+            <a:schemeClr val="accent1">
+              <a:shade val="15000"/>
+            </a:schemeClr>
+          </a:lnRef>
+          <a:fillRef idx="1">
+            <a:schemeClr val="accent1"/>
+          </a:fillRef>
+          <a:effectRef idx="0">
+            <a:schemeClr val="accent1"/>
+          </a:effectRef>
+          <a:fontRef idx="minor">
+            <a:schemeClr val="lt1"/>
+          </a:fontRef>
+        </p:style>
+        <p:txBody>
+          <a:bodyPr rtlCol="0" anchor="ctr"/>
+          <a:lstStyle/>
+          <a:p>
+            <a:pPr algn="ctr"/>
+            <a:r>
+              <a:rPr lang="en-US" sz="1400" dirty="0">
+                <a:solidFill>
+                  <a:schemeClr val="tx1"/>
+                </a:solidFill>
+              </a:rPr>
+              <a:t>Decisions</a:t>
+            </a:r>
+          </a:p>
+        </p:txBody>
+      </p:sp>
+      <p:sp>
+        <p:nvSpPr>
+          <p:cNvPr id="15" name="Rectangle: Rounded Corners 14">
+            <a:extLst>
+              <a:ext uri="{FF2B5EF4-FFF2-40B4-BE49-F238E27FC236}">
+                <a16:creationId xmlns:a16="http://schemas.microsoft.com/office/drawing/2014/main" id="{E6FC4DAE-F997-4BD6-B8CB-8852FE5F6759}"/>
+              </a:ext>
+            </a:extLst>
+          </p:cNvPr>
+          <p:cNvSpPr/>
+          <p:nvPr/>
+        </p:nvSpPr>
+        <p:spPr>
+          <a:xfrm>
+            <a:off x="2580894" y="2644146"/>
+            <a:ext cx="1623060" cy="289560"/>
+          </a:xfrm>
+          <a:prstGeom prst="roundRect">
+            <a:avLst/>
+          </a:prstGeom>
+          <a:solidFill>
+            <a:schemeClr val="accent5">
+              <a:lumMod val="20000"/>
+              <a:lumOff val="80000"/>
+            </a:schemeClr>
+          </a:solidFill>
+        </p:spPr>
+        <p:style>
+          <a:lnRef idx="2">
+            <a:schemeClr val="accent1">
+              <a:shade val="15000"/>
+            </a:schemeClr>
+          </a:lnRef>
+          <a:fillRef idx="1">
+            <a:schemeClr val="accent1"/>
+          </a:fillRef>
+          <a:effectRef idx="0">
+            <a:schemeClr val="accent1"/>
+          </a:effectRef>
+          <a:fontRef idx="minor">
+            <a:schemeClr val="lt1"/>
+          </a:fontRef>
+        </p:style>
+        <p:txBody>
+          <a:bodyPr rtlCol="0" anchor="ctr"/>
+          <a:lstStyle/>
+          <a:p>
+            <a:pPr algn="ctr"/>
+            <a:r>
+              <a:rPr lang="en-US" sz="1400" dirty="0">
+                <a:solidFill>
+                  <a:schemeClr val="tx1"/>
+                </a:solidFill>
+              </a:rPr>
+              <a:t>Objective</a:t>
+            </a:r>
+          </a:p>
+        </p:txBody>
+      </p:sp>
+      <p:sp>
+        <p:nvSpPr>
+          <p:cNvPr id="16" name="Rectangle: Rounded Corners 15">
+            <a:extLst>
+              <a:ext uri="{FF2B5EF4-FFF2-40B4-BE49-F238E27FC236}">
+                <a16:creationId xmlns:a16="http://schemas.microsoft.com/office/drawing/2014/main" id="{315EF0BB-10C9-4E63-8DA3-8822901C0DA2}"/>
+              </a:ext>
+            </a:extLst>
+          </p:cNvPr>
+          <p:cNvSpPr/>
+          <p:nvPr/>
+        </p:nvSpPr>
+        <p:spPr>
+          <a:xfrm>
+            <a:off x="2580894" y="3101343"/>
+            <a:ext cx="1623060" cy="289560"/>
+          </a:xfrm>
+          <a:prstGeom prst="roundRect">
+            <a:avLst/>
+          </a:prstGeom>
+          <a:solidFill>
+            <a:schemeClr val="accent5">
+              <a:lumMod val="20000"/>
+              <a:lumOff val="80000"/>
+            </a:schemeClr>
+          </a:solidFill>
+        </p:spPr>
+        <p:style>
+          <a:lnRef idx="2">
+            <a:schemeClr val="accent1">
+              <a:shade val="15000"/>
+            </a:schemeClr>
+          </a:lnRef>
+          <a:fillRef idx="1">
+            <a:schemeClr val="accent1"/>
+          </a:fillRef>
+          <a:effectRef idx="0">
+            <a:schemeClr val="accent1"/>
+          </a:effectRef>
+          <a:fontRef idx="minor">
+            <a:schemeClr val="lt1"/>
+          </a:fontRef>
+        </p:style>
+        <p:txBody>
+          <a:bodyPr rtlCol="0" anchor="ctr"/>
+          <a:lstStyle/>
+          <a:p>
+            <a:pPr algn="ctr"/>
+            <a:r>
+              <a:rPr lang="en-US" sz="1400" dirty="0">
+                <a:solidFill>
+                  <a:schemeClr val="tx1"/>
+                </a:solidFill>
+              </a:rPr>
+              <a:t>Constraints</a:t>
+            </a:r>
+          </a:p>
+        </p:txBody>
+      </p:sp>
+      <p:sp>
+        <p:nvSpPr>
+          <p:cNvPr id="22" name="TextBox 21">
+            <a:extLst>
+              <a:ext uri="{FF2B5EF4-FFF2-40B4-BE49-F238E27FC236}">
+                <a16:creationId xmlns:a16="http://schemas.microsoft.com/office/drawing/2014/main" id="{3A5FF110-C5AB-58CE-4C9C-7F237BA3BF47}"/>
+              </a:ext>
+            </a:extLst>
+          </p:cNvPr>
+          <p:cNvSpPr txBox="1"/>
+          <p:nvPr/>
+        </p:nvSpPr>
+        <p:spPr>
+          <a:xfrm>
+            <a:off x="2176272" y="1586860"/>
+            <a:ext cx="2471930" cy="369332"/>
+          </a:xfrm>
+          <a:prstGeom prst="rect">
+            <a:avLst/>
+          </a:prstGeom>
+          <a:noFill/>
+        </p:spPr>
+        <p:txBody>
+          <a:bodyPr wrap="square" rtlCol="0">
+            <a:spAutoFit/>
+          </a:bodyPr>
+          <a:lstStyle/>
+          <a:p>
+            <a:pPr algn="ctr"/>
+            <a:r>
+              <a:rPr lang="en-US" b="1" dirty="0"/>
+              <a:t>Mathematical Model</a:t>
+            </a:r>
+          </a:p>
+        </p:txBody>
+      </p:sp>
+      <p:sp>
+        <p:nvSpPr>
+          <p:cNvPr id="25" name="TextBox 24">
+            <a:extLst>
+              <a:ext uri="{FF2B5EF4-FFF2-40B4-BE49-F238E27FC236}">
+                <a16:creationId xmlns:a16="http://schemas.microsoft.com/office/drawing/2014/main" id="{15EDD968-0EDC-EB84-B067-D89F4F7660B9}"/>
+              </a:ext>
+            </a:extLst>
+          </p:cNvPr>
+          <p:cNvSpPr txBox="1"/>
+          <p:nvPr/>
+        </p:nvSpPr>
+        <p:spPr>
+          <a:xfrm>
+            <a:off x="4716782" y="1586860"/>
+            <a:ext cx="1958340" cy="369332"/>
+          </a:xfrm>
+          <a:prstGeom prst="rect">
+            <a:avLst/>
+          </a:prstGeom>
+          <a:noFill/>
+        </p:spPr>
+        <p:txBody>
+          <a:bodyPr wrap="square" rtlCol="0">
+            <a:spAutoFit/>
+          </a:bodyPr>
+          <a:lstStyle/>
+          <a:p>
+            <a:pPr algn="ctr"/>
+            <a:r>
+              <a:rPr lang="en-US" b="1" dirty="0"/>
+              <a:t>Solver technology</a:t>
+            </a:r>
+          </a:p>
+        </p:txBody>
+      </p:sp>
+      <p:sp>
+        <p:nvSpPr>
+          <p:cNvPr id="26" name="Arrow: Right 25">
+            <a:extLst>
+              <a:ext uri="{FF2B5EF4-FFF2-40B4-BE49-F238E27FC236}">
+                <a16:creationId xmlns:a16="http://schemas.microsoft.com/office/drawing/2014/main" id="{51E0098D-6A53-E7AB-F296-B2EB91F8375A}"/>
+              </a:ext>
+            </a:extLst>
+          </p:cNvPr>
+          <p:cNvSpPr/>
+          <p:nvPr/>
+        </p:nvSpPr>
+        <p:spPr>
+          <a:xfrm>
+            <a:off x="4578662" y="2464539"/>
+            <a:ext cx="398528" cy="369332"/>
+          </a:xfrm>
+          <a:prstGeom prst="rightArrow">
+            <a:avLst/>
+          </a:prstGeom>
+          <a:solidFill>
+            <a:schemeClr val="bg1"/>
+          </a:solidFill>
+        </p:spPr>
+        <p:style>
+          <a:lnRef idx="2">
+            <a:schemeClr val="accent1">
+              <a:shade val="15000"/>
+            </a:schemeClr>
+          </a:lnRef>
+          <a:fillRef idx="1">
+            <a:schemeClr val="accent1"/>
+          </a:fillRef>
+          <a:effectRef idx="0">
+            <a:schemeClr val="accent1"/>
+          </a:effectRef>
+          <a:fontRef idx="minor">
+            <a:schemeClr val="lt1"/>
+          </a:fontRef>
+        </p:style>
+        <p:txBody>
+          <a:bodyPr rtlCol="0" anchor="ctr"/>
+          <a:lstStyle/>
+          <a:p>
+            <a:pPr algn="ctr"/>
+            <a:endParaRPr lang="en-US"/>
+          </a:p>
+        </p:txBody>
+      </p:sp>
+      <p:sp>
+        <p:nvSpPr>
+          <p:cNvPr id="27" name="Arrow: Right 26">
+            <a:extLst>
+              <a:ext uri="{FF2B5EF4-FFF2-40B4-BE49-F238E27FC236}">
+                <a16:creationId xmlns:a16="http://schemas.microsoft.com/office/drawing/2014/main" id="{0ECC32EC-12A8-1389-6354-0C558E5A7961}"/>
+              </a:ext>
+            </a:extLst>
+          </p:cNvPr>
+          <p:cNvSpPr/>
+          <p:nvPr/>
+        </p:nvSpPr>
+        <p:spPr>
+          <a:xfrm>
+            <a:off x="6410269" y="2464539"/>
+            <a:ext cx="398528" cy="369332"/>
+          </a:xfrm>
+          <a:prstGeom prst="rightArrow">
+            <a:avLst/>
+          </a:prstGeom>
+          <a:solidFill>
+            <a:schemeClr val="bg1"/>
+          </a:solidFill>
+        </p:spPr>
+        <p:style>
+          <a:lnRef idx="2">
+            <a:schemeClr val="accent1">
+              <a:shade val="15000"/>
+            </a:schemeClr>
+          </a:lnRef>
+          <a:fillRef idx="1">
+            <a:schemeClr val="accent1"/>
+          </a:fillRef>
+          <a:effectRef idx="0">
+            <a:schemeClr val="accent1"/>
+          </a:effectRef>
+          <a:fontRef idx="minor">
+            <a:schemeClr val="lt1"/>
+          </a:fontRef>
+        </p:style>
+        <p:txBody>
+          <a:bodyPr rtlCol="0" anchor="ctr"/>
+          <a:lstStyle/>
+          <a:p>
+            <a:pPr algn="ctr"/>
+            <a:endParaRPr lang="en-US"/>
+          </a:p>
+        </p:txBody>
+      </p:sp>
+      <p:sp>
+        <p:nvSpPr>
+          <p:cNvPr id="17" name="Text 9">
+            <a:extLst>
+              <a:ext uri="{FF2B5EF4-FFF2-40B4-BE49-F238E27FC236}">
+                <a16:creationId xmlns:a16="http://schemas.microsoft.com/office/drawing/2014/main" id="{22EF48AC-C55F-3B66-3DE2-9120893DED97}"/>
+              </a:ext>
+            </a:extLst>
+          </p:cNvPr>
+          <p:cNvSpPr/>
+          <p:nvPr/>
+        </p:nvSpPr>
+        <p:spPr>
+          <a:xfrm>
+            <a:off x="8001000" y="2826114"/>
+            <a:ext cx="914400" cy="274320"/>
+          </a:xfrm>
+          <a:prstGeom prst="rect">
+            <a:avLst/>
+          </a:prstGeom>
+          <a:noFill/>
+          <a:ln/>
+        </p:spPr>
+        <p:txBody>
+          <a:bodyPr wrap="square" rtlCol="0" anchor="ctr"/>
+          <a:lstStyle/>
+          <a:p>
+            <a:pPr marL="0" indent="0" algn="ctr">
+              <a:buNone/>
+            </a:pPr>
+            <a:r>
+              <a:rPr lang="en-US" sz="1400" dirty="0">
+                <a:solidFill>
+                  <a:srgbClr val="718096"/>
+                </a:solidFill>
+                <a:latin typeface="Calibri" pitchFamily="34" charset="0"/>
+                <a:ea typeface="Calibri" pitchFamily="34" charset="-122"/>
+                <a:cs typeface="Calibri" pitchFamily="34" charset="-120"/>
+              </a:rPr>
+              <a:t>(solution)</a:t>
+            </a:r>
+            <a:endParaRPr lang="en-US" sz="1400" dirty="0"/>
+          </a:p>
+        </p:txBody>
+      </p:sp>
+      <p:sp>
+        <p:nvSpPr>
+          <p:cNvPr id="18" name="Text 2">
+            <a:extLst>
+              <a:ext uri="{FF2B5EF4-FFF2-40B4-BE49-F238E27FC236}">
+                <a16:creationId xmlns:a16="http://schemas.microsoft.com/office/drawing/2014/main" id="{C4B05D69-85A7-1B18-EFD6-91AD2AC711DA}"/>
+              </a:ext>
+            </a:extLst>
+          </p:cNvPr>
+          <p:cNvSpPr/>
+          <p:nvPr/>
+        </p:nvSpPr>
+        <p:spPr>
+          <a:xfrm>
+            <a:off x="480246" y="2796546"/>
+            <a:ext cx="731520" cy="274320"/>
+          </a:xfrm>
+          <a:prstGeom prst="rect">
+            <a:avLst/>
+          </a:prstGeom>
+          <a:noFill/>
+          <a:ln/>
+        </p:spPr>
+        <p:txBody>
+          <a:bodyPr wrap="square" rtlCol="0" anchor="ctr"/>
+          <a:lstStyle/>
+          <a:p>
+            <a:pPr marL="0" indent="0" algn="ctr">
+              <a:buNone/>
+            </a:pPr>
+            <a:r>
+              <a:rPr lang="en-US" sz="1400" dirty="0">
+                <a:solidFill>
+                  <a:srgbClr val="718096"/>
+                </a:solidFill>
+                <a:latin typeface="Calibri" pitchFamily="34" charset="0"/>
+                <a:ea typeface="Calibri" pitchFamily="34" charset="-122"/>
+                <a:cs typeface="Calibri" pitchFamily="34" charset="-120"/>
+              </a:rPr>
+              <a:t>(data)</a:t>
+            </a:r>
+            <a:endParaRPr lang="en-US" sz="1400" dirty="0"/>
+          </a:p>
+        </p:txBody>
+      </p:sp>
+      <p:grpSp>
+        <p:nvGrpSpPr>
+          <p:cNvPr id="13" name="Group 12">
+            <a:extLst>
+              <a:ext uri="{FF2B5EF4-FFF2-40B4-BE49-F238E27FC236}">
+                <a16:creationId xmlns:a16="http://schemas.microsoft.com/office/drawing/2014/main" id="{D6E4E1D2-7BDA-5E50-7E7D-F89B3D22F1EE}"/>
+              </a:ext>
+            </a:extLst>
+          </p:cNvPr>
+          <p:cNvGrpSpPr/>
+          <p:nvPr/>
+        </p:nvGrpSpPr>
+        <p:grpSpPr>
+          <a:xfrm>
+            <a:off x="5074591" y="2175007"/>
+            <a:ext cx="1232536" cy="1083213"/>
+            <a:chOff x="5171698" y="2175007"/>
+            <a:chExt cx="1232536" cy="1083213"/>
+          </a:xfrm>
+        </p:grpSpPr>
+        <p:sp>
+          <p:nvSpPr>
+            <p:cNvPr id="6" name="Rectangle 5">
+              <a:extLst>
+                <a:ext uri="{FF2B5EF4-FFF2-40B4-BE49-F238E27FC236}">
+                  <a16:creationId xmlns:a16="http://schemas.microsoft.com/office/drawing/2014/main" id="{6640F15B-F494-9F74-0D86-CB8B1BFA0468}"/>
+                </a:ext>
+              </a:extLst>
+            </p:cNvPr>
+            <p:cNvSpPr/>
+            <p:nvPr/>
+          </p:nvSpPr>
+          <p:spPr>
+            <a:xfrm>
+              <a:off x="5171698" y="2175007"/>
+              <a:ext cx="1232536" cy="1083213"/>
+            </a:xfrm>
+            <a:prstGeom prst="rect">
+              <a:avLst/>
+            </a:prstGeom>
+            <a:solidFill>
+              <a:schemeClr val="tx1"/>
+            </a:solidFill>
+          </p:spPr>
+          <p:style>
+            <a:lnRef idx="2">
+              <a:schemeClr val="accent1">
+                <a:shade val="15000"/>
+              </a:schemeClr>
+            </a:lnRef>
+            <a:fillRef idx="1">
+              <a:schemeClr val="accent1"/>
+            </a:fillRef>
+            <a:effectRef idx="0">
+              <a:schemeClr val="accent1"/>
+            </a:effectRef>
+            <a:fontRef idx="minor">
+              <a:schemeClr val="lt1"/>
+            </a:fontRef>
+          </p:style>
+          <p:txBody>
+            <a:bodyPr rtlCol="0" anchor="ctr"/>
+            <a:lstStyle/>
+            <a:p>
+              <a:pPr algn="ctr"/>
+              <a:endParaRPr lang="en-US"/>
+            </a:p>
+          </p:txBody>
+        </p:sp>
+        <p:pic>
+          <p:nvPicPr>
+            <p:cNvPr id="24" name="Graphic 23" descr="Gears with solid fill">
+              <a:extLst>
+                <a:ext uri="{FF2B5EF4-FFF2-40B4-BE49-F238E27FC236}">
+                  <a16:creationId xmlns:a16="http://schemas.microsoft.com/office/drawing/2014/main" id="{A24BC7C3-33B2-7286-4EE5-9E82F40E3366}"/>
+                </a:ext>
+              </a:extLst>
+            </p:cNvPr>
+            <p:cNvPicPr>
+              <a:picLocks noChangeAspect="1"/>
+            </p:cNvPicPr>
+            <p:nvPr/>
+          </p:nvPicPr>
+          <p:blipFill>
+            <a:blip>
+              <a:extLst>
+                <a:ext uri="{96DAC541-7B7A-43D3-8B79-37D633B846F1}">
+                  <asvg:svgBlip xmlns:asvg="http://schemas.microsoft.com/office/drawing/2016/SVG/main" r:embed="rId6"/>
+                </a:ext>
+              </a:extLst>
+            </a:blip>
+            <a:stretch>
+              <a:fillRect/>
+            </a:stretch>
+          </p:blipFill>
+          <p:spPr>
+            <a:xfrm>
+              <a:off x="5308762" y="2261522"/>
+              <a:ext cx="929107" cy="929107"/>
+            </a:xfrm>
+            <a:prstGeom prst="rect">
+              <a:avLst/>
+            </a:prstGeom>
+          </p:spPr>
+        </p:pic>
+      </p:grpSp>
+      <p:sp>
+        <p:nvSpPr>
+          <p:cNvPr id="21" name="TextBox 20">
+            <a:extLst>
+              <a:ext uri="{FF2B5EF4-FFF2-40B4-BE49-F238E27FC236}">
+                <a16:creationId xmlns:a16="http://schemas.microsoft.com/office/drawing/2014/main" id="{239EFFED-083C-3880-71A5-5485059076B6}"/>
+              </a:ext>
+            </a:extLst>
+          </p:cNvPr>
+          <p:cNvSpPr txBox="1"/>
+          <p:nvPr/>
+        </p:nvSpPr>
+        <p:spPr>
+          <a:xfrm>
+            <a:off x="5309593" y="3246123"/>
+            <a:ext cx="1117774" cy="276999"/>
+          </a:xfrm>
+          <a:prstGeom prst="rect">
+            <a:avLst/>
+          </a:prstGeom>
+          <a:noFill/>
+        </p:spPr>
+        <p:txBody>
+          <a:bodyPr wrap="square" rtlCol="0">
+            <a:spAutoFit/>
+          </a:bodyPr>
+          <a:lstStyle/>
+          <a:p>
+            <a:r>
+              <a:rPr lang="en-US" sz="1200" i="1" dirty="0"/>
+              <a:t>Black box</a:t>
+            </a:r>
+          </a:p>
+        </p:txBody>
+      </p:sp>
+      <p:sp>
+        <p:nvSpPr>
+          <p:cNvPr id="23" name="Speech Bubble: Rectangle 22">
+            <a:extLst>
+              <a:ext uri="{FF2B5EF4-FFF2-40B4-BE49-F238E27FC236}">
+                <a16:creationId xmlns:a16="http://schemas.microsoft.com/office/drawing/2014/main" id="{B3B2A7A7-8498-8245-834C-10370C201C06}"/>
+              </a:ext>
+            </a:extLst>
+          </p:cNvPr>
+          <p:cNvSpPr/>
+          <p:nvPr/>
+        </p:nvSpPr>
+        <p:spPr>
+          <a:xfrm>
+            <a:off x="7202730" y="3500262"/>
+            <a:ext cx="1768228" cy="833515"/>
+          </a:xfrm>
+          <a:prstGeom prst="wedgeRectCallout">
+            <a:avLst>
+              <a:gd name="adj1" fmla="val -67020"/>
+              <a:gd name="adj2" fmla="val -42001"/>
+            </a:avLst>
+          </a:prstGeom>
+          <a:solidFill>
+            <a:schemeClr val="accent4">
+              <a:lumMod val="20000"/>
+              <a:lumOff val="80000"/>
+            </a:schemeClr>
+          </a:solidFill>
+          <a:ln w="9525"/>
+        </p:spPr>
+        <p:style>
+          <a:lnRef idx="2">
+            <a:schemeClr val="accent1">
+              <a:shade val="15000"/>
+            </a:schemeClr>
+          </a:lnRef>
+          <a:fillRef idx="1">
+            <a:schemeClr val="accent1"/>
+          </a:fillRef>
+          <a:effectRef idx="0">
+            <a:schemeClr val="accent1"/>
+          </a:effectRef>
+          <a:fontRef idx="minor">
+            <a:schemeClr val="lt1"/>
+          </a:fontRef>
+        </p:style>
+        <p:txBody>
+          <a:bodyPr rtlCol="0" anchor="ctr"/>
+          <a:lstStyle/>
+          <a:p>
+            <a:pPr algn="ctr"/>
+            <a:r>
+              <a:rPr lang="en-US" sz="1400" dirty="0">
+                <a:solidFill>
+                  <a:schemeClr val="tx1"/>
+                </a:solidFill>
+              </a:rPr>
+              <a:t>Integration tests can be used to check the second step.</a:t>
+            </a:r>
+          </a:p>
+        </p:txBody>
+      </p:sp>
+      <p:sp>
+        <p:nvSpPr>
+          <p:cNvPr id="19" name="Rectangle 18">
+            <a:extLst>
+              <a:ext uri="{FF2B5EF4-FFF2-40B4-BE49-F238E27FC236}">
+                <a16:creationId xmlns:a16="http://schemas.microsoft.com/office/drawing/2014/main" id="{DEEED64C-B6C3-E36B-A8B0-319D5646CBC2}"/>
+              </a:ext>
+            </a:extLst>
+          </p:cNvPr>
+          <p:cNvSpPr/>
+          <p:nvPr/>
+        </p:nvSpPr>
+        <p:spPr>
+          <a:xfrm>
+            <a:off x="457200" y="987552"/>
+            <a:ext cx="8229600" cy="36576"/>
+          </a:xfrm>
+          <a:prstGeom prst="rect">
+            <a:avLst/>
+          </a:prstGeom>
+          <a:solidFill>
+            <a:srgbClr val="0077A8"/>
+          </a:solidFill>
+          <a:ln>
+            <a:noFill/>
+          </a:ln>
+        </p:spPr>
+        <p:style>
+          <a:lnRef idx="1">
+            <a:schemeClr val="accent1"/>
+          </a:lnRef>
+          <a:fillRef idx="3">
+            <a:schemeClr val="accent1"/>
+          </a:fillRef>
+          <a:effectRef idx="2">
+            <a:schemeClr val="accent1"/>
+          </a:effectRef>
+          <a:fontRef idx="minor">
+            <a:schemeClr val="lt1"/>
+          </a:fontRef>
+        </p:style>
+        <p:txBody>
+          <a:bodyPr rtlCol="0" anchor="ctr"/>
+          <a:lstStyle/>
+          <a:p>
+            <a:pPr algn="ctr"/>
+            <a:endParaRPr/>
+          </a:p>
+        </p:txBody>
+      </p:sp>
+    </p:spTree>
+    <p:extLst>
+      <p:ext uri="{BB962C8B-B14F-4D97-AF65-F5344CB8AC3E}">
+        <p14:creationId xmlns:p14="http://schemas.microsoft.com/office/powerpoint/2010/main" val="3078854463"/>
+      </p:ext>
+    </p:extLst>
+  </p:cSld>
+  <p:clrMapOvr>
+    <a:masterClrMapping/>
+  </p:clrMapOvr>
+  <p:timing>
+    <p:tnLst>
+      <p:par>
+        <p:cTn id="1" dur="indefinite" restart="never" nodeType="tmRoot">
+          <p:childTnLst>
+            <p:seq concurrent="1" nextAc="seek">
+              <p:cTn id="2" dur="indefinite" nodeType="mainSeq">
+                <p:childTnLst>
+                  <p:par>
+                    <p:cTn id="3" fill="hold">
+                      <p:stCondLst>
+                        <p:cond delay="indefinite"/>
+                      </p:stCondLst>
+                      <p:childTnLst>
+                        <p:par>
+                          <p:cTn id="4" fill="hold">
+                            <p:stCondLst>
+                              <p:cond delay="0"/>
+                            </p:stCondLst>
+                            <p:childTnLst>
+                              <p:par>
+                                <p:cTn id="5" presetID="1" presetClass="entr" presetSubtype="0" fill="hold" grpId="0" nodeType="clickEffect">
+                                  <p:stCondLst>
+                                    <p:cond delay="0"/>
+                                  </p:stCondLst>
+                                  <p:childTnLst>
+                                    <p:set>
+                                      <p:cBhvr>
+                                        <p:cTn id="6" dur="1" fill="hold">
+                                          <p:stCondLst>
+                                            <p:cond delay="0"/>
+                                          </p:stCondLst>
+                                        </p:cTn>
+                                        <p:tgtEl>
+                                          <p:spTgt spid="23"/>
+                                        </p:tgtEl>
+                                        <p:attrNameLst>
+                                          <p:attrName>style.visibility</p:attrName>
+                                        </p:attrNameLst>
+                                      </p:cBhvr>
+                                      <p:to>
+                                        <p:strVal val="visible"/>
+                                      </p:to>
+                                    </p:set>
+                                  </p:childTnLst>
+                                </p:cTn>
+                              </p:par>
+                            </p:childTnLst>
+                          </p:cTn>
+                        </p:par>
+                      </p:childTnLst>
+                    </p:cTn>
+                  </p:par>
+                </p:childTnLst>
+              </p:cTn>
+              <p:prevCondLst>
+                <p:cond evt="onPrev" delay="0">
+                  <p:tgtEl>
+                    <p:sldTgt/>
+                  </p:tgtEl>
+                </p:cond>
+              </p:prevCondLst>
+              <p:nextCondLst>
+                <p:cond evt="onNext" delay="0">
+                  <p:tgtEl>
+                    <p:sldTgt/>
+                  </p:tgtEl>
+                </p:cond>
+              </p:nextCondLst>
+            </p:seq>
+          </p:childTnLst>
+        </p:cTn>
+      </p:par>
+    </p:tnLst>
+    <p:bldLst>
+      <p:bldP spid="23" grpId="0" animBg="1"/>
+    </p:bldLst>
+  </p:timing>
+</p:sld>
+</file>
+
+<file path=ppt/slides/slide41.xml><?xml version="1.0" encoding="utf-8"?>
+<p:sld xmlns:a="http://schemas.openxmlformats.org/drawingml/2006/main" xmlns:r="http://schemas.openxmlformats.org/officeDocument/2006/relationships" xmlns:p="http://schemas.openxmlformats.org/presentationml/2006/main">
+  <p:cSld>
+    <p:spTree>
+      <p:nvGrpSpPr>
+        <p:cNvPr id="1" name="">
+          <a:extLst>
+            <a:ext uri="{FF2B5EF4-FFF2-40B4-BE49-F238E27FC236}">
+              <a16:creationId xmlns:a16="http://schemas.microsoft.com/office/drawing/2014/main" id="{72EB4173-5004-F276-1F28-818102F31403}"/>
+            </a:ext>
+          </a:extLst>
+        </p:cNvPr>
+        <p:cNvGrpSpPr/>
+        <p:nvPr/>
+      </p:nvGrpSpPr>
+      <p:grpSpPr>
+        <a:xfrm>
+          <a:off x="0" y="0"/>
+          <a:ext cx="0" cy="0"/>
+          <a:chOff x="0" y="0"/>
+          <a:chExt cx="0" cy="0"/>
+        </a:xfrm>
+      </p:grpSpPr>
+      <p:cxnSp>
+        <p:nvCxnSpPr>
+          <p:cNvPr id="52" name="Straight Connector 51">
+            <a:extLst>
+              <a:ext uri="{FF2B5EF4-FFF2-40B4-BE49-F238E27FC236}">
+                <a16:creationId xmlns:a16="http://schemas.microsoft.com/office/drawing/2014/main" id="{63B3E252-0BEC-C775-C5EE-86A24FBB6D65}"/>
+              </a:ext>
+            </a:extLst>
+          </p:cNvPr>
+          <p:cNvCxnSpPr>
+            <a:cxnSpLocks/>
+          </p:cNvCxnSpPr>
+          <p:nvPr/>
+        </p:nvCxnSpPr>
+        <p:spPr>
+          <a:xfrm>
+            <a:off x="3313629" y="3707127"/>
+            <a:ext cx="0" cy="285214"/>
+          </a:xfrm>
+          <a:prstGeom prst="line">
+            <a:avLst/>
+          </a:prstGeom>
+          <a:ln w="12700">
+            <a:prstDash val="dash"/>
+          </a:ln>
+        </p:spPr>
+        <p:style>
+          <a:lnRef idx="1">
+            <a:schemeClr val="dk1"/>
+          </a:lnRef>
+          <a:fillRef idx="0">
+            <a:schemeClr val="dk1"/>
+          </a:fillRef>
+          <a:effectRef idx="0">
+            <a:schemeClr val="dk1"/>
+          </a:effectRef>
+          <a:fontRef idx="minor">
+            <a:schemeClr val="tx1"/>
+          </a:fontRef>
+        </p:style>
+      </p:cxnSp>
+      <p:cxnSp>
+        <p:nvCxnSpPr>
+          <p:cNvPr id="38" name="Straight Arrow Connector 37">
+            <a:extLst>
+              <a:ext uri="{FF2B5EF4-FFF2-40B4-BE49-F238E27FC236}">
+                <a16:creationId xmlns:a16="http://schemas.microsoft.com/office/drawing/2014/main" id="{A1788CE1-BFA3-229E-D4A1-82B7D9AB440F}"/>
+              </a:ext>
+            </a:extLst>
+          </p:cNvPr>
+          <p:cNvCxnSpPr>
+            <a:cxnSpLocks/>
+          </p:cNvCxnSpPr>
+          <p:nvPr/>
+        </p:nvCxnSpPr>
+        <p:spPr>
+          <a:xfrm>
+            <a:off x="3457501" y="2042583"/>
+            <a:ext cx="0" cy="2563955"/>
+          </a:xfrm>
+          <a:prstGeom prst="straightConnector1">
+            <a:avLst/>
+          </a:prstGeom>
+          <a:ln w="19050">
+            <a:tailEnd type="triangle"/>
+          </a:ln>
+        </p:spPr>
+        <p:style>
+          <a:lnRef idx="1">
+            <a:schemeClr val="dk1"/>
+          </a:lnRef>
+          <a:fillRef idx="0">
+            <a:schemeClr val="dk1"/>
+          </a:fillRef>
+          <a:effectRef idx="0">
+            <a:schemeClr val="dk1"/>
+          </a:effectRef>
+          <a:fontRef idx="minor">
+            <a:schemeClr val="tx1"/>
+          </a:fontRef>
+        </p:style>
+      </p:cxnSp>
+      <p:sp>
+        <p:nvSpPr>
+          <p:cNvPr id="20" name="Text 1">
+            <a:extLst>
+              <a:ext uri="{FF2B5EF4-FFF2-40B4-BE49-F238E27FC236}">
+                <a16:creationId xmlns:a16="http://schemas.microsoft.com/office/drawing/2014/main" id="{6754C570-283E-365E-95CC-DD1218B3A1B1}"/>
+              </a:ext>
+            </a:extLst>
+          </p:cNvPr>
+          <p:cNvSpPr/>
+          <p:nvPr/>
+        </p:nvSpPr>
+        <p:spPr>
+          <a:xfrm>
+            <a:off x="502920" y="228600"/>
+            <a:ext cx="8321040" cy="685800"/>
+          </a:xfrm>
+          <a:prstGeom prst="rect">
+            <a:avLst/>
+          </a:prstGeom>
+          <a:noFill/>
+          <a:ln/>
+        </p:spPr>
+        <p:txBody>
+          <a:bodyPr wrap="square" lIns="0" tIns="0" rIns="0" bIns="0" rtlCol="0" anchor="ctr"/>
+          <a:lstStyle/>
+          <a:p>
+            <a:pPr marL="0" indent="0">
+              <a:buNone/>
+            </a:pPr>
+            <a:r>
+              <a:rPr lang="en-US" sz="3000" b="1" dirty="0">
+                <a:solidFill>
+                  <a:srgbClr val="0A1628"/>
+                </a:solidFill>
+                <a:latin typeface="Calibri" pitchFamily="34" charset="0"/>
+                <a:ea typeface="Calibri" pitchFamily="34" charset="-122"/>
+                <a:cs typeface="Calibri" pitchFamily="34" charset="-120"/>
+              </a:rPr>
+              <a:t>Integration tests to check the full pipeline</a:t>
+            </a:r>
+            <a:endParaRPr lang="en-US" sz="3000" baseline="30000" dirty="0"/>
+          </a:p>
+        </p:txBody>
+      </p:sp>
+      <p:sp>
+        <p:nvSpPr>
+          <p:cNvPr id="6" name="TextBox 5">
+            <a:extLst>
+              <a:ext uri="{FF2B5EF4-FFF2-40B4-BE49-F238E27FC236}">
+                <a16:creationId xmlns:a16="http://schemas.microsoft.com/office/drawing/2014/main" id="{107C5AA4-BB66-1BB1-EB6A-F5E38B61A37E}"/>
+              </a:ext>
+            </a:extLst>
+          </p:cNvPr>
+          <p:cNvSpPr txBox="1"/>
+          <p:nvPr/>
+        </p:nvSpPr>
+        <p:spPr>
+          <a:xfrm>
+            <a:off x="250787" y="1300885"/>
+            <a:ext cx="8688725" cy="338554"/>
+          </a:xfrm>
+          <a:prstGeom prst="rect">
+            <a:avLst/>
+          </a:prstGeom>
+          <a:noFill/>
+        </p:spPr>
+        <p:txBody>
+          <a:bodyPr wrap="none" rtlCol="0">
+            <a:spAutoFit/>
+          </a:bodyPr>
+          <a:lstStyle/>
+          <a:p>
+            <a:r>
+              <a:rPr lang="en-US" sz="1600" dirty="0"/>
+              <a:t>For a set of predefined scenarios, on independent runs, compare </a:t>
+            </a:r>
+            <a:r>
+              <a:rPr lang="en-US" sz="1600" b="1" dirty="0">
+                <a:solidFill>
+                  <a:srgbClr val="00B050"/>
+                </a:solidFill>
+              </a:rPr>
+              <a:t>expected artifacts </a:t>
+            </a:r>
+            <a:r>
+              <a:rPr lang="en-US" sz="1600" dirty="0"/>
+              <a:t>vs </a:t>
+            </a:r>
+            <a:r>
+              <a:rPr lang="en-US" sz="1600" b="1" dirty="0">
+                <a:solidFill>
+                  <a:schemeClr val="accent1"/>
+                </a:solidFill>
+              </a:rPr>
+              <a:t>actual artifacts</a:t>
+            </a:r>
+            <a:r>
+              <a:rPr lang="en-US" sz="1600" dirty="0"/>
+              <a:t>.</a:t>
+            </a:r>
+          </a:p>
+        </p:txBody>
+      </p:sp>
+      <p:pic>
+        <p:nvPicPr>
+          <p:cNvPr id="19" name="Graphic 18" descr="Folder with solid fill">
+            <a:extLst>
+              <a:ext uri="{FF2B5EF4-FFF2-40B4-BE49-F238E27FC236}">
+                <a16:creationId xmlns:a16="http://schemas.microsoft.com/office/drawing/2014/main" id="{4F441C7A-2EEE-0325-1E33-5DE52E20391F}"/>
+              </a:ext>
+            </a:extLst>
+          </p:cNvPr>
+          <p:cNvPicPr>
+            <a:picLocks noChangeAspect="1"/>
+          </p:cNvPicPr>
+          <p:nvPr/>
+        </p:nvPicPr>
+        <p:blipFill>
+          <a:blip>
+            <a:extLst>
+              <a:ext uri="{96DAC541-7B7A-43D3-8B79-37D633B846F1}">
+                <asvg:svgBlip xmlns:asvg="http://schemas.microsoft.com/office/drawing/2016/SVG/main" r:embed="rId3"/>
+              </a:ext>
+            </a:extLst>
+          </a:blip>
+          <a:stretch>
+            <a:fillRect/>
+          </a:stretch>
+        </p:blipFill>
+        <p:spPr>
+          <a:xfrm>
+            <a:off x="320663" y="1868105"/>
+            <a:ext cx="535257" cy="535257"/>
+          </a:xfrm>
+          <a:prstGeom prst="rect">
+            <a:avLst/>
+          </a:prstGeom>
+        </p:spPr>
+      </p:pic>
+      <p:pic>
+        <p:nvPicPr>
+          <p:cNvPr id="21" name="Graphic 20" descr="Folder with solid fill">
+            <a:extLst>
+              <a:ext uri="{FF2B5EF4-FFF2-40B4-BE49-F238E27FC236}">
+                <a16:creationId xmlns:a16="http://schemas.microsoft.com/office/drawing/2014/main" id="{30849C45-7B0F-E3FF-E6B2-7E0578E42FA4}"/>
+              </a:ext>
+            </a:extLst>
+          </p:cNvPr>
+          <p:cNvPicPr>
+            <a:picLocks noChangeAspect="1"/>
+          </p:cNvPicPr>
+          <p:nvPr/>
+        </p:nvPicPr>
+        <p:blipFill>
+          <a:blip>
+            <a:extLst>
+              <a:ext uri="{96DAC541-7B7A-43D3-8B79-37D633B846F1}">
+                <asvg:svgBlip xmlns:asvg="http://schemas.microsoft.com/office/drawing/2016/SVG/main" r:embed="rId3"/>
+              </a:ext>
+            </a:extLst>
+          </a:blip>
+          <a:stretch>
+            <a:fillRect/>
+          </a:stretch>
+        </p:blipFill>
+        <p:spPr>
+          <a:xfrm>
+            <a:off x="320663" y="2602497"/>
+            <a:ext cx="535257" cy="535257"/>
+          </a:xfrm>
+          <a:prstGeom prst="rect">
+            <a:avLst/>
+          </a:prstGeom>
+        </p:spPr>
+      </p:pic>
+      <p:pic>
+        <p:nvPicPr>
+          <p:cNvPr id="23" name="Graphic 22" descr="Folder with solid fill">
+            <a:extLst>
+              <a:ext uri="{FF2B5EF4-FFF2-40B4-BE49-F238E27FC236}">
+                <a16:creationId xmlns:a16="http://schemas.microsoft.com/office/drawing/2014/main" id="{00A37C79-7E26-EE4A-33C5-B83736FAECC6}"/>
+              </a:ext>
+            </a:extLst>
+          </p:cNvPr>
+          <p:cNvPicPr>
+            <a:picLocks noChangeAspect="1"/>
+          </p:cNvPicPr>
+          <p:nvPr/>
+        </p:nvPicPr>
+        <p:blipFill>
+          <a:blip>
+            <a:extLst>
+              <a:ext uri="{96DAC541-7B7A-43D3-8B79-37D633B846F1}">
+                <asvg:svgBlip xmlns:asvg="http://schemas.microsoft.com/office/drawing/2016/SVG/main" r:embed="rId3"/>
+              </a:ext>
+            </a:extLst>
+          </a:blip>
+          <a:stretch>
+            <a:fillRect/>
+          </a:stretch>
+        </p:blipFill>
+        <p:spPr>
+          <a:xfrm>
+            <a:off x="320663" y="3336889"/>
+            <a:ext cx="535257" cy="535257"/>
+          </a:xfrm>
+          <a:prstGeom prst="rect">
+            <a:avLst/>
+          </a:prstGeom>
+        </p:spPr>
+      </p:pic>
+      <p:pic>
+        <p:nvPicPr>
+          <p:cNvPr id="28" name="Graphic 27" descr="Folder with solid fill">
+            <a:extLst>
+              <a:ext uri="{FF2B5EF4-FFF2-40B4-BE49-F238E27FC236}">
+                <a16:creationId xmlns:a16="http://schemas.microsoft.com/office/drawing/2014/main" id="{D8AFBB72-4F00-BB56-BC04-66682AB9026A}"/>
+              </a:ext>
+            </a:extLst>
+          </p:cNvPr>
+          <p:cNvPicPr>
+            <a:picLocks noChangeAspect="1"/>
+          </p:cNvPicPr>
+          <p:nvPr/>
+        </p:nvPicPr>
+        <p:blipFill>
+          <a:blip>
+            <a:extLst>
+              <a:ext uri="{96DAC541-7B7A-43D3-8B79-37D633B846F1}">
+                <asvg:svgBlip xmlns:asvg="http://schemas.microsoft.com/office/drawing/2016/SVG/main" r:embed="rId3"/>
+              </a:ext>
+            </a:extLst>
+          </a:blip>
+          <a:stretch>
+            <a:fillRect/>
+          </a:stretch>
+        </p:blipFill>
+        <p:spPr>
+          <a:xfrm>
+            <a:off x="320663" y="4071281"/>
+            <a:ext cx="535257" cy="535257"/>
+          </a:xfrm>
+          <a:prstGeom prst="rect">
+            <a:avLst/>
+          </a:prstGeom>
+        </p:spPr>
+      </p:pic>
+      <p:sp>
+        <p:nvSpPr>
+          <p:cNvPr id="30" name="Rectangle 29">
+            <a:extLst>
+              <a:ext uri="{FF2B5EF4-FFF2-40B4-BE49-F238E27FC236}">
+                <a16:creationId xmlns:a16="http://schemas.microsoft.com/office/drawing/2014/main" id="{C9D069EB-4324-5215-DF0B-396209FB7DC7}"/>
+              </a:ext>
+            </a:extLst>
+          </p:cNvPr>
+          <p:cNvSpPr/>
+          <p:nvPr/>
+        </p:nvSpPr>
+        <p:spPr>
+          <a:xfrm>
+            <a:off x="2810061" y="2309905"/>
+            <a:ext cx="1279339" cy="354356"/>
+          </a:xfrm>
+          <a:prstGeom prst="rect">
+            <a:avLst/>
+          </a:prstGeom>
+          <a:solidFill>
+            <a:schemeClr val="bg1">
+              <a:lumMod val="85000"/>
+            </a:schemeClr>
+          </a:solidFill>
+          <a:ln>
+            <a:noFill/>
+          </a:ln>
+          <a:effectLst>
+            <a:outerShdw blurRad="50800" dist="38100" dir="2700000" algn="tl" rotWithShape="0">
+              <a:prstClr val="black">
+                <a:alpha val="40000"/>
+              </a:prstClr>
+            </a:outerShdw>
+          </a:effectLst>
+        </p:spPr>
+        <p:style>
+          <a:lnRef idx="2">
+            <a:schemeClr val="accent1">
+              <a:shade val="15000"/>
+            </a:schemeClr>
+          </a:lnRef>
+          <a:fillRef idx="1">
+            <a:schemeClr val="accent1"/>
+          </a:fillRef>
+          <a:effectRef idx="0">
+            <a:schemeClr val="accent1"/>
+          </a:effectRef>
+          <a:fontRef idx="minor">
+            <a:schemeClr val="lt1"/>
+          </a:fontRef>
+        </p:style>
+        <p:txBody>
+          <a:bodyPr rtlCol="0" anchor="ctr"/>
+          <a:lstStyle/>
+          <a:p>
+            <a:pPr algn="ctr"/>
+            <a:r>
+              <a:rPr lang="en-US" sz="1400" dirty="0">
+                <a:solidFill>
+                  <a:schemeClr val="tx1"/>
+                </a:solidFill>
+              </a:rPr>
+              <a:t>Data loading</a:t>
+            </a:r>
+          </a:p>
+        </p:txBody>
+      </p:sp>
+      <p:sp>
+        <p:nvSpPr>
+          <p:cNvPr id="31" name="Rectangle 30">
+            <a:extLst>
+              <a:ext uri="{FF2B5EF4-FFF2-40B4-BE49-F238E27FC236}">
+                <a16:creationId xmlns:a16="http://schemas.microsoft.com/office/drawing/2014/main" id="{841F2F0E-0868-FF95-6991-EEB593B68258}"/>
+              </a:ext>
+            </a:extLst>
+          </p:cNvPr>
+          <p:cNvSpPr/>
+          <p:nvPr/>
+        </p:nvSpPr>
+        <p:spPr>
+          <a:xfrm>
+            <a:off x="2810061" y="2851902"/>
+            <a:ext cx="1279339" cy="354356"/>
+          </a:xfrm>
+          <a:prstGeom prst="rect">
+            <a:avLst/>
+          </a:prstGeom>
+          <a:solidFill>
+            <a:schemeClr val="bg1">
+              <a:lumMod val="85000"/>
+            </a:schemeClr>
+          </a:solidFill>
+          <a:ln>
+            <a:noFill/>
+          </a:ln>
+          <a:effectLst>
+            <a:outerShdw blurRad="50800" dist="38100" dir="2700000" algn="tl" rotWithShape="0">
+              <a:prstClr val="black">
+                <a:alpha val="40000"/>
+              </a:prstClr>
+            </a:outerShdw>
+          </a:effectLst>
+        </p:spPr>
+        <p:style>
+          <a:lnRef idx="2">
+            <a:schemeClr val="accent1">
+              <a:shade val="15000"/>
+            </a:schemeClr>
+          </a:lnRef>
+          <a:fillRef idx="1">
+            <a:schemeClr val="accent1"/>
+          </a:fillRef>
+          <a:effectRef idx="0">
+            <a:schemeClr val="accent1"/>
+          </a:effectRef>
+          <a:fontRef idx="minor">
+            <a:schemeClr val="lt1"/>
+          </a:fontRef>
+        </p:style>
+        <p:txBody>
+          <a:bodyPr rtlCol="0" anchor="ctr"/>
+          <a:lstStyle/>
+          <a:p>
+            <a:pPr algn="ctr"/>
+            <a:r>
+              <a:rPr lang="en-US" sz="1400" dirty="0">
+                <a:solidFill>
+                  <a:schemeClr val="tx1"/>
+                </a:solidFill>
+              </a:rPr>
+              <a:t>Preprocessing</a:t>
+            </a:r>
+          </a:p>
+        </p:txBody>
+      </p:sp>
+      <p:sp>
+        <p:nvSpPr>
+          <p:cNvPr id="32" name="Rectangle 31">
+            <a:extLst>
+              <a:ext uri="{FF2B5EF4-FFF2-40B4-BE49-F238E27FC236}">
+                <a16:creationId xmlns:a16="http://schemas.microsoft.com/office/drawing/2014/main" id="{42BC1A05-41D0-7581-AAC6-4EF317E1A160}"/>
+              </a:ext>
+            </a:extLst>
+          </p:cNvPr>
+          <p:cNvSpPr/>
+          <p:nvPr/>
+        </p:nvSpPr>
+        <p:spPr>
+          <a:xfrm>
+            <a:off x="2810061" y="3393899"/>
+            <a:ext cx="1279339" cy="354356"/>
+          </a:xfrm>
+          <a:prstGeom prst="rect">
+            <a:avLst/>
+          </a:prstGeom>
+          <a:solidFill>
+            <a:schemeClr val="bg1">
+              <a:lumMod val="85000"/>
+            </a:schemeClr>
+          </a:solidFill>
+          <a:ln>
+            <a:noFill/>
+          </a:ln>
+          <a:effectLst>
+            <a:outerShdw blurRad="50800" dist="38100" dir="2700000" algn="tl" rotWithShape="0">
+              <a:prstClr val="black">
+                <a:alpha val="40000"/>
+              </a:prstClr>
+            </a:outerShdw>
+          </a:effectLst>
+        </p:spPr>
+        <p:style>
+          <a:lnRef idx="2">
+            <a:schemeClr val="accent1">
+              <a:shade val="15000"/>
+            </a:schemeClr>
+          </a:lnRef>
+          <a:fillRef idx="1">
+            <a:schemeClr val="accent1"/>
+          </a:fillRef>
+          <a:effectRef idx="0">
+            <a:schemeClr val="accent1"/>
+          </a:effectRef>
+          <a:fontRef idx="minor">
+            <a:schemeClr val="lt1"/>
+          </a:fontRef>
+        </p:style>
+        <p:txBody>
+          <a:bodyPr rtlCol="0" anchor="ctr"/>
+          <a:lstStyle/>
+          <a:p>
+            <a:pPr algn="ctr"/>
+            <a:r>
+              <a:rPr lang="en-US" sz="1400" dirty="0">
+                <a:solidFill>
+                  <a:schemeClr val="tx1"/>
+                </a:solidFill>
+              </a:rPr>
+              <a:t>Optimization</a:t>
+            </a:r>
+          </a:p>
+        </p:txBody>
+      </p:sp>
+      <p:sp>
+        <p:nvSpPr>
+          <p:cNvPr id="33" name="Rectangle 32">
+            <a:extLst>
+              <a:ext uri="{FF2B5EF4-FFF2-40B4-BE49-F238E27FC236}">
+                <a16:creationId xmlns:a16="http://schemas.microsoft.com/office/drawing/2014/main" id="{D6E898F0-E8F8-936B-58C7-15CE5762C172}"/>
+              </a:ext>
+            </a:extLst>
+          </p:cNvPr>
+          <p:cNvSpPr/>
+          <p:nvPr/>
+        </p:nvSpPr>
+        <p:spPr>
+          <a:xfrm>
+            <a:off x="2810061" y="4063103"/>
+            <a:ext cx="1279339" cy="354356"/>
+          </a:xfrm>
+          <a:prstGeom prst="rect">
+            <a:avLst/>
+          </a:prstGeom>
+          <a:solidFill>
+            <a:schemeClr val="bg1">
+              <a:lumMod val="85000"/>
+            </a:schemeClr>
+          </a:solidFill>
+          <a:ln>
+            <a:noFill/>
+          </a:ln>
+          <a:effectLst>
+            <a:outerShdw blurRad="50800" dist="38100" dir="2700000" algn="tl" rotWithShape="0">
+              <a:prstClr val="black">
+                <a:alpha val="40000"/>
+              </a:prstClr>
+            </a:outerShdw>
+          </a:effectLst>
+        </p:spPr>
+        <p:style>
+          <a:lnRef idx="2">
+            <a:schemeClr val="accent1">
+              <a:shade val="15000"/>
+            </a:schemeClr>
+          </a:lnRef>
+          <a:fillRef idx="1">
+            <a:schemeClr val="accent1"/>
+          </a:fillRef>
+          <a:effectRef idx="0">
+            <a:schemeClr val="accent1"/>
+          </a:effectRef>
+          <a:fontRef idx="minor">
+            <a:schemeClr val="lt1"/>
+          </a:fontRef>
+        </p:style>
+        <p:txBody>
+          <a:bodyPr rtlCol="0" anchor="ctr"/>
+          <a:lstStyle/>
+          <a:p>
+            <a:pPr algn="ctr"/>
+            <a:r>
+              <a:rPr lang="en-US" sz="1400" dirty="0">
+                <a:solidFill>
+                  <a:schemeClr val="tx1"/>
+                </a:solidFill>
+              </a:rPr>
+              <a:t>Postprocessing</a:t>
+            </a:r>
+          </a:p>
+        </p:txBody>
+      </p:sp>
+      <p:sp>
+        <p:nvSpPr>
+          <p:cNvPr id="34" name="TextBox 33">
+            <a:extLst>
+              <a:ext uri="{FF2B5EF4-FFF2-40B4-BE49-F238E27FC236}">
+                <a16:creationId xmlns:a16="http://schemas.microsoft.com/office/drawing/2014/main" id="{EFFB5C78-321C-74B8-C529-01C5A64C1F02}"/>
+              </a:ext>
+            </a:extLst>
+          </p:cNvPr>
+          <p:cNvSpPr txBox="1"/>
+          <p:nvPr/>
+        </p:nvSpPr>
+        <p:spPr>
+          <a:xfrm>
+            <a:off x="907159" y="1864535"/>
+            <a:ext cx="1819537" cy="738664"/>
+          </a:xfrm>
+          <a:prstGeom prst="rect">
+            <a:avLst/>
+          </a:prstGeom>
+          <a:noFill/>
+        </p:spPr>
+        <p:txBody>
+          <a:bodyPr wrap="none" rtlCol="0">
+            <a:spAutoFit/>
+          </a:bodyPr>
+          <a:lstStyle/>
+          <a:p>
+            <a:r>
+              <a:rPr lang="en-US" sz="1400" b="1" dirty="0" err="1"/>
+              <a:t>data.json</a:t>
+            </a:r>
+            <a:endParaRPr lang="en-US" sz="1400" b="1" dirty="0"/>
+          </a:p>
+          <a:p>
+            <a:r>
+              <a:rPr lang="en-US" sz="1400" b="1" dirty="0" err="1">
+                <a:solidFill>
+                  <a:srgbClr val="00B050"/>
+                </a:solidFill>
+              </a:rPr>
+              <a:t>expected_model.lp</a:t>
+            </a:r>
+            <a:endParaRPr lang="en-US" sz="1400" b="1" dirty="0">
+              <a:solidFill>
+                <a:srgbClr val="00B050"/>
+              </a:solidFill>
+            </a:endParaRPr>
+          </a:p>
+          <a:p>
+            <a:r>
+              <a:rPr lang="en-US" sz="1400" b="1" dirty="0" err="1">
+                <a:solidFill>
+                  <a:srgbClr val="00B050"/>
+                </a:solidFill>
+              </a:rPr>
+              <a:t>expected_output.json</a:t>
+            </a:r>
+            <a:endParaRPr lang="en-US" sz="1400" b="1" dirty="0">
+              <a:solidFill>
+                <a:srgbClr val="00B050"/>
+              </a:solidFill>
+            </a:endParaRPr>
+          </a:p>
+        </p:txBody>
+      </p:sp>
+      <p:sp>
+        <p:nvSpPr>
+          <p:cNvPr id="35" name="Left Brace 34">
+            <a:extLst>
+              <a:ext uri="{FF2B5EF4-FFF2-40B4-BE49-F238E27FC236}">
+                <a16:creationId xmlns:a16="http://schemas.microsoft.com/office/drawing/2014/main" id="{7BFC59E5-A30C-4A94-BE8E-154C97FD9626}"/>
+              </a:ext>
+            </a:extLst>
+          </p:cNvPr>
+          <p:cNvSpPr/>
+          <p:nvPr/>
+        </p:nvSpPr>
+        <p:spPr>
+          <a:xfrm>
+            <a:off x="833695" y="1864535"/>
+            <a:ext cx="189278" cy="737962"/>
+          </a:xfrm>
+          <a:prstGeom prst="leftBrace">
+            <a:avLst/>
+          </a:prstGeom>
+          <a:ln/>
+        </p:spPr>
+        <p:style>
+          <a:lnRef idx="1">
+            <a:schemeClr val="dk1"/>
+          </a:lnRef>
+          <a:fillRef idx="0">
+            <a:schemeClr val="dk1"/>
+          </a:fillRef>
+          <a:effectRef idx="0">
+            <a:schemeClr val="dk1"/>
+          </a:effectRef>
+          <a:fontRef idx="minor">
+            <a:schemeClr val="tx1"/>
+          </a:fontRef>
+        </p:style>
+        <p:txBody>
+          <a:bodyPr rtlCol="0" anchor="ctr"/>
+          <a:lstStyle/>
+          <a:p>
+            <a:pPr algn="ctr"/>
+            <a:endParaRPr lang="en-US"/>
+          </a:p>
+        </p:txBody>
+      </p:sp>
+      <p:cxnSp>
+        <p:nvCxnSpPr>
+          <p:cNvPr id="39" name="Straight Arrow Connector 38">
+            <a:extLst>
+              <a:ext uri="{FF2B5EF4-FFF2-40B4-BE49-F238E27FC236}">
+                <a16:creationId xmlns:a16="http://schemas.microsoft.com/office/drawing/2014/main" id="{CAFEF960-C69A-815F-B1D3-4193A6A24270}"/>
+              </a:ext>
+            </a:extLst>
+          </p:cNvPr>
+          <p:cNvCxnSpPr>
+            <a:cxnSpLocks/>
+          </p:cNvCxnSpPr>
+          <p:nvPr/>
+        </p:nvCxnSpPr>
+        <p:spPr>
+          <a:xfrm>
+            <a:off x="1778623" y="2012140"/>
+            <a:ext cx="1678878" cy="0"/>
+          </a:xfrm>
+          <a:prstGeom prst="straightConnector1">
+            <a:avLst/>
+          </a:prstGeom>
+          <a:ln w="19050">
+            <a:tailEnd type="triangle"/>
+          </a:ln>
+        </p:spPr>
+        <p:style>
+          <a:lnRef idx="1">
+            <a:schemeClr val="dk1"/>
+          </a:lnRef>
+          <a:fillRef idx="0">
+            <a:schemeClr val="dk1"/>
+          </a:fillRef>
+          <a:effectRef idx="0">
+            <a:schemeClr val="dk1"/>
+          </a:effectRef>
+          <a:fontRef idx="minor">
+            <a:schemeClr val="tx1"/>
+          </a:fontRef>
+        </p:style>
+      </p:cxnSp>
+      <p:sp>
+        <p:nvSpPr>
+          <p:cNvPr id="47" name="TextBox 46">
+            <a:extLst>
+              <a:ext uri="{FF2B5EF4-FFF2-40B4-BE49-F238E27FC236}">
+                <a16:creationId xmlns:a16="http://schemas.microsoft.com/office/drawing/2014/main" id="{9B0AD2DA-1090-5BF1-5920-65D6F6F76B35}"/>
+              </a:ext>
+            </a:extLst>
+          </p:cNvPr>
+          <p:cNvSpPr txBox="1"/>
+          <p:nvPr/>
+        </p:nvSpPr>
+        <p:spPr>
+          <a:xfrm>
+            <a:off x="1299627" y="3812599"/>
+            <a:ext cx="1388320" cy="307777"/>
+          </a:xfrm>
+          <a:prstGeom prst="rect">
+            <a:avLst/>
+          </a:prstGeom>
+          <a:noFill/>
+        </p:spPr>
+        <p:txBody>
+          <a:bodyPr wrap="square">
+            <a:spAutoFit/>
+          </a:bodyPr>
+          <a:lstStyle/>
+          <a:p>
+            <a:r>
+              <a:rPr lang="en-US" sz="1400" b="1" dirty="0" err="1">
+                <a:solidFill>
+                  <a:schemeClr val="accent1"/>
+                </a:solidFill>
+              </a:rPr>
+              <a:t>actual_model.lp</a:t>
+            </a:r>
+            <a:endParaRPr lang="en-US" sz="1400" b="1" dirty="0">
+              <a:solidFill>
+                <a:schemeClr val="accent1"/>
+              </a:solidFill>
+            </a:endParaRPr>
+          </a:p>
+        </p:txBody>
+      </p:sp>
+      <p:cxnSp>
+        <p:nvCxnSpPr>
+          <p:cNvPr id="50" name="Straight Arrow Connector 49">
+            <a:extLst>
+              <a:ext uri="{FF2B5EF4-FFF2-40B4-BE49-F238E27FC236}">
+                <a16:creationId xmlns:a16="http://schemas.microsoft.com/office/drawing/2014/main" id="{40DE5F41-1BD8-BBD9-F5AA-8B6EBBEDF2F3}"/>
+              </a:ext>
+            </a:extLst>
+          </p:cNvPr>
+          <p:cNvCxnSpPr>
+            <a:cxnSpLocks/>
+          </p:cNvCxnSpPr>
+          <p:nvPr/>
+        </p:nvCxnSpPr>
+        <p:spPr>
+          <a:xfrm flipH="1">
+            <a:off x="2642086" y="3992341"/>
+            <a:ext cx="671543" cy="0"/>
+          </a:xfrm>
+          <a:prstGeom prst="straightConnector1">
+            <a:avLst/>
+          </a:prstGeom>
+          <a:ln w="12700">
+            <a:prstDash val="dash"/>
+            <a:tailEnd type="triangle"/>
+          </a:ln>
+        </p:spPr>
+        <p:style>
+          <a:lnRef idx="1">
+            <a:schemeClr val="dk1"/>
+          </a:lnRef>
+          <a:fillRef idx="0">
+            <a:schemeClr val="dk1"/>
+          </a:fillRef>
+          <a:effectRef idx="0">
+            <a:schemeClr val="dk1"/>
+          </a:effectRef>
+          <a:fontRef idx="minor">
+            <a:schemeClr val="tx1"/>
+          </a:fontRef>
+        </p:style>
+      </p:cxnSp>
+      <p:sp>
+        <p:nvSpPr>
+          <p:cNvPr id="55" name="TextBox 54">
+            <a:extLst>
+              <a:ext uri="{FF2B5EF4-FFF2-40B4-BE49-F238E27FC236}">
+                <a16:creationId xmlns:a16="http://schemas.microsoft.com/office/drawing/2014/main" id="{6EBFA450-E6A4-23BA-19EA-A85CFFAD05BE}"/>
+              </a:ext>
+            </a:extLst>
+          </p:cNvPr>
+          <p:cNvSpPr txBox="1"/>
+          <p:nvPr/>
+        </p:nvSpPr>
+        <p:spPr>
+          <a:xfrm>
+            <a:off x="2647707" y="4596525"/>
+            <a:ext cx="1619588" cy="307777"/>
+          </a:xfrm>
+          <a:prstGeom prst="rect">
+            <a:avLst/>
+          </a:prstGeom>
+          <a:noFill/>
+        </p:spPr>
+        <p:txBody>
+          <a:bodyPr wrap="square">
+            <a:spAutoFit/>
+          </a:bodyPr>
+          <a:lstStyle/>
+          <a:p>
+            <a:pPr algn="ctr"/>
+            <a:r>
+              <a:rPr lang="en-US" sz="1400" b="1" dirty="0" err="1">
+                <a:solidFill>
+                  <a:schemeClr val="accent1"/>
+                </a:solidFill>
+              </a:rPr>
+              <a:t>actual_output.json</a:t>
+            </a:r>
+            <a:endParaRPr lang="en-US" sz="1400" b="1" dirty="0">
+              <a:solidFill>
+                <a:schemeClr val="accent1"/>
+              </a:solidFill>
+            </a:endParaRPr>
+          </a:p>
+        </p:txBody>
+      </p:sp>
+      <p:sp>
+        <p:nvSpPr>
+          <p:cNvPr id="57" name="TextBox 56">
+            <a:extLst>
+              <a:ext uri="{FF2B5EF4-FFF2-40B4-BE49-F238E27FC236}">
+                <a16:creationId xmlns:a16="http://schemas.microsoft.com/office/drawing/2014/main" id="{3B8F2620-A79F-8A1B-9B5F-2EA89E6D7151}"/>
+              </a:ext>
+            </a:extLst>
+          </p:cNvPr>
+          <p:cNvSpPr txBox="1"/>
+          <p:nvPr/>
+        </p:nvSpPr>
+        <p:spPr>
+          <a:xfrm>
+            <a:off x="4556002" y="1931406"/>
+            <a:ext cx="4395702" cy="2185214"/>
+          </a:xfrm>
+          <a:prstGeom prst="rect">
+            <a:avLst/>
+          </a:prstGeom>
+          <a:noFill/>
+        </p:spPr>
+        <p:txBody>
+          <a:bodyPr wrap="square">
+            <a:spAutoFit/>
+          </a:bodyPr>
+          <a:lstStyle/>
+          <a:p>
+            <a:pPr algn="ctr"/>
+            <a:r>
+              <a:rPr lang="en-US" b="1" dirty="0">
+                <a:cs typeface="Arial" panose="020B0604020202020204" pitchFamily="34" charset="0"/>
+              </a:rPr>
+              <a:t>Goals</a:t>
+            </a:r>
+            <a:endParaRPr lang="en-US" sz="1400" b="1" dirty="0">
+              <a:cs typeface="Arial" panose="020B0604020202020204" pitchFamily="34" charset="0"/>
+            </a:endParaRPr>
+          </a:p>
+          <a:p>
+            <a:pPr marL="285750" indent="-285750" algn="just">
+              <a:buFont typeface="Wingdings" panose="05000000000000000000" pitchFamily="2" charset="2"/>
+              <a:buChar char="ü"/>
+            </a:pPr>
+            <a:endParaRPr lang="en-US" sz="1400" dirty="0">
+              <a:cs typeface="Arial" panose="020B0604020202020204" pitchFamily="34" charset="0"/>
+            </a:endParaRPr>
+          </a:p>
+          <a:p>
+            <a:pPr marL="285750" indent="-285750" algn="just">
+              <a:buFont typeface="Wingdings" panose="05000000000000000000" pitchFamily="2" charset="2"/>
+              <a:buChar char="ü"/>
+            </a:pPr>
+            <a:r>
+              <a:rPr lang="en-US" sz="1400" dirty="0">
+                <a:cs typeface="Arial" panose="020B0604020202020204" pitchFamily="34" charset="0"/>
+              </a:rPr>
+              <a:t>Ensure the model units were assembled correctly</a:t>
+            </a:r>
+          </a:p>
+          <a:p>
+            <a:pPr marL="285750" indent="-285750" algn="just">
+              <a:buFont typeface="Wingdings" panose="05000000000000000000" pitchFamily="2" charset="2"/>
+              <a:buChar char="ü"/>
+            </a:pPr>
+            <a:endParaRPr lang="en-US" sz="1000" dirty="0"/>
+          </a:p>
+          <a:p>
+            <a:pPr marL="285750" indent="-285750" algn="just">
+              <a:buFont typeface="Wingdings" panose="05000000000000000000" pitchFamily="2" charset="2"/>
+              <a:buChar char="ü"/>
+            </a:pPr>
+            <a:r>
+              <a:rPr lang="en-US" sz="1400" dirty="0">
+                <a:cs typeface="Arial" panose="020B0604020202020204" pitchFamily="34" charset="0"/>
+              </a:rPr>
+              <a:t>Detect unintended code changes in the model</a:t>
+            </a:r>
+          </a:p>
+          <a:p>
+            <a:pPr marL="285750" indent="-285750" algn="just">
+              <a:buFont typeface="Wingdings" panose="05000000000000000000" pitchFamily="2" charset="2"/>
+              <a:buChar char="ü"/>
+            </a:pPr>
+            <a:endParaRPr lang="en-US" sz="1000" dirty="0">
+              <a:cs typeface="Arial" panose="020B0604020202020204" pitchFamily="34" charset="0"/>
+            </a:endParaRPr>
+          </a:p>
+          <a:p>
+            <a:pPr marL="285750" indent="-285750" algn="just">
+              <a:buFont typeface="Wingdings" panose="05000000000000000000" pitchFamily="2" charset="2"/>
+              <a:buChar char="ü"/>
+            </a:pPr>
+            <a:r>
+              <a:rPr lang="en-US" sz="1400" dirty="0">
+                <a:cs typeface="Arial" panose="020B0604020202020204" pitchFamily="34" charset="0"/>
+              </a:rPr>
+              <a:t>Ensure intended code changes affect only the targeted units of the model</a:t>
+            </a:r>
+          </a:p>
+          <a:p>
+            <a:pPr marL="285750" indent="-285750" algn="just">
+              <a:buFont typeface="Wingdings" panose="05000000000000000000" pitchFamily="2" charset="2"/>
+              <a:buChar char="ü"/>
+            </a:pPr>
+            <a:endParaRPr lang="en-US" sz="1000" dirty="0">
+              <a:cs typeface="Arial" panose="020B0604020202020204" pitchFamily="34" charset="0"/>
+            </a:endParaRPr>
+          </a:p>
+          <a:p>
+            <a:pPr marL="285750" indent="-285750" algn="just">
+              <a:buFont typeface="Wingdings" panose="05000000000000000000" pitchFamily="2" charset="2"/>
+              <a:buChar char="ü"/>
+            </a:pPr>
+            <a:r>
+              <a:rPr lang="en-US" sz="1400" dirty="0">
+                <a:cs typeface="Arial" panose="020B0604020202020204" pitchFamily="34" charset="0"/>
+              </a:rPr>
+              <a:t>Ensure the program executed to completion</a:t>
+            </a:r>
+          </a:p>
+        </p:txBody>
+      </p:sp>
+      <p:sp>
+        <p:nvSpPr>
+          <p:cNvPr id="61" name="Speech Bubble: Rectangle 60">
+            <a:extLst>
+              <a:ext uri="{FF2B5EF4-FFF2-40B4-BE49-F238E27FC236}">
+                <a16:creationId xmlns:a16="http://schemas.microsoft.com/office/drawing/2014/main" id="{298AE833-F2E3-8E7F-6292-77B7E489F0D9}"/>
+              </a:ext>
+            </a:extLst>
+          </p:cNvPr>
+          <p:cNvSpPr/>
+          <p:nvPr/>
+        </p:nvSpPr>
+        <p:spPr>
+          <a:xfrm>
+            <a:off x="4736840" y="4338909"/>
+            <a:ext cx="3496733" cy="588596"/>
+          </a:xfrm>
+          <a:prstGeom prst="wedgeRectCallout">
+            <a:avLst>
+              <a:gd name="adj1" fmla="val -60601"/>
+              <a:gd name="adj2" fmla="val 19962"/>
+            </a:avLst>
+          </a:prstGeom>
+          <a:solidFill>
+            <a:schemeClr val="accent4">
+              <a:lumMod val="20000"/>
+              <a:lumOff val="80000"/>
+            </a:schemeClr>
+          </a:solidFill>
+          <a:ln w="9525"/>
+        </p:spPr>
+        <p:style>
+          <a:lnRef idx="2">
+            <a:schemeClr val="accent1">
+              <a:shade val="15000"/>
+            </a:schemeClr>
+          </a:lnRef>
+          <a:fillRef idx="1">
+            <a:schemeClr val="accent1"/>
+          </a:fillRef>
+          <a:effectRef idx="0">
+            <a:schemeClr val="accent1"/>
+          </a:effectRef>
+          <a:fontRef idx="minor">
+            <a:schemeClr val="lt1"/>
+          </a:fontRef>
+        </p:style>
+        <p:txBody>
+          <a:bodyPr rtlCol="0" anchor="ctr"/>
+          <a:lstStyle/>
+          <a:p>
+            <a:pPr algn="ctr"/>
+            <a:r>
+              <a:rPr lang="en-US" sz="1400" dirty="0">
+                <a:solidFill>
+                  <a:schemeClr val="tx1"/>
+                </a:solidFill>
+              </a:rPr>
+              <a:t>When comparing business outputs, only check deterministic and objective properties</a:t>
+            </a:r>
+          </a:p>
+        </p:txBody>
+      </p:sp>
+      <p:sp>
+        <p:nvSpPr>
+          <p:cNvPr id="63" name="TextBox 62">
+            <a:extLst>
+              <a:ext uri="{FF2B5EF4-FFF2-40B4-BE49-F238E27FC236}">
+                <a16:creationId xmlns:a16="http://schemas.microsoft.com/office/drawing/2014/main" id="{E178CDE8-CA36-331A-F024-20BAD568A0BA}"/>
+              </a:ext>
+            </a:extLst>
+          </p:cNvPr>
+          <p:cNvSpPr txBox="1"/>
+          <p:nvPr/>
+        </p:nvSpPr>
+        <p:spPr>
+          <a:xfrm>
+            <a:off x="2759718" y="3753232"/>
+            <a:ext cx="638711" cy="261610"/>
+          </a:xfrm>
+          <a:prstGeom prst="rect">
+            <a:avLst/>
+          </a:prstGeom>
+          <a:noFill/>
+        </p:spPr>
+        <p:txBody>
+          <a:bodyPr wrap="square">
+            <a:spAutoFit/>
+          </a:bodyPr>
+          <a:lstStyle/>
+          <a:p>
+            <a:r>
+              <a:rPr lang="en-US" sz="1100" dirty="0"/>
+              <a:t>export</a:t>
+            </a:r>
+          </a:p>
+        </p:txBody>
+      </p:sp>
+      <p:sp>
+        <p:nvSpPr>
+          <p:cNvPr id="3" name="Rectangle 2">
+            <a:extLst>
+              <a:ext uri="{FF2B5EF4-FFF2-40B4-BE49-F238E27FC236}">
+                <a16:creationId xmlns:a16="http://schemas.microsoft.com/office/drawing/2014/main" id="{8AD7685E-850C-2EBC-CD97-CADA77E200BA}"/>
+              </a:ext>
+            </a:extLst>
+          </p:cNvPr>
+          <p:cNvSpPr/>
+          <p:nvPr/>
+        </p:nvSpPr>
+        <p:spPr>
+          <a:xfrm>
+            <a:off x="457200" y="987552"/>
+            <a:ext cx="8229600" cy="36576"/>
+          </a:xfrm>
+          <a:prstGeom prst="rect">
+            <a:avLst/>
+          </a:prstGeom>
+          <a:solidFill>
+            <a:srgbClr val="0077A8"/>
+          </a:solidFill>
+          <a:ln>
+            <a:noFill/>
+          </a:ln>
+        </p:spPr>
+        <p:style>
+          <a:lnRef idx="1">
+            <a:schemeClr val="accent1"/>
+          </a:lnRef>
+          <a:fillRef idx="3">
+            <a:schemeClr val="accent1"/>
+          </a:fillRef>
+          <a:effectRef idx="2">
+            <a:schemeClr val="accent1"/>
+          </a:effectRef>
+          <a:fontRef idx="minor">
+            <a:schemeClr val="lt1"/>
+          </a:fontRef>
+        </p:style>
+        <p:txBody>
+          <a:bodyPr rtlCol="0" anchor="ctr"/>
+          <a:lstStyle/>
+          <a:p>
+            <a:pPr algn="ctr"/>
+            <a:endParaRPr/>
+          </a:p>
+        </p:txBody>
+      </p:sp>
+    </p:spTree>
+    <p:extLst>
+      <p:ext uri="{BB962C8B-B14F-4D97-AF65-F5344CB8AC3E}">
+        <p14:creationId xmlns:p14="http://schemas.microsoft.com/office/powerpoint/2010/main" val="2900588005"/>
+      </p:ext>
+    </p:extLst>
+  </p:cSld>
+  <p:clrMapOvr>
+    <a:masterClrMapping/>
+  </p:clrMapOvr>
+  <p:timing>
+    <p:tnLst>
+      <p:par>
+        <p:cTn id="1" dur="indefinite" restart="never" nodeType="tmRoot">
+          <p:childTnLst>
+            <p:seq concurrent="1" nextAc="seek">
+              <p:cTn id="2" dur="indefinite" nodeType="mainSeq">
+                <p:childTnLst>
+                  <p:par>
+                    <p:cTn id="3" fill="hold">
+                      <p:stCondLst>
+                        <p:cond delay="indefinite"/>
+                      </p:stCondLst>
+                      <p:childTnLst>
+                        <p:par>
+                          <p:cTn id="4" fill="hold">
+                            <p:stCondLst>
+                              <p:cond delay="0"/>
+                            </p:stCondLst>
+                            <p:childTnLst>
+                              <p:par>
+                                <p:cTn id="5" presetID="1" presetClass="entr" presetSubtype="0" fill="hold" grpId="0" nodeType="clickEffect">
+                                  <p:stCondLst>
+                                    <p:cond delay="0"/>
+                                  </p:stCondLst>
+                                  <p:childTnLst>
+                                    <p:set>
+                                      <p:cBhvr>
+                                        <p:cTn id="6" dur="1" fill="hold">
+                                          <p:stCondLst>
+                                            <p:cond delay="0"/>
+                                          </p:stCondLst>
+                                        </p:cTn>
+                                        <p:tgtEl>
+                                          <p:spTgt spid="61"/>
+                                        </p:tgtEl>
+                                        <p:attrNameLst>
+                                          <p:attrName>style.visibility</p:attrName>
+                                        </p:attrNameLst>
+                                      </p:cBhvr>
+                                      <p:to>
+                                        <p:strVal val="visible"/>
+                                      </p:to>
+                                    </p:set>
+                                  </p:childTnLst>
+                                </p:cTn>
+                              </p:par>
+                            </p:childTnLst>
+                          </p:cTn>
+                        </p:par>
+                      </p:childTnLst>
+                    </p:cTn>
+                  </p:par>
+                </p:childTnLst>
+              </p:cTn>
+              <p:prevCondLst>
+                <p:cond evt="onPrev" delay="0">
+                  <p:tgtEl>
+                    <p:sldTgt/>
+                  </p:tgtEl>
+                </p:cond>
+              </p:prevCondLst>
+              <p:nextCondLst>
+                <p:cond evt="onNext" delay="0">
+                  <p:tgtEl>
+                    <p:sldTgt/>
+                  </p:tgtEl>
+                </p:cond>
+              </p:nextCondLst>
+            </p:seq>
+          </p:childTnLst>
+        </p:cTn>
+      </p:par>
+    </p:tnLst>
+    <p:bldLst>
+      <p:bldP spid="61" grpId="0" animBg="1"/>
+    </p:bldLst>
+  </p:timing>
+</p:sld>
+</file>
+
+<file path=ppt/slides/slide42.xml><?xml version="1.0" encoding="utf-8"?>
+<p:sld xmlns:a="http://schemas.openxmlformats.org/drawingml/2006/main" xmlns:r="http://schemas.openxmlformats.org/officeDocument/2006/relationships" xmlns:p="http://schemas.openxmlformats.org/presentationml/2006/main">
+  <p:cSld>
+    <p:bg>
+      <p:bgPr>
+        <a:solidFill>
+          <a:srgbClr val="F8F9FA"/>
+        </a:solidFill>
+        <a:effectLst/>
+      </p:bgPr>
+    </p:bg>
+    <p:spTree>
+      <p:nvGrpSpPr>
+        <p:cNvPr id="1" name=""/>
+        <p:cNvGrpSpPr/>
+        <p:nvPr/>
+      </p:nvGrpSpPr>
+      <p:grpSpPr>
+        <a:xfrm>
+          <a:off x="0" y="0"/>
+          <a:ext cx="0" cy="0"/>
+          <a:chOff x="0" y="0"/>
+          <a:chExt cx="0" cy="0"/>
+        </a:xfrm>
+      </p:grpSpPr>
+      <p:sp>
+        <p:nvSpPr>
+          <p:cNvPr id="2" name="TextBox 1"/>
+          <p:cNvSpPr txBox="1"/>
+          <p:nvPr/>
+        </p:nvSpPr>
+        <p:spPr>
+          <a:xfrm>
+            <a:off x="388620" y="365760"/>
+            <a:ext cx="8229600" cy="1097280"/>
+          </a:xfrm>
+          <a:prstGeom prst="rect">
+            <a:avLst/>
+          </a:prstGeom>
+          <a:noFill/>
+        </p:spPr>
+        <p:txBody>
+          <a:bodyPr wrap="square">
+            <a:spAutoFit/>
+          </a:bodyPr>
+          <a:lstStyle/>
+          <a:p>
+            <a:pPr algn="l"/>
+            <a:r>
+              <a:rPr sz="6000" b="1" i="0" dirty="0">
+                <a:solidFill>
+                  <a:srgbClr val="0A1628"/>
+                </a:solidFill>
+                <a:latin typeface="Calibri"/>
+              </a:rPr>
+              <a:t>Thank you</a:t>
+            </a:r>
+          </a:p>
+        </p:txBody>
+      </p:sp>
+      <p:sp>
+        <p:nvSpPr>
+          <p:cNvPr id="3" name="Rectangle 2"/>
+          <p:cNvSpPr/>
+          <p:nvPr/>
+        </p:nvSpPr>
+        <p:spPr>
+          <a:xfrm>
+            <a:off x="388620" y="1554480"/>
+            <a:ext cx="8229600" cy="36576"/>
+          </a:xfrm>
+          <a:prstGeom prst="rect">
+            <a:avLst/>
+          </a:prstGeom>
+          <a:solidFill>
+            <a:srgbClr val="0077A8"/>
+          </a:solidFill>
+          <a:ln>
+            <a:noFill/>
+          </a:ln>
+        </p:spPr>
+        <p:style>
+          <a:lnRef idx="1">
+            <a:schemeClr val="accent1"/>
+          </a:lnRef>
+          <a:fillRef idx="3">
+            <a:schemeClr val="accent1"/>
+          </a:fillRef>
+          <a:effectRef idx="2">
+            <a:schemeClr val="accent1"/>
+          </a:effectRef>
+          <a:fontRef idx="minor">
+            <a:schemeClr val="lt1"/>
+          </a:fontRef>
+        </p:style>
+        <p:txBody>
+          <a:bodyPr rtlCol="0" anchor="ctr"/>
+          <a:lstStyle/>
+          <a:p>
+            <a:pPr algn="ctr"/>
+            <a:endParaRPr/>
+          </a:p>
+        </p:txBody>
+      </p:sp>
+      <p:sp>
+        <p:nvSpPr>
+          <p:cNvPr id="5" name="Slide Number Placeholder 4">
+            <a:extLst>
+              <a:ext uri="{FF2B5EF4-FFF2-40B4-BE49-F238E27FC236}">
+                <a16:creationId xmlns:a16="http://schemas.microsoft.com/office/drawing/2014/main" id="{36465BAB-B7AA-9168-ED59-AC2585533C72}"/>
+              </a:ext>
+            </a:extLst>
+          </p:cNvPr>
+          <p:cNvSpPr>
+            <a:spLocks noGrp="1"/>
+          </p:cNvSpPr>
+          <p:nvPr>
+            <p:ph type="sldNum" sz="quarter" idx="12"/>
+          </p:nvPr>
+        </p:nvSpPr>
+        <p:spPr/>
+        <p:txBody>
+          <a:bodyPr/>
+          <a:lstStyle/>
+          <a:p>
+            <a:fld id="{C1FF6DA9-008F-8B48-92A6-B652298478BF}" type="slidenum">
+              <a:rPr lang="en-US" smtClean="0"/>
+              <a:t>42</a:t>
+            </a:fld>
+            <a:endParaRPr lang="en-US"/>
+          </a:p>
+        </p:txBody>
+      </p:sp>
+      <p:sp>
+        <p:nvSpPr>
+          <p:cNvPr id="7" name="TextBox 6">
+            <a:extLst>
+              <a:ext uri="{FF2B5EF4-FFF2-40B4-BE49-F238E27FC236}">
+                <a16:creationId xmlns:a16="http://schemas.microsoft.com/office/drawing/2014/main" id="{167FC925-3049-5023-F37C-B488F0DDAD12}"/>
+              </a:ext>
+            </a:extLst>
+          </p:cNvPr>
+          <p:cNvSpPr txBox="1"/>
+          <p:nvPr/>
+        </p:nvSpPr>
+        <p:spPr>
+          <a:xfrm>
+            <a:off x="441960" y="2950686"/>
+            <a:ext cx="4572000" cy="369332"/>
+          </a:xfrm>
+          <a:prstGeom prst="rect">
+            <a:avLst/>
+          </a:prstGeom>
+          <a:noFill/>
+        </p:spPr>
+        <p:txBody>
+          <a:bodyPr wrap="square">
+            <a:spAutoFit/>
+          </a:bodyPr>
+          <a:lstStyle/>
+          <a:p>
+            <a:r>
+              <a:rPr lang="en-US" dirty="0">
+                <a:hlinkClick r:id="rId2"/>
+              </a:rPr>
+              <a:t>https://forms.gle/Ajp2wa3kgcDhyGDW7</a:t>
+            </a:r>
+            <a:r>
+              <a:rPr lang="en-US" dirty="0"/>
+              <a:t> </a:t>
+            </a:r>
+          </a:p>
+        </p:txBody>
+      </p:sp>
+      <p:sp>
+        <p:nvSpPr>
+          <p:cNvPr id="9" name="TextBox 8">
+            <a:extLst>
+              <a:ext uri="{FF2B5EF4-FFF2-40B4-BE49-F238E27FC236}">
+                <a16:creationId xmlns:a16="http://schemas.microsoft.com/office/drawing/2014/main" id="{EBC00993-E833-5B49-EE01-049E21D98E6E}"/>
+              </a:ext>
+            </a:extLst>
+          </p:cNvPr>
+          <p:cNvSpPr txBox="1"/>
+          <p:nvPr/>
+        </p:nvSpPr>
+        <p:spPr>
+          <a:xfrm>
+            <a:off x="441960" y="2529054"/>
+            <a:ext cx="4572000" cy="369332"/>
+          </a:xfrm>
+          <a:prstGeom prst="rect">
+            <a:avLst/>
+          </a:prstGeom>
+          <a:noFill/>
+        </p:spPr>
+        <p:txBody>
+          <a:bodyPr wrap="square">
+            <a:spAutoFit/>
+          </a:bodyPr>
+          <a:lstStyle/>
+          <a:p>
+            <a:r>
+              <a:rPr lang="en-US" sz="1800" b="0" i="0" dirty="0">
+                <a:solidFill>
+                  <a:srgbClr val="2D3748"/>
+                </a:solidFill>
+                <a:latin typeface="Calibri"/>
+              </a:rPr>
+              <a:t>Provide your feedback here please:</a:t>
+            </a:r>
+            <a:endParaRPr lang="en-US" dirty="0"/>
+          </a:p>
+        </p:txBody>
+      </p:sp>
+      <p:pic>
+        <p:nvPicPr>
+          <p:cNvPr id="11" name="Picture 10">
+            <a:extLst>
+              <a:ext uri="{FF2B5EF4-FFF2-40B4-BE49-F238E27FC236}">
+                <a16:creationId xmlns:a16="http://schemas.microsoft.com/office/drawing/2014/main" id="{D4F567CB-A713-ABEE-D8FF-DB8361AC57CA}"/>
+              </a:ext>
+            </a:extLst>
+          </p:cNvPr>
+          <p:cNvPicPr>
+            <a:picLocks noChangeAspect="1"/>
+          </p:cNvPicPr>
+          <p:nvPr/>
+        </p:nvPicPr>
+        <p:blipFill>
+          <a:blip r:embed="rId3"/>
+          <a:stretch>
+            <a:fillRect/>
+          </a:stretch>
+        </p:blipFill>
+        <p:spPr>
+          <a:xfrm>
+            <a:off x="4450080" y="259080"/>
+            <a:ext cx="4572000" cy="4572000"/>
+          </a:xfrm>
+          <a:prstGeom prst="rect">
+            <a:avLst/>
+          </a:prstGeom>
+        </p:spPr>
+      </p:pic>
+    </p:spTree>
+  </p:cSld>
+  <p:clrMapOvr>
+    <a:masterClrMapping/>
+  </p:clrMapOvr>
 </p:sld>
 </file>
 
@@ -26198,8 +31919,8 @@
         </p:nvSpPr>
         <p:spPr>
           <a:xfrm>
-            <a:off x="457200" y="1183362"/>
-            <a:ext cx="8046720" cy="3323987"/>
+            <a:off x="457199" y="1091922"/>
+            <a:ext cx="8470669" cy="3554819"/>
           </a:xfrm>
           <a:prstGeom prst="rect">
             <a:avLst/>
@@ -26220,7 +31941,7 @@
               <a:buChar char="•"/>
             </a:pPr>
             <a:r>
-              <a:rPr lang="en-US" sz="2000" b="0" i="1" dirty="0">
+              <a:rPr lang="en-US" b="0" i="1" dirty="0">
                 <a:solidFill>
                   <a:srgbClr val="2D3748"/>
                 </a:solidFill>
@@ -26235,7 +31956,7 @@
               <a:buChar char="•"/>
             </a:pPr>
             <a:r>
-              <a:rPr lang="en-US" sz="2000" i="1" dirty="0">
+              <a:rPr lang="en-US" i="1" dirty="0">
                 <a:solidFill>
                   <a:srgbClr val="2D3748"/>
                 </a:solidFill>
@@ -26243,7 +31964,7 @@
               <a:t>I would like to learn how to coordinate between different part of repos and how to do proper docstring commenting</a:t>
             </a:r>
             <a:r>
-              <a:rPr lang="en-US" sz="2000" i="1" dirty="0">
+              <a:rPr lang="en-US" i="1" dirty="0">
                 <a:solidFill>
                   <a:srgbClr val="2D3748"/>
                 </a:solidFill>
@@ -26258,7 +31979,7 @@
               <a:buChar char="•"/>
             </a:pPr>
             <a:r>
-              <a:rPr lang="en-US" sz="2000" i="1" dirty="0">
+              <a:rPr lang="en-US" i="1" dirty="0">
                 <a:solidFill>
                   <a:srgbClr val="2D3748"/>
                 </a:solidFill>
@@ -26272,7 +31993,7 @@
               <a:buChar char="•"/>
             </a:pPr>
             <a:r>
-              <a:rPr lang="en-US" sz="2000" i="1" dirty="0">
+              <a:rPr lang="en-US" i="1" dirty="0">
                 <a:solidFill>
                   <a:srgbClr val="2D3748"/>
                 </a:solidFill>
@@ -26286,7 +32007,7 @@
               <a:buChar char="•"/>
             </a:pPr>
             <a:r>
-              <a:rPr lang="en-US" sz="2000" i="1" dirty="0">
+              <a:rPr lang="en-US" i="1" dirty="0">
                 <a:solidFill>
                   <a:srgbClr val="2D3748"/>
                 </a:solidFill>
@@ -26300,24 +32021,54 @@
               <a:buChar char="•"/>
             </a:pPr>
             <a:r>
-              <a:rPr lang="en-US" sz="2000" b="0" i="1" dirty="0">
+              <a:rPr lang="en-US" b="0" i="1" dirty="0">
                 <a:solidFill>
                   <a:srgbClr val="2D3748"/>
                 </a:solidFill>
                 <a:latin typeface="Calibri"/>
               </a:rPr>
-              <a:t>I l</a:t>
-            </a:r>
-            <a:r>
-              <a:rPr lang="en-US" sz="2000" i="1" dirty="0">
+              <a:t>Learn </a:t>
+            </a:r>
+            <a:r>
+              <a:rPr lang="en-US" i="1" dirty="0">
                 <a:solidFill>
                   <a:srgbClr val="2D3748"/>
                 </a:solidFill>
                 <a:latin typeface="Calibri"/>
               </a:rPr>
-              <a:t>ack formal software design training.</a:t>
-            </a:r>
-            <a:endParaRPr sz="2000" b="0" i="1" dirty="0">
+              <a:t>formal software design training.</a:t>
+            </a:r>
+          </a:p>
+          <a:p>
+            <a:pPr marL="342900" indent="-342900">
+              <a:buFont typeface="Arial" panose="020B0604020202020204" pitchFamily="34" charset="0"/>
+              <a:buChar char="•"/>
+            </a:pPr>
+            <a:r>
+              <a:rPr lang="en-US" i="1" dirty="0">
+                <a:solidFill>
+                  <a:srgbClr val="2D3748"/>
+                </a:solidFill>
+              </a:rPr>
+              <a:t>To properly use Git for version control, efficiently manage issues and pull requests, and to use automation and AI agents to quickly handle mundane non-developmental tasks like testing and </a:t>
+            </a:r>
+            <a:r>
+              <a:rPr lang="en-US" i="1" dirty="0" err="1">
+                <a:solidFill>
+                  <a:srgbClr val="2D3748"/>
+                </a:solidFill>
+              </a:rPr>
+              <a:t>precommits</a:t>
+            </a:r>
+            <a:r>
+              <a:rPr lang="en-US" i="1" dirty="0">
+                <a:solidFill>
+                  <a:srgbClr val="2D3748"/>
+                </a:solidFill>
+              </a:rPr>
+              <a:t>.</a:t>
+            </a:r>
+            <a:endParaRPr b="0" i="1" dirty="0">
               <a:solidFill>
                 <a:srgbClr val="2D3748"/>
               </a:solidFill>

--- a/workshops/2026-06-29-purdue/Purdue_Workshop.pptx
+++ b/workshops/2026-06-29-purdue/Purdue_Workshop.pptx
@@ -5,7 +5,7 @@
     <p:sldMasterId id="2147483648" r:id="rId1"/>
   </p:sldMasterIdLst>
   <p:notesMasterIdLst>
-    <p:notesMasterId r:id="rId48"/>
+    <p:notesMasterId r:id="rId49"/>
   </p:notesMasterIdLst>
   <p:sldIdLst>
     <p:sldId id="256" r:id="rId2"/>
@@ -51,9 +51,10 @@
     <p:sldId id="305" r:id="rId42"/>
     <p:sldId id="306" r:id="rId43"/>
     <p:sldId id="309" r:id="rId44"/>
-    <p:sldId id="310" r:id="rId45"/>
-    <p:sldId id="311" r:id="rId46"/>
-    <p:sldId id="279" r:id="rId47"/>
+    <p:sldId id="312" r:id="rId45"/>
+    <p:sldId id="310" r:id="rId46"/>
+    <p:sldId id="311" r:id="rId47"/>
+    <p:sldId id="279" r:id="rId48"/>
   </p:sldIdLst>
   <p:sldSz cx="9144000" cy="5143500" type="screen16x9"/>
   <p:notesSz cx="6858000" cy="9144000"/>
@@ -2629,7 +2630,7 @@
           <a:p>
             <a:fld id="{CC4956B9-647A-4037-9FC9-E7553A40054A}" type="datetimeFigureOut">
               <a:rPr lang="en-US" smtClean="0"/>
-              <a:t>6/28/2026</a:t>
+              <a:t>6/29/2026</a:t>
             </a:fld>
             <a:endParaRPr lang="en-US"/>
           </a:p>
@@ -3024,10 +3025,7 @@
           <a:bodyPr/>
           <a:lstStyle/>
           <a:p>
-            <a:r>
-              <a:rPr lang="en-US" dirty="0"/>
-              <a:t>List the responsibilities of each class, also list what is the coupling between Train and Car.</a:t>
-            </a:r>
+            <a:endParaRPr lang="en-US" dirty="0"/>
           </a:p>
         </p:txBody>
       </p:sp>
@@ -3048,6 +3046,93 @@
           <a:p>
             <a:fld id="{9E5BE8A4-D8EF-4587-8089-654936417D02}" type="slidenum">
               <a:rPr lang="en-US" smtClean="0"/>
+              <a:t>23</a:t>
+            </a:fld>
+            <a:endParaRPr lang="en-US"/>
+          </a:p>
+        </p:txBody>
+      </p:sp>
+    </p:spTree>
+    <p:extLst>
+      <p:ext uri="{BB962C8B-B14F-4D97-AF65-F5344CB8AC3E}">
+        <p14:creationId xmlns:p14="http://schemas.microsoft.com/office/powerpoint/2010/main" val="2317924414"/>
+      </p:ext>
+    </p:extLst>
+  </p:cSld>
+  <p:clrMapOvr>
+    <a:masterClrMapping/>
+  </p:clrMapOvr>
+</p:notes>
+</file>
+
+<file path=ppt/notesSlides/notesSlide11.xml><?xml version="1.0" encoding="utf-8"?>
+<p:notes xmlns:a="http://schemas.openxmlformats.org/drawingml/2006/main" xmlns:r="http://schemas.openxmlformats.org/officeDocument/2006/relationships" xmlns:p="http://schemas.openxmlformats.org/presentationml/2006/main">
+  <p:cSld>
+    <p:spTree>
+      <p:nvGrpSpPr>
+        <p:cNvPr id="1" name=""/>
+        <p:cNvGrpSpPr/>
+        <p:nvPr/>
+      </p:nvGrpSpPr>
+      <p:grpSpPr>
+        <a:xfrm>
+          <a:off x="0" y="0"/>
+          <a:ext cx="0" cy="0"/>
+          <a:chOff x="0" y="0"/>
+          <a:chExt cx="0" cy="0"/>
+        </a:xfrm>
+      </p:grpSpPr>
+      <p:sp>
+        <p:nvSpPr>
+          <p:cNvPr id="2" name="Slide Image Placeholder 1"/>
+          <p:cNvSpPr>
+            <a:spLocks noGrp="1" noRot="1" noChangeAspect="1"/>
+          </p:cNvSpPr>
+          <p:nvPr>
+            <p:ph type="sldImg"/>
+          </p:nvPr>
+        </p:nvSpPr>
+        <p:spPr/>
+      </p:sp>
+      <p:sp>
+        <p:nvSpPr>
+          <p:cNvPr id="3" name="Notes Placeholder 2"/>
+          <p:cNvSpPr>
+            <a:spLocks noGrp="1"/>
+          </p:cNvSpPr>
+          <p:nvPr>
+            <p:ph type="body" idx="1"/>
+          </p:nvPr>
+        </p:nvSpPr>
+        <p:spPr/>
+        <p:txBody>
+          <a:bodyPr/>
+          <a:lstStyle/>
+          <a:p>
+            <a:r>
+              <a:rPr lang="en-US" dirty="0"/>
+              <a:t>List the responsibilities of each class, also list what is the coupling between Train and Car.</a:t>
+            </a:r>
+          </a:p>
+        </p:txBody>
+      </p:sp>
+      <p:sp>
+        <p:nvSpPr>
+          <p:cNvPr id="4" name="Slide Number Placeholder 3"/>
+          <p:cNvSpPr>
+            <a:spLocks noGrp="1"/>
+          </p:cNvSpPr>
+          <p:nvPr>
+            <p:ph type="sldNum" sz="quarter" idx="5"/>
+          </p:nvPr>
+        </p:nvSpPr>
+        <p:spPr/>
+        <p:txBody>
+          <a:bodyPr/>
+          <a:lstStyle/>
+          <a:p>
+            <a:fld id="{9E5BE8A4-D8EF-4587-8089-654936417D02}" type="slidenum">
+              <a:rPr lang="en-US" smtClean="0"/>
               <a:t>28</a:t>
             </a:fld>
             <a:endParaRPr lang="en-US"/>
@@ -3058,6 +3143,90 @@
     <p:extLst>
       <p:ext uri="{BB962C8B-B14F-4D97-AF65-F5344CB8AC3E}">
         <p14:creationId xmlns:p14="http://schemas.microsoft.com/office/powerpoint/2010/main" val="2451443691"/>
+      </p:ext>
+    </p:extLst>
+  </p:cSld>
+  <p:clrMapOvr>
+    <a:masterClrMapping/>
+  </p:clrMapOvr>
+</p:notes>
+</file>
+
+<file path=ppt/notesSlides/notesSlide12.xml><?xml version="1.0" encoding="utf-8"?>
+<p:notes xmlns:a="http://schemas.openxmlformats.org/drawingml/2006/main" xmlns:r="http://schemas.openxmlformats.org/officeDocument/2006/relationships" xmlns:p="http://schemas.openxmlformats.org/presentationml/2006/main">
+  <p:cSld>
+    <p:spTree>
+      <p:nvGrpSpPr>
+        <p:cNvPr id="1" name=""/>
+        <p:cNvGrpSpPr/>
+        <p:nvPr/>
+      </p:nvGrpSpPr>
+      <p:grpSpPr>
+        <a:xfrm>
+          <a:off x="0" y="0"/>
+          <a:ext cx="0" cy="0"/>
+          <a:chOff x="0" y="0"/>
+          <a:chExt cx="0" cy="0"/>
+        </a:xfrm>
+      </p:grpSpPr>
+      <p:sp>
+        <p:nvSpPr>
+          <p:cNvPr id="2" name="Slide Image Placeholder 1"/>
+          <p:cNvSpPr>
+            <a:spLocks noGrp="1" noRot="1" noChangeAspect="1"/>
+          </p:cNvSpPr>
+          <p:nvPr>
+            <p:ph type="sldImg"/>
+          </p:nvPr>
+        </p:nvSpPr>
+        <p:spPr/>
+      </p:sp>
+      <p:sp>
+        <p:nvSpPr>
+          <p:cNvPr id="3" name="Notes Placeholder 2"/>
+          <p:cNvSpPr>
+            <a:spLocks noGrp="1"/>
+          </p:cNvSpPr>
+          <p:nvPr>
+            <p:ph type="body" idx="1"/>
+          </p:nvPr>
+        </p:nvSpPr>
+        <p:spPr/>
+        <p:txBody>
+          <a:bodyPr/>
+          <a:lstStyle/>
+          <a:p>
+            <a:endParaRPr lang="en-US" dirty="0"/>
+          </a:p>
+        </p:txBody>
+      </p:sp>
+      <p:sp>
+        <p:nvSpPr>
+          <p:cNvPr id="4" name="Slide Number Placeholder 3"/>
+          <p:cNvSpPr>
+            <a:spLocks noGrp="1"/>
+          </p:cNvSpPr>
+          <p:nvPr>
+            <p:ph type="sldNum" sz="quarter" idx="5"/>
+          </p:nvPr>
+        </p:nvSpPr>
+        <p:spPr/>
+        <p:txBody>
+          <a:bodyPr/>
+          <a:lstStyle/>
+          <a:p>
+            <a:fld id="{9E5BE8A4-D8EF-4587-8089-654936417D02}" type="slidenum">
+              <a:rPr lang="en-US" smtClean="0"/>
+              <a:t>41</a:t>
+            </a:fld>
+            <a:endParaRPr lang="en-US"/>
+          </a:p>
+        </p:txBody>
+      </p:sp>
+    </p:spTree>
+    <p:extLst>
+      <p:ext uri="{BB962C8B-B14F-4D97-AF65-F5344CB8AC3E}">
+        <p14:creationId xmlns:p14="http://schemas.microsoft.com/office/powerpoint/2010/main" val="2461388293"/>
       </p:ext>
     </p:extLst>
   </p:cSld>
@@ -4074,7 +4243,7 @@
           <a:p>
             <a:fld id="{8F42D1CD-6AB1-4632-BD93-8036A9CEFF23}" type="datetime1">
               <a:rPr lang="en-US" smtClean="0"/>
-              <a:t>6/28/2026</a:t>
+              <a:t>6/29/2026</a:t>
             </a:fld>
             <a:endParaRPr lang="en-US"/>
           </a:p>
@@ -4242,7 +4411,7 @@
           <a:p>
             <a:fld id="{ADE0D227-684F-4C4A-9180-D6AC381CF6A0}" type="datetime1">
               <a:rPr lang="en-US" smtClean="0"/>
-              <a:t>6/28/2026</a:t>
+              <a:t>6/29/2026</a:t>
             </a:fld>
             <a:endParaRPr lang="en-US"/>
           </a:p>
@@ -4420,7 +4589,7 @@
           <a:p>
             <a:fld id="{9188DED5-2788-4AF6-8CD2-D9EF3324F112}" type="datetime1">
               <a:rPr lang="en-US" smtClean="0"/>
-              <a:t>6/28/2026</a:t>
+              <a:t>6/29/2026</a:t>
             </a:fld>
             <a:endParaRPr lang="en-US"/>
           </a:p>
@@ -4588,7 +4757,7 @@
           <a:p>
             <a:fld id="{3D00EA7E-9CA4-48E5-AE0F-8EB3D9C4CEFB}" type="datetime1">
               <a:rPr lang="en-US" smtClean="0"/>
-              <a:t>6/28/2026</a:t>
+              <a:t>6/29/2026</a:t>
             </a:fld>
             <a:endParaRPr lang="en-US"/>
           </a:p>
@@ -4833,7 +5002,7 @@
           <a:p>
             <a:fld id="{F4F74363-77CA-4138-8286-11DFC9A682A9}" type="datetime1">
               <a:rPr lang="en-US" smtClean="0"/>
-              <a:t>6/28/2026</a:t>
+              <a:t>6/29/2026</a:t>
             </a:fld>
             <a:endParaRPr lang="en-US"/>
           </a:p>
@@ -5118,7 +5287,7 @@
           <a:p>
             <a:fld id="{BB3B3468-378A-4E8F-A396-A32E33B2EC7F}" type="datetime1">
               <a:rPr lang="en-US" smtClean="0"/>
-              <a:t>6/28/2026</a:t>
+              <a:t>6/29/2026</a:t>
             </a:fld>
             <a:endParaRPr lang="en-US"/>
           </a:p>
@@ -5537,7 +5706,7 @@
           <a:p>
             <a:fld id="{4910099B-0CB6-4B47-A9FE-5D03141F6A59}" type="datetime1">
               <a:rPr lang="en-US" smtClean="0"/>
-              <a:t>6/28/2026</a:t>
+              <a:t>6/29/2026</a:t>
             </a:fld>
             <a:endParaRPr lang="en-US"/>
           </a:p>
@@ -5654,7 +5823,7 @@
           <a:p>
             <a:fld id="{E4A6B215-2DC8-464E-9BB9-CCDF4BAF4AAD}" type="datetime1">
               <a:rPr lang="en-US" smtClean="0"/>
-              <a:t>6/28/2026</a:t>
+              <a:t>6/29/2026</a:t>
             </a:fld>
             <a:endParaRPr lang="en-US"/>
           </a:p>
@@ -5749,7 +5918,7 @@
           <a:p>
             <a:fld id="{15234634-A279-4D99-8043-05016171F086}" type="datetime1">
               <a:rPr lang="en-US" smtClean="0"/>
-              <a:t>6/28/2026</a:t>
+              <a:t>6/29/2026</a:t>
             </a:fld>
             <a:endParaRPr lang="en-US"/>
           </a:p>
@@ -6024,7 +6193,7 @@
           <a:p>
             <a:fld id="{FEA4EEF5-1E0F-4E32-85A6-DE84C2FE1F72}" type="datetime1">
               <a:rPr lang="en-US" smtClean="0"/>
-              <a:t>6/28/2026</a:t>
+              <a:t>6/29/2026</a:t>
             </a:fld>
             <a:endParaRPr lang="en-US"/>
           </a:p>
@@ -6276,7 +6445,7 @@
           <a:p>
             <a:fld id="{972AC6DC-4DE5-4950-9546-1509DD61DC9D}" type="datetime1">
               <a:rPr lang="en-US" smtClean="0"/>
-              <a:t>6/28/2026</a:t>
+              <a:t>6/29/2026</a:t>
             </a:fld>
             <a:endParaRPr lang="en-US"/>
           </a:p>
@@ -6487,7 +6656,7 @@
           <a:p>
             <a:fld id="{E8540504-DADD-4441-A07E-1EAA97398A05}" type="datetime1">
               <a:rPr lang="en-US" smtClean="0"/>
-              <a:t>6/28/2026</a:t>
+              <a:t>6/29/2026</a:t>
             </a:fld>
             <a:endParaRPr lang="en-US"/>
           </a:p>
@@ -28376,7 +28545,7 @@
                 <a:solidFill>
                   <a:schemeClr val="tx1"/>
                 </a:solidFill>
-                <a:hlinkClick r:id="rId2"/>
+                <a:hlinkClick r:id="rId3"/>
               </a:rPr>
               <a:t>https://github.com/sefop/sefop-python-starter/tree/main/src/domain</a:t>
             </a:r>
@@ -30750,7 +30919,7 @@
         <p:cNvPr id="1" name="">
           <a:extLst>
             <a:ext uri="{FF2B5EF4-FFF2-40B4-BE49-F238E27FC236}">
-              <a16:creationId xmlns:a16="http://schemas.microsoft.com/office/drawing/2014/main" id="{871F3442-8049-F190-FBCC-B826AE14B06B}"/>
+              <a16:creationId xmlns:a16="http://schemas.microsoft.com/office/drawing/2014/main" id="{C0C29714-6E42-3ABE-160E-3976D2D55FEC}"/>
             </a:ext>
           </a:extLst>
         </p:cNvPr>
@@ -30770,7 +30939,7 @@
           <p:cNvPr id="2" name="TextBox 1">
             <a:extLst>
               <a:ext uri="{FF2B5EF4-FFF2-40B4-BE49-F238E27FC236}">
-                <a16:creationId xmlns:a16="http://schemas.microsoft.com/office/drawing/2014/main" id="{1B28A07D-93E2-56CF-7B95-3CDF395F3833}"/>
+                <a16:creationId xmlns:a16="http://schemas.microsoft.com/office/drawing/2014/main" id="{797475B5-8222-14E7-7490-C2CE57A21B0F}"/>
               </a:ext>
             </a:extLst>
           </p:cNvPr>
@@ -30817,7 +30986,7 @@
           <p:cNvPr id="3" name="Rectangle 2">
             <a:extLst>
               <a:ext uri="{FF2B5EF4-FFF2-40B4-BE49-F238E27FC236}">
-                <a16:creationId xmlns:a16="http://schemas.microsoft.com/office/drawing/2014/main" id="{7F44265A-A3E4-8A26-522E-A5E4681CA5FA}"/>
+                <a16:creationId xmlns:a16="http://schemas.microsoft.com/office/drawing/2014/main" id="{0B4594E1-5FE6-04BD-000C-028347EB0D21}"/>
               </a:ext>
             </a:extLst>
           </p:cNvPr>
@@ -30867,6 +31036,1109 @@
           <p:cNvPr id="5" name="Slide Number Placeholder 4">
             <a:extLst>
               <a:ext uri="{FF2B5EF4-FFF2-40B4-BE49-F238E27FC236}">
+                <a16:creationId xmlns:a16="http://schemas.microsoft.com/office/drawing/2014/main" id="{56D19516-393F-60EE-5040-14DCADF89C98}"/>
+              </a:ext>
+            </a:extLst>
+          </p:cNvPr>
+          <p:cNvSpPr>
+            <a:spLocks noGrp="1"/>
+          </p:cNvSpPr>
+          <p:nvPr>
+            <p:ph type="sldNum" sz="quarter" idx="12"/>
+          </p:nvPr>
+        </p:nvSpPr>
+        <p:spPr/>
+        <p:txBody>
+          <a:bodyPr/>
+          <a:lstStyle/>
+          <a:p>
+            <a:fld id="{C1FF6DA9-008F-8B48-92A6-B652298478BF}" type="slidenum">
+              <a:rPr lang="en-US" smtClean="0"/>
+              <a:t>44</a:t>
+            </a:fld>
+            <a:endParaRPr lang="en-US"/>
+          </a:p>
+        </p:txBody>
+      </p:sp>
+      <p:sp>
+        <p:nvSpPr>
+          <p:cNvPr id="6" name="Arrow: Right 5">
+            <a:extLst>
+              <a:ext uri="{FF2B5EF4-FFF2-40B4-BE49-F238E27FC236}">
+                <a16:creationId xmlns:a16="http://schemas.microsoft.com/office/drawing/2014/main" id="{58DFCA9A-ED93-8D14-F245-41BAAC0E0477}"/>
+              </a:ext>
+            </a:extLst>
+          </p:cNvPr>
+          <p:cNvSpPr/>
+          <p:nvPr/>
+        </p:nvSpPr>
+        <p:spPr>
+          <a:xfrm>
+            <a:off x="106680" y="2754630"/>
+            <a:ext cx="8930640" cy="400039"/>
+          </a:xfrm>
+          <a:prstGeom prst="rightArrow">
+            <a:avLst/>
+          </a:prstGeom>
+          <a:solidFill>
+            <a:schemeClr val="tx1"/>
+          </a:solidFill>
+          <a:ln>
+            <a:noFill/>
+          </a:ln>
+        </p:spPr>
+        <p:style>
+          <a:lnRef idx="2">
+            <a:schemeClr val="accent1">
+              <a:shade val="15000"/>
+            </a:schemeClr>
+          </a:lnRef>
+          <a:fillRef idx="1">
+            <a:schemeClr val="accent1"/>
+          </a:fillRef>
+          <a:effectRef idx="0">
+            <a:schemeClr val="accent1"/>
+          </a:effectRef>
+          <a:fontRef idx="minor">
+            <a:schemeClr val="lt1"/>
+          </a:fontRef>
+        </p:style>
+        <p:txBody>
+          <a:bodyPr rtlCol="0" anchor="ctr"/>
+          <a:lstStyle/>
+          <a:p>
+            <a:pPr algn="ctr"/>
+            <a:endParaRPr lang="en-US"/>
+          </a:p>
+        </p:txBody>
+      </p:sp>
+      <p:sp>
+        <p:nvSpPr>
+          <p:cNvPr id="7" name="Rectangle 6">
+            <a:extLst>
+              <a:ext uri="{FF2B5EF4-FFF2-40B4-BE49-F238E27FC236}">
+                <a16:creationId xmlns:a16="http://schemas.microsoft.com/office/drawing/2014/main" id="{7547940E-BDE8-233C-83A1-1028183A1E6D}"/>
+              </a:ext>
+            </a:extLst>
+          </p:cNvPr>
+          <p:cNvSpPr/>
+          <p:nvPr/>
+        </p:nvSpPr>
+        <p:spPr>
+          <a:xfrm>
+            <a:off x="765048" y="1699263"/>
+            <a:ext cx="1645920" cy="2125977"/>
+          </a:xfrm>
+          <a:prstGeom prst="rect">
+            <a:avLst/>
+          </a:prstGeom>
+          <a:solidFill>
+            <a:schemeClr val="bg1">
+              <a:lumMod val="85000"/>
+            </a:schemeClr>
+          </a:solidFill>
+          <a:ln>
+            <a:noFill/>
+          </a:ln>
+          <a:effectLst>
+            <a:outerShdw blurRad="50800" dist="38100" dir="2700000" algn="tl" rotWithShape="0">
+              <a:prstClr val="black">
+                <a:alpha val="40000"/>
+              </a:prstClr>
+            </a:outerShdw>
+          </a:effectLst>
+        </p:spPr>
+        <p:style>
+          <a:lnRef idx="2">
+            <a:schemeClr val="accent1">
+              <a:shade val="15000"/>
+            </a:schemeClr>
+          </a:lnRef>
+          <a:fillRef idx="1">
+            <a:schemeClr val="accent1"/>
+          </a:fillRef>
+          <a:effectRef idx="0">
+            <a:schemeClr val="accent1"/>
+          </a:effectRef>
+          <a:fontRef idx="minor">
+            <a:schemeClr val="lt1"/>
+          </a:fontRef>
+        </p:style>
+        <p:txBody>
+          <a:bodyPr rtlCol="0" anchor="t"/>
+          <a:lstStyle/>
+          <a:p>
+            <a:pPr algn="ctr"/>
+            <a:r>
+              <a:rPr lang="en-US" sz="1600" b="1" dirty="0">
+                <a:solidFill>
+                  <a:schemeClr val="tx1"/>
+                </a:solidFill>
+              </a:rPr>
+              <a:t>Data loading</a:t>
+            </a:r>
+          </a:p>
+          <a:p>
+            <a:pPr algn="ctr"/>
+            <a:endParaRPr lang="en-US" sz="1600" b="1" dirty="0">
+              <a:solidFill>
+                <a:schemeClr val="tx1"/>
+              </a:solidFill>
+            </a:endParaRPr>
+          </a:p>
+          <a:p>
+            <a:pPr marL="171450" indent="-171450">
+              <a:buFont typeface="Arial" panose="020B0604020202020204" pitchFamily="34" charset="0"/>
+              <a:buChar char="•"/>
+            </a:pPr>
+            <a:r>
+              <a:rPr lang="en-US" sz="1200" dirty="0">
+                <a:solidFill>
+                  <a:schemeClr val="tx1"/>
+                </a:solidFill>
+              </a:rPr>
+              <a:t>Reads input data from different sources</a:t>
+            </a:r>
+          </a:p>
+          <a:p>
+            <a:pPr marL="171450" indent="-171450">
+              <a:buFont typeface="Arial" panose="020B0604020202020204" pitchFamily="34" charset="0"/>
+              <a:buChar char="•"/>
+            </a:pPr>
+            <a:endParaRPr lang="en-US" sz="1200" dirty="0">
+              <a:solidFill>
+                <a:schemeClr val="tx1"/>
+              </a:solidFill>
+            </a:endParaRPr>
+          </a:p>
+          <a:p>
+            <a:pPr marL="171450" indent="-171450">
+              <a:buFont typeface="Arial" panose="020B0604020202020204" pitchFamily="34" charset="0"/>
+              <a:buChar char="•"/>
+            </a:pPr>
+            <a:r>
+              <a:rPr lang="en-US" sz="1200" dirty="0">
+                <a:solidFill>
+                  <a:schemeClr val="tx1"/>
+                </a:solidFill>
+              </a:rPr>
+              <a:t>Uses a Data Model to abstract the sources.</a:t>
+            </a:r>
+          </a:p>
+          <a:p>
+            <a:endParaRPr lang="en-US" sz="1200" dirty="0">
+              <a:solidFill>
+                <a:schemeClr val="tx1"/>
+              </a:solidFill>
+            </a:endParaRPr>
+          </a:p>
+        </p:txBody>
+      </p:sp>
+      <p:sp>
+        <p:nvSpPr>
+          <p:cNvPr id="9" name="Rectangle 8">
+            <a:extLst>
+              <a:ext uri="{FF2B5EF4-FFF2-40B4-BE49-F238E27FC236}">
+                <a16:creationId xmlns:a16="http://schemas.microsoft.com/office/drawing/2014/main" id="{B3BCE7E4-AEAC-BFA1-3193-CF53C5CBAF59}"/>
+              </a:ext>
+            </a:extLst>
+          </p:cNvPr>
+          <p:cNvSpPr/>
+          <p:nvPr/>
+        </p:nvSpPr>
+        <p:spPr>
+          <a:xfrm>
+            <a:off x="2596134" y="1699263"/>
+            <a:ext cx="1645920" cy="2125977"/>
+          </a:xfrm>
+          <a:prstGeom prst="rect">
+            <a:avLst/>
+          </a:prstGeom>
+          <a:solidFill>
+            <a:schemeClr val="bg1">
+              <a:lumMod val="85000"/>
+            </a:schemeClr>
+          </a:solidFill>
+          <a:ln>
+            <a:noFill/>
+          </a:ln>
+          <a:effectLst>
+            <a:outerShdw blurRad="50800" dist="38100" dir="2700000" algn="tl" rotWithShape="0">
+              <a:prstClr val="black">
+                <a:alpha val="40000"/>
+              </a:prstClr>
+            </a:outerShdw>
+          </a:effectLst>
+        </p:spPr>
+        <p:style>
+          <a:lnRef idx="2">
+            <a:schemeClr val="accent1">
+              <a:shade val="15000"/>
+            </a:schemeClr>
+          </a:lnRef>
+          <a:fillRef idx="1">
+            <a:schemeClr val="accent1"/>
+          </a:fillRef>
+          <a:effectRef idx="0">
+            <a:schemeClr val="accent1"/>
+          </a:effectRef>
+          <a:fontRef idx="minor">
+            <a:schemeClr val="lt1"/>
+          </a:fontRef>
+        </p:style>
+        <p:txBody>
+          <a:bodyPr rtlCol="0" anchor="t"/>
+          <a:lstStyle/>
+          <a:p>
+            <a:pPr algn="ctr"/>
+            <a:r>
+              <a:rPr lang="en-US" sz="1600" b="1" dirty="0">
+                <a:solidFill>
+                  <a:schemeClr val="tx1"/>
+                </a:solidFill>
+              </a:rPr>
+              <a:t>Preprocessing</a:t>
+            </a:r>
+          </a:p>
+          <a:p>
+            <a:pPr algn="ctr"/>
+            <a:endParaRPr lang="en-US" sz="1600" b="1" dirty="0">
+              <a:solidFill>
+                <a:schemeClr val="tx1"/>
+              </a:solidFill>
+            </a:endParaRPr>
+          </a:p>
+          <a:p>
+            <a:pPr marL="171450" indent="-171450">
+              <a:buFont typeface="Arial" panose="020B0604020202020204" pitchFamily="34" charset="0"/>
+              <a:buChar char="•"/>
+            </a:pPr>
+            <a:r>
+              <a:rPr lang="en-US" sz="1200" dirty="0">
+                <a:solidFill>
+                  <a:schemeClr val="tx1"/>
+                </a:solidFill>
+              </a:rPr>
+              <a:t>Validation</a:t>
+            </a:r>
+          </a:p>
+          <a:p>
+            <a:pPr marL="171450" indent="-171450">
+              <a:buFont typeface="Arial" panose="020B0604020202020204" pitchFamily="34" charset="0"/>
+              <a:buChar char="•"/>
+            </a:pPr>
+            <a:endParaRPr lang="en-US" sz="1200" dirty="0">
+              <a:solidFill>
+                <a:schemeClr val="tx1"/>
+              </a:solidFill>
+            </a:endParaRPr>
+          </a:p>
+          <a:p>
+            <a:pPr marL="171450" indent="-171450">
+              <a:buFont typeface="Arial" panose="020B0604020202020204" pitchFamily="34" charset="0"/>
+              <a:buChar char="•"/>
+            </a:pPr>
+            <a:r>
+              <a:rPr lang="en-US" sz="1200" dirty="0">
+                <a:solidFill>
+                  <a:schemeClr val="tx1"/>
+                </a:solidFill>
+              </a:rPr>
+              <a:t>Data cleaning</a:t>
+            </a:r>
+          </a:p>
+          <a:p>
+            <a:pPr marL="171450" indent="-171450">
+              <a:buFont typeface="Arial" panose="020B0604020202020204" pitchFamily="34" charset="0"/>
+              <a:buChar char="•"/>
+            </a:pPr>
+            <a:endParaRPr lang="en-US" sz="1200" dirty="0">
+              <a:solidFill>
+                <a:schemeClr val="tx1"/>
+              </a:solidFill>
+            </a:endParaRPr>
+          </a:p>
+          <a:p>
+            <a:pPr marL="171450" indent="-171450">
+              <a:buFont typeface="Arial" panose="020B0604020202020204" pitchFamily="34" charset="0"/>
+              <a:buChar char="•"/>
+            </a:pPr>
+            <a:r>
+              <a:rPr lang="en-US" sz="1200" dirty="0">
+                <a:solidFill>
+                  <a:schemeClr val="tx1"/>
+                </a:solidFill>
+              </a:rPr>
+              <a:t>Data transformation</a:t>
+            </a:r>
+            <a:endParaRPr lang="en-US" sz="1100" dirty="0">
+              <a:solidFill>
+                <a:schemeClr val="tx1"/>
+              </a:solidFill>
+            </a:endParaRPr>
+          </a:p>
+        </p:txBody>
+      </p:sp>
+      <p:sp>
+        <p:nvSpPr>
+          <p:cNvPr id="11" name="Rectangle 10">
+            <a:extLst>
+              <a:ext uri="{FF2B5EF4-FFF2-40B4-BE49-F238E27FC236}">
+                <a16:creationId xmlns:a16="http://schemas.microsoft.com/office/drawing/2014/main" id="{C1B39829-64AC-7AFD-7EA9-8EA677A88A57}"/>
+              </a:ext>
+            </a:extLst>
+          </p:cNvPr>
+          <p:cNvSpPr/>
+          <p:nvPr/>
+        </p:nvSpPr>
+        <p:spPr>
+          <a:xfrm>
+            <a:off x="4427220" y="1699263"/>
+            <a:ext cx="1645920" cy="2125977"/>
+          </a:xfrm>
+          <a:prstGeom prst="rect">
+            <a:avLst/>
+          </a:prstGeom>
+          <a:solidFill>
+            <a:schemeClr val="bg1">
+              <a:lumMod val="85000"/>
+            </a:schemeClr>
+          </a:solidFill>
+          <a:ln>
+            <a:noFill/>
+          </a:ln>
+          <a:effectLst>
+            <a:outerShdw blurRad="50800" dist="38100" dir="2700000" algn="tl" rotWithShape="0">
+              <a:prstClr val="black">
+                <a:alpha val="40000"/>
+              </a:prstClr>
+            </a:outerShdw>
+          </a:effectLst>
+        </p:spPr>
+        <p:style>
+          <a:lnRef idx="2">
+            <a:schemeClr val="accent1">
+              <a:shade val="15000"/>
+            </a:schemeClr>
+          </a:lnRef>
+          <a:fillRef idx="1">
+            <a:schemeClr val="accent1"/>
+          </a:fillRef>
+          <a:effectRef idx="0">
+            <a:schemeClr val="accent1"/>
+          </a:effectRef>
+          <a:fontRef idx="minor">
+            <a:schemeClr val="lt1"/>
+          </a:fontRef>
+        </p:style>
+        <p:txBody>
+          <a:bodyPr rtlCol="0" anchor="t"/>
+          <a:lstStyle/>
+          <a:p>
+            <a:pPr algn="ctr"/>
+            <a:r>
+              <a:rPr lang="en-US" sz="1600" b="1" dirty="0">
+                <a:solidFill>
+                  <a:schemeClr val="tx1"/>
+                </a:solidFill>
+              </a:rPr>
+              <a:t>Optimization</a:t>
+            </a:r>
+          </a:p>
+          <a:p>
+            <a:pPr algn="ctr"/>
+            <a:endParaRPr lang="en-US" sz="1600" b="1" dirty="0">
+              <a:solidFill>
+                <a:schemeClr val="tx1"/>
+              </a:solidFill>
+            </a:endParaRPr>
+          </a:p>
+          <a:p>
+            <a:pPr marL="171450" indent="-171450">
+              <a:buFont typeface="Arial" panose="020B0604020202020204" pitchFamily="34" charset="0"/>
+              <a:buChar char="•"/>
+            </a:pPr>
+            <a:r>
+              <a:rPr lang="en-US" sz="1200" dirty="0">
+                <a:solidFill>
+                  <a:schemeClr val="tx1"/>
+                </a:solidFill>
+              </a:rPr>
+              <a:t>Build</a:t>
+            </a:r>
+          </a:p>
+          <a:p>
+            <a:pPr marL="171450" indent="-171450">
+              <a:buFont typeface="Arial" panose="020B0604020202020204" pitchFamily="34" charset="0"/>
+              <a:buChar char="•"/>
+            </a:pPr>
+            <a:endParaRPr lang="en-US" sz="1200" dirty="0">
+              <a:solidFill>
+                <a:schemeClr val="tx1"/>
+              </a:solidFill>
+            </a:endParaRPr>
+          </a:p>
+          <a:p>
+            <a:pPr marL="171450" indent="-171450">
+              <a:buFont typeface="Arial" panose="020B0604020202020204" pitchFamily="34" charset="0"/>
+              <a:buChar char="•"/>
+            </a:pPr>
+            <a:r>
+              <a:rPr lang="en-US" sz="1200" dirty="0">
+                <a:solidFill>
+                  <a:schemeClr val="tx1"/>
+                </a:solidFill>
+              </a:rPr>
+              <a:t>Solve</a:t>
+            </a:r>
+            <a:endParaRPr lang="en-US" sz="1100" dirty="0">
+              <a:solidFill>
+                <a:schemeClr val="tx1"/>
+              </a:solidFill>
+            </a:endParaRPr>
+          </a:p>
+        </p:txBody>
+      </p:sp>
+      <p:sp>
+        <p:nvSpPr>
+          <p:cNvPr id="12" name="Rectangle 11">
+            <a:extLst>
+              <a:ext uri="{FF2B5EF4-FFF2-40B4-BE49-F238E27FC236}">
+                <a16:creationId xmlns:a16="http://schemas.microsoft.com/office/drawing/2014/main" id="{BB249E55-4C54-A197-2691-E2A8286431A6}"/>
+              </a:ext>
+            </a:extLst>
+          </p:cNvPr>
+          <p:cNvSpPr/>
+          <p:nvPr/>
+        </p:nvSpPr>
+        <p:spPr>
+          <a:xfrm>
+            <a:off x="6258306" y="1699263"/>
+            <a:ext cx="1645920" cy="2125977"/>
+          </a:xfrm>
+          <a:prstGeom prst="rect">
+            <a:avLst/>
+          </a:prstGeom>
+          <a:solidFill>
+            <a:schemeClr val="bg1">
+              <a:lumMod val="85000"/>
+            </a:schemeClr>
+          </a:solidFill>
+          <a:ln>
+            <a:noFill/>
+          </a:ln>
+          <a:effectLst>
+            <a:outerShdw blurRad="50800" dist="38100" dir="2700000" algn="tl" rotWithShape="0">
+              <a:prstClr val="black">
+                <a:alpha val="40000"/>
+              </a:prstClr>
+            </a:outerShdw>
+          </a:effectLst>
+        </p:spPr>
+        <p:style>
+          <a:lnRef idx="2">
+            <a:schemeClr val="accent1">
+              <a:shade val="15000"/>
+            </a:schemeClr>
+          </a:lnRef>
+          <a:fillRef idx="1">
+            <a:schemeClr val="accent1"/>
+          </a:fillRef>
+          <a:effectRef idx="0">
+            <a:schemeClr val="accent1"/>
+          </a:effectRef>
+          <a:fontRef idx="minor">
+            <a:schemeClr val="lt1"/>
+          </a:fontRef>
+        </p:style>
+        <p:txBody>
+          <a:bodyPr rtlCol="0" anchor="t"/>
+          <a:lstStyle/>
+          <a:p>
+            <a:pPr algn="ctr"/>
+            <a:r>
+              <a:rPr lang="en-US" sz="1600" b="1" dirty="0">
+                <a:solidFill>
+                  <a:schemeClr val="tx1"/>
+                </a:solidFill>
+              </a:rPr>
+              <a:t>Postprocessing</a:t>
+            </a:r>
+          </a:p>
+          <a:p>
+            <a:pPr algn="ctr"/>
+            <a:endParaRPr lang="en-US" sz="1600" b="1" dirty="0">
+              <a:solidFill>
+                <a:schemeClr val="tx1"/>
+              </a:solidFill>
+            </a:endParaRPr>
+          </a:p>
+          <a:p>
+            <a:pPr marL="171450" indent="-171450">
+              <a:buFont typeface="Arial" panose="020B0604020202020204" pitchFamily="34" charset="0"/>
+              <a:buChar char="•"/>
+            </a:pPr>
+            <a:r>
+              <a:rPr lang="en-US" sz="1200" dirty="0">
+                <a:solidFill>
+                  <a:schemeClr val="tx1"/>
+                </a:solidFill>
+              </a:rPr>
+              <a:t>Filter solutions to be sent to the user</a:t>
+            </a:r>
+          </a:p>
+          <a:p>
+            <a:pPr marL="171450" indent="-171450">
+              <a:buFont typeface="Arial" panose="020B0604020202020204" pitchFamily="34" charset="0"/>
+              <a:buChar char="•"/>
+            </a:pPr>
+            <a:endParaRPr lang="en-US" sz="1200" dirty="0">
+              <a:solidFill>
+                <a:schemeClr val="tx1"/>
+              </a:solidFill>
+            </a:endParaRPr>
+          </a:p>
+          <a:p>
+            <a:endParaRPr lang="en-US" sz="1200" dirty="0">
+              <a:solidFill>
+                <a:schemeClr val="tx1"/>
+              </a:solidFill>
+            </a:endParaRPr>
+          </a:p>
+          <a:p>
+            <a:pPr marL="171450" indent="-171450">
+              <a:buFont typeface="Arial" panose="020B0604020202020204" pitchFamily="34" charset="0"/>
+              <a:buChar char="•"/>
+            </a:pPr>
+            <a:r>
+              <a:rPr lang="en-US" sz="1200" dirty="0">
+                <a:solidFill>
+                  <a:schemeClr val="tx1"/>
+                </a:solidFill>
+              </a:rPr>
+              <a:t>Transform solution to business representation</a:t>
+            </a:r>
+          </a:p>
+          <a:p>
+            <a:pPr marL="171450" indent="-171450">
+              <a:buFont typeface="Arial" panose="020B0604020202020204" pitchFamily="34" charset="0"/>
+              <a:buChar char="•"/>
+            </a:pPr>
+            <a:endParaRPr lang="en-US" sz="1200" dirty="0">
+              <a:solidFill>
+                <a:schemeClr val="tx1"/>
+              </a:solidFill>
+            </a:endParaRPr>
+          </a:p>
+          <a:p>
+            <a:pPr marL="171450" indent="-171450">
+              <a:buFont typeface="Arial" panose="020B0604020202020204" pitchFamily="34" charset="0"/>
+              <a:buChar char="•"/>
+            </a:pPr>
+            <a:endParaRPr lang="en-US" sz="1100" dirty="0">
+              <a:solidFill>
+                <a:schemeClr val="tx1"/>
+              </a:solidFill>
+            </a:endParaRPr>
+          </a:p>
+        </p:txBody>
+      </p:sp>
+      <p:sp>
+        <p:nvSpPr>
+          <p:cNvPr id="13" name="TextBox 12">
+            <a:extLst>
+              <a:ext uri="{FF2B5EF4-FFF2-40B4-BE49-F238E27FC236}">
+                <a16:creationId xmlns:a16="http://schemas.microsoft.com/office/drawing/2014/main" id="{4E45E317-D513-3400-ACFC-05636E98007F}"/>
+              </a:ext>
+            </a:extLst>
+          </p:cNvPr>
+          <p:cNvSpPr txBox="1"/>
+          <p:nvPr/>
+        </p:nvSpPr>
+        <p:spPr>
+          <a:xfrm>
+            <a:off x="53957" y="2347829"/>
+            <a:ext cx="660181" cy="461665"/>
+          </a:xfrm>
+          <a:prstGeom prst="rect">
+            <a:avLst/>
+          </a:prstGeom>
+          <a:noFill/>
+        </p:spPr>
+        <p:txBody>
+          <a:bodyPr wrap="none" rtlCol="0">
+            <a:spAutoFit/>
+          </a:bodyPr>
+          <a:lstStyle/>
+          <a:p>
+            <a:pPr algn="ctr"/>
+            <a:r>
+              <a:rPr lang="en-US" sz="1200" dirty="0"/>
+              <a:t>User</a:t>
+            </a:r>
+          </a:p>
+          <a:p>
+            <a:pPr algn="ctr"/>
+            <a:r>
+              <a:rPr lang="en-US" sz="1200" dirty="0"/>
+              <a:t>request</a:t>
+            </a:r>
+          </a:p>
+        </p:txBody>
+      </p:sp>
+      <p:sp>
+        <p:nvSpPr>
+          <p:cNvPr id="14" name="TextBox 13">
+            <a:extLst>
+              <a:ext uri="{FF2B5EF4-FFF2-40B4-BE49-F238E27FC236}">
+                <a16:creationId xmlns:a16="http://schemas.microsoft.com/office/drawing/2014/main" id="{0DB40E61-0C36-5CA9-A2F8-A0D65455F0FD}"/>
+              </a:ext>
+            </a:extLst>
+          </p:cNvPr>
+          <p:cNvSpPr txBox="1"/>
+          <p:nvPr/>
+        </p:nvSpPr>
+        <p:spPr>
+          <a:xfrm>
+            <a:off x="7904226" y="2284699"/>
+            <a:ext cx="1263551" cy="461665"/>
+          </a:xfrm>
+          <a:prstGeom prst="rect">
+            <a:avLst/>
+          </a:prstGeom>
+          <a:noFill/>
+        </p:spPr>
+        <p:txBody>
+          <a:bodyPr wrap="none" rtlCol="0">
+            <a:spAutoFit/>
+          </a:bodyPr>
+          <a:lstStyle/>
+          <a:p>
+            <a:pPr algn="ctr"/>
+            <a:r>
+              <a:rPr lang="en-US" sz="1200" dirty="0"/>
+              <a:t>Business</a:t>
+            </a:r>
+          </a:p>
+          <a:p>
+            <a:pPr algn="ctr"/>
+            <a:r>
+              <a:rPr lang="en-US" sz="1200" dirty="0"/>
+              <a:t>recommendation</a:t>
+            </a:r>
+          </a:p>
+        </p:txBody>
+      </p:sp>
+      <p:sp>
+        <p:nvSpPr>
+          <p:cNvPr id="16" name="Text 3">
+            <a:extLst>
+              <a:ext uri="{FF2B5EF4-FFF2-40B4-BE49-F238E27FC236}">
+                <a16:creationId xmlns:a16="http://schemas.microsoft.com/office/drawing/2014/main" id="{E1AA4F59-A4E5-BED7-C5A9-55E14A42A5F6}"/>
+              </a:ext>
+            </a:extLst>
+          </p:cNvPr>
+          <p:cNvSpPr/>
+          <p:nvPr/>
+        </p:nvSpPr>
+        <p:spPr>
+          <a:xfrm>
+            <a:off x="384047" y="1085059"/>
+            <a:ext cx="8229600" cy="320040"/>
+          </a:xfrm>
+          <a:prstGeom prst="rect">
+            <a:avLst/>
+          </a:prstGeom>
+          <a:noFill/>
+          <a:ln/>
+        </p:spPr>
+        <p:txBody>
+          <a:bodyPr wrap="square" lIns="0" tIns="0" rIns="0" bIns="0" rtlCol="0" anchor="ctr"/>
+          <a:lstStyle/>
+          <a:p>
+            <a:pPr marL="0" indent="0">
+              <a:buNone/>
+            </a:pPr>
+            <a:r>
+              <a:rPr lang="en-US" sz="1300" i="1" dirty="0">
+                <a:solidFill>
+                  <a:srgbClr val="718096"/>
+                </a:solidFill>
+                <a:latin typeface="Calibri" pitchFamily="34" charset="0"/>
+                <a:ea typeface="Calibri" pitchFamily="34" charset="-122"/>
+                <a:cs typeface="Calibri" pitchFamily="34" charset="-120"/>
+              </a:rPr>
+              <a:t>Typical 4 phases of an optimization request</a:t>
+            </a:r>
+            <a:endParaRPr lang="en-US" sz="1300" dirty="0"/>
+          </a:p>
+        </p:txBody>
+      </p:sp>
+      <p:sp>
+        <p:nvSpPr>
+          <p:cNvPr id="17" name="Text 3">
+            <a:extLst>
+              <a:ext uri="{FF2B5EF4-FFF2-40B4-BE49-F238E27FC236}">
+                <a16:creationId xmlns:a16="http://schemas.microsoft.com/office/drawing/2014/main" id="{78C4E990-A68F-A831-0339-38785054DC7B}"/>
+              </a:ext>
+            </a:extLst>
+          </p:cNvPr>
+          <p:cNvSpPr/>
+          <p:nvPr/>
+        </p:nvSpPr>
+        <p:spPr>
+          <a:xfrm>
+            <a:off x="608768" y="4169288"/>
+            <a:ext cx="7936716" cy="565056"/>
+          </a:xfrm>
+          <a:prstGeom prst="rect">
+            <a:avLst/>
+          </a:prstGeom>
+          <a:noFill/>
+          <a:ln/>
+        </p:spPr>
+        <p:txBody>
+          <a:bodyPr wrap="square" lIns="0" tIns="0" rIns="0" bIns="0" rtlCol="0" anchor="ctr"/>
+          <a:lstStyle/>
+          <a:p>
+            <a:r>
+              <a:rPr lang="en-US" sz="1400" dirty="0">
+                <a:latin typeface="Calibri" pitchFamily="34" charset="0"/>
+                <a:ea typeface="Calibri" pitchFamily="34" charset="-122"/>
+                <a:cs typeface="Calibri" pitchFamily="34" charset="-120"/>
+              </a:rPr>
+              <a:t>✅ Separation of concerns    	✅ Testable modules	    ✅ Simple interfaces 	       ✅ Solver agnostic</a:t>
+            </a:r>
+            <a:endParaRPr lang="en-US" sz="1400" dirty="0"/>
+          </a:p>
+        </p:txBody>
+      </p:sp>
+      <p:sp>
+        <p:nvSpPr>
+          <p:cNvPr id="4" name="Speech Bubble: Rectangle 3">
+            <a:extLst>
+              <a:ext uri="{FF2B5EF4-FFF2-40B4-BE49-F238E27FC236}">
+                <a16:creationId xmlns:a16="http://schemas.microsoft.com/office/drawing/2014/main" id="{2AA561AD-EA3C-AB2E-3175-48CFE6AC2127}"/>
+              </a:ext>
+            </a:extLst>
+          </p:cNvPr>
+          <p:cNvSpPr/>
+          <p:nvPr/>
+        </p:nvSpPr>
+        <p:spPr>
+          <a:xfrm>
+            <a:off x="384047" y="1091766"/>
+            <a:ext cx="3882771" cy="3340970"/>
+          </a:xfrm>
+          <a:prstGeom prst="wedgeRectCallout">
+            <a:avLst>
+              <a:gd name="adj1" fmla="val 57527"/>
+              <a:gd name="adj2" fmla="val -24882"/>
+            </a:avLst>
+          </a:prstGeom>
+          <a:solidFill>
+            <a:schemeClr val="accent6">
+              <a:lumMod val="20000"/>
+              <a:lumOff val="80000"/>
+            </a:schemeClr>
+          </a:solidFill>
+          <a:ln w="12700">
+            <a:solidFill>
+              <a:schemeClr val="tx1">
+                <a:lumMod val="85000"/>
+                <a:lumOff val="15000"/>
+              </a:schemeClr>
+            </a:solidFill>
+          </a:ln>
+        </p:spPr>
+        <p:style>
+          <a:lnRef idx="2">
+            <a:schemeClr val="accent1">
+              <a:shade val="15000"/>
+            </a:schemeClr>
+          </a:lnRef>
+          <a:fillRef idx="1">
+            <a:schemeClr val="accent1"/>
+          </a:fillRef>
+          <a:effectRef idx="0">
+            <a:schemeClr val="accent1"/>
+          </a:effectRef>
+          <a:fontRef idx="minor">
+            <a:schemeClr val="lt1"/>
+          </a:fontRef>
+        </p:style>
+        <p:txBody>
+          <a:bodyPr rtlCol="0" anchor="t"/>
+          <a:lstStyle/>
+          <a:p>
+            <a:r>
+              <a:rPr lang="en-US" sz="1600" dirty="0">
+                <a:solidFill>
+                  <a:schemeClr val="tx1"/>
+                </a:solidFill>
+              </a:rPr>
+              <a:t>To provide </a:t>
+            </a:r>
+            <a:r>
+              <a:rPr lang="en-US" sz="1600" b="1" dirty="0">
+                <a:solidFill>
+                  <a:schemeClr val="tx1"/>
+                </a:solidFill>
+              </a:rPr>
+              <a:t>testability</a:t>
+            </a:r>
+            <a:r>
+              <a:rPr lang="en-US" sz="1600" dirty="0">
+                <a:solidFill>
+                  <a:schemeClr val="tx1"/>
+                </a:solidFill>
+              </a:rPr>
+              <a:t> to the optimization module:</a:t>
+            </a:r>
+          </a:p>
+          <a:p>
+            <a:endParaRPr lang="en-US" sz="1600" dirty="0">
+              <a:solidFill>
+                <a:schemeClr val="tx1"/>
+              </a:solidFill>
+            </a:endParaRPr>
+          </a:p>
+          <a:p>
+            <a:pPr marL="285750" indent="-285750">
+              <a:buFont typeface="Arial" panose="020B0604020202020204" pitchFamily="34" charset="0"/>
+              <a:buChar char="•"/>
+            </a:pPr>
+            <a:r>
+              <a:rPr lang="en-US" sz="1600" dirty="0">
+                <a:solidFill>
+                  <a:schemeClr val="tx1"/>
+                </a:solidFill>
+              </a:rPr>
+              <a:t>Separate the build phase from the solve phase.</a:t>
+            </a:r>
+          </a:p>
+          <a:p>
+            <a:pPr marL="285750" indent="-285750">
+              <a:buFont typeface="Arial" panose="020B0604020202020204" pitchFamily="34" charset="0"/>
+              <a:buChar char="•"/>
+            </a:pPr>
+            <a:endParaRPr lang="en-US" sz="1600" dirty="0">
+              <a:solidFill>
+                <a:schemeClr val="tx1"/>
+              </a:solidFill>
+            </a:endParaRPr>
+          </a:p>
+          <a:p>
+            <a:pPr marL="285750" indent="-285750">
+              <a:buFont typeface="Arial" panose="020B0604020202020204" pitchFamily="34" charset="0"/>
+              <a:buChar char="•"/>
+            </a:pPr>
+            <a:r>
+              <a:rPr lang="en-US" sz="1600" dirty="0">
+                <a:solidFill>
+                  <a:schemeClr val="tx1"/>
+                </a:solidFill>
+              </a:rPr>
+              <a:t>The build phase: outputs a model formulation (100% deterministic and testable).</a:t>
+            </a:r>
+          </a:p>
+          <a:p>
+            <a:pPr marL="285750" indent="-285750">
+              <a:buFont typeface="Arial" panose="020B0604020202020204" pitchFamily="34" charset="0"/>
+              <a:buChar char="•"/>
+            </a:pPr>
+            <a:endParaRPr lang="en-US" sz="1600" dirty="0">
+              <a:solidFill>
+                <a:schemeClr val="tx1"/>
+              </a:solidFill>
+            </a:endParaRPr>
+          </a:p>
+          <a:p>
+            <a:pPr marL="285750" indent="-285750">
+              <a:buFont typeface="Arial" panose="020B0604020202020204" pitchFamily="34" charset="0"/>
+              <a:buChar char="•"/>
+            </a:pPr>
+            <a:r>
+              <a:rPr lang="en-US" sz="1600" dirty="0">
+                <a:solidFill>
+                  <a:schemeClr val="tx1"/>
+                </a:solidFill>
+              </a:rPr>
+              <a:t>The solve phase: calls a solver (</a:t>
+            </a:r>
+            <a:r>
+              <a:rPr lang="en-US" sz="1600" dirty="0" err="1">
+                <a:solidFill>
+                  <a:schemeClr val="tx1"/>
+                </a:solidFill>
+              </a:rPr>
+              <a:t>gurobi</a:t>
+            </a:r>
+            <a:r>
+              <a:rPr lang="en-US" sz="1600" dirty="0">
+                <a:solidFill>
+                  <a:schemeClr val="tx1"/>
+                </a:solidFill>
+              </a:rPr>
+              <a:t>, </a:t>
+            </a:r>
+            <a:r>
+              <a:rPr lang="en-US" sz="1600" dirty="0" err="1">
+                <a:solidFill>
+                  <a:schemeClr val="tx1"/>
+                </a:solidFill>
+              </a:rPr>
+              <a:t>xpress</a:t>
+            </a:r>
+            <a:r>
+              <a:rPr lang="en-US" sz="1600" dirty="0">
+                <a:solidFill>
+                  <a:schemeClr val="tx1"/>
+                </a:solidFill>
+              </a:rPr>
+              <a:t>, other) and outputs a solution.</a:t>
+            </a:r>
+          </a:p>
+        </p:txBody>
+      </p:sp>
+    </p:spTree>
+    <p:extLst>
+      <p:ext uri="{BB962C8B-B14F-4D97-AF65-F5344CB8AC3E}">
+        <p14:creationId xmlns:p14="http://schemas.microsoft.com/office/powerpoint/2010/main" val="1802319223"/>
+      </p:ext>
+    </p:extLst>
+  </p:cSld>
+  <p:clrMapOvr>
+    <a:masterClrMapping/>
+  </p:clrMapOvr>
+</p:sld>
+</file>
+
+<file path=ppt/slides/slide45.xml><?xml version="1.0" encoding="utf-8"?>
+<p:sld xmlns:a="http://schemas.openxmlformats.org/drawingml/2006/main" xmlns:r="http://schemas.openxmlformats.org/officeDocument/2006/relationships" xmlns:p="http://schemas.openxmlformats.org/presentationml/2006/main">
+  <p:cSld>
+    <p:spTree>
+      <p:nvGrpSpPr>
+        <p:cNvPr id="1" name="">
+          <a:extLst>
+            <a:ext uri="{FF2B5EF4-FFF2-40B4-BE49-F238E27FC236}">
+              <a16:creationId xmlns:a16="http://schemas.microsoft.com/office/drawing/2014/main" id="{871F3442-8049-F190-FBCC-B826AE14B06B}"/>
+            </a:ext>
+          </a:extLst>
+        </p:cNvPr>
+        <p:cNvGrpSpPr/>
+        <p:nvPr/>
+      </p:nvGrpSpPr>
+      <p:grpSpPr>
+        <a:xfrm>
+          <a:off x="0" y="0"/>
+          <a:ext cx="0" cy="0"/>
+          <a:chOff x="0" y="0"/>
+          <a:chExt cx="0" cy="0"/>
+        </a:xfrm>
+      </p:grpSpPr>
+      <p:sp>
+        <p:nvSpPr>
+          <p:cNvPr id="2" name="TextBox 1">
+            <a:extLst>
+              <a:ext uri="{FF2B5EF4-FFF2-40B4-BE49-F238E27FC236}">
+                <a16:creationId xmlns:a16="http://schemas.microsoft.com/office/drawing/2014/main" id="{1B28A07D-93E2-56CF-7B95-3CDF395F3833}"/>
+              </a:ext>
+            </a:extLst>
+          </p:cNvPr>
+          <p:cNvSpPr txBox="1"/>
+          <p:nvPr/>
+        </p:nvSpPr>
+        <p:spPr>
+          <a:xfrm>
+            <a:off x="457200" y="274320"/>
+            <a:ext cx="8229600" cy="553998"/>
+          </a:xfrm>
+          <a:prstGeom prst="rect">
+            <a:avLst/>
+          </a:prstGeom>
+          <a:noFill/>
+        </p:spPr>
+        <p:txBody>
+          <a:bodyPr wrap="square">
+            <a:spAutoFit/>
+          </a:bodyPr>
+          <a:lstStyle/>
+          <a:p>
+            <a:pPr algn="l"/>
+            <a:r>
+              <a:rPr lang="en-US" sz="3000" b="1" i="0" dirty="0">
+                <a:solidFill>
+                  <a:srgbClr val="0A1628"/>
+                </a:solidFill>
+                <a:latin typeface="Calibri"/>
+              </a:rPr>
+              <a:t>Overview of SEFOP design</a:t>
+            </a:r>
+            <a:endParaRPr sz="3000" b="1" i="0" dirty="0">
+              <a:solidFill>
+                <a:srgbClr val="0A1628"/>
+              </a:solidFill>
+              <a:latin typeface="Calibri"/>
+            </a:endParaRPr>
+          </a:p>
+        </p:txBody>
+      </p:sp>
+      <p:sp>
+        <p:nvSpPr>
+          <p:cNvPr id="3" name="Rectangle 2">
+            <a:extLst>
+              <a:ext uri="{FF2B5EF4-FFF2-40B4-BE49-F238E27FC236}">
+                <a16:creationId xmlns:a16="http://schemas.microsoft.com/office/drawing/2014/main" id="{7F44265A-A3E4-8A26-522E-A5E4681CA5FA}"/>
+              </a:ext>
+            </a:extLst>
+          </p:cNvPr>
+          <p:cNvSpPr/>
+          <p:nvPr/>
+        </p:nvSpPr>
+        <p:spPr>
+          <a:xfrm>
+            <a:off x="457200" y="987552"/>
+            <a:ext cx="8229600" cy="36576"/>
+          </a:xfrm>
+          <a:prstGeom prst="rect">
+            <a:avLst/>
+          </a:prstGeom>
+          <a:solidFill>
+            <a:srgbClr val="0077A8"/>
+          </a:solidFill>
+          <a:ln>
+            <a:noFill/>
+          </a:ln>
+        </p:spPr>
+        <p:style>
+          <a:lnRef idx="1">
+            <a:schemeClr val="accent1"/>
+          </a:lnRef>
+          <a:fillRef idx="3">
+            <a:schemeClr val="accent1"/>
+          </a:fillRef>
+          <a:effectRef idx="2">
+            <a:schemeClr val="accent1"/>
+          </a:effectRef>
+          <a:fontRef idx="minor">
+            <a:schemeClr val="lt1"/>
+          </a:fontRef>
+        </p:style>
+        <p:txBody>
+          <a:bodyPr rtlCol="0" anchor="ctr"/>
+          <a:lstStyle/>
+          <a:p>
+            <a:pPr algn="ctr"/>
+            <a:endParaRPr/>
+          </a:p>
+        </p:txBody>
+      </p:sp>
+      <p:sp>
+        <p:nvSpPr>
+          <p:cNvPr id="5" name="Slide Number Placeholder 4">
+            <a:extLst>
+              <a:ext uri="{FF2B5EF4-FFF2-40B4-BE49-F238E27FC236}">
                 <a16:creationId xmlns:a16="http://schemas.microsoft.com/office/drawing/2014/main" id="{335C0FAC-5E81-3AD0-08B8-CBD225BF8A19}"/>
               </a:ext>
             </a:extLst>
@@ -30885,7 +32157,7 @@
           <a:p>
             <a:fld id="{C1FF6DA9-008F-8B48-92A6-B652298478BF}" type="slidenum">
               <a:rPr lang="en-US" smtClean="0"/>
-              <a:t>44</a:t>
+              <a:t>45</a:t>
             </a:fld>
             <a:endParaRPr lang="en-US"/>
           </a:p>
@@ -31825,7 +33097,7 @@
 </p:sld>
 </file>
 
-<file path=ppt/slides/slide45.xml><?xml version="1.0" encoding="utf-8"?>
+<file path=ppt/slides/slide46.xml><?xml version="1.0" encoding="utf-8"?>
 <p:sld xmlns:a="http://schemas.openxmlformats.org/drawingml/2006/main" xmlns:r="http://schemas.openxmlformats.org/officeDocument/2006/relationships" xmlns:p="http://schemas.openxmlformats.org/presentationml/2006/main">
   <p:cSld>
     <p:spTree>
@@ -31968,7 +33240,7 @@
           <a:p>
             <a:fld id="{C1FF6DA9-008F-8B48-92A6-B652298478BF}" type="slidenum">
               <a:rPr lang="en-US" smtClean="0"/>
-              <a:t>45</a:t>
+              <a:t>46</a:t>
             </a:fld>
             <a:endParaRPr lang="en-US"/>
           </a:p>
@@ -31988,8 +33260,8 @@
         </p:nvSpPr>
         <p:spPr>
           <a:xfrm>
-            <a:off x="457200" y="1193753"/>
-            <a:ext cx="8046720" cy="3785652"/>
+            <a:off x="457200" y="1106667"/>
+            <a:ext cx="8046720" cy="4093428"/>
           </a:xfrm>
           <a:prstGeom prst="rect">
             <a:avLst/>
@@ -32112,7 +33384,7 @@
                 </a:solidFill>
                 <a:latin typeface="Calibri"/>
               </a:rPr>
-              <a:t>Create a new constraint with its unit tests (be creative!)</a:t>
+              <a:t>Create a new constraint with its unit tests (be creative!) (ex: create a constraint that prohibits products with calories &lt; 60)</a:t>
             </a:r>
           </a:p>
           <a:p>
@@ -32171,7 +33443,7 @@
 </p:sld>
 </file>
 
-<file path=ppt/slides/slide46.xml><?xml version="1.0" encoding="utf-8"?>
+<file path=ppt/slides/slide47.xml><?xml version="1.0" encoding="utf-8"?>
 <p:sld xmlns:a="http://schemas.openxmlformats.org/drawingml/2006/main" xmlns:r="http://schemas.openxmlformats.org/officeDocument/2006/relationships" xmlns:p="http://schemas.openxmlformats.org/presentationml/2006/main">
   <p:cSld>
     <p:bg>
@@ -32298,7 +33570,7 @@
           <a:p>
             <a:fld id="{C1FF6DA9-008F-8B48-92A6-B652298478BF}" type="slidenum">
               <a:rPr lang="en-US" smtClean="0"/>
-              <a:t>46</a:t>
+              <a:t>47</a:t>
             </a:fld>
             <a:endParaRPr lang="en-US"/>
           </a:p>
